--- a/docs/pptx/carbo/jx-carbo-linsubhr-sens-akikdigo.pptx
+++ b/docs/pptx/carbo/jx-carbo-linsubhr-sens-akikdigo.pptx
@@ -5339,7 +5339,7 @@
           <p:spPr>
             <a:xfrm>
               <a:off x="817517" y="1896563"/>
-              <a:ext cx="6169365" cy="82021"/>
+              <a:ext cx="6833128" cy="82021"/>
             </a:xfrm>
             <a:prstGeom prst="rect">
               <a:avLst/>
@@ -5371,7 +5371,7 @@
                   <a:latin typeface="Helvetica"/>
                   <a:cs typeface="Helvetica"/>
                 </a:rPr>
-                <a:t>subHR per 0.1 ratio decline: 1.15 (0.96-1.38), p = 0.126  |  per IQR decline (Δ = 0.28): 1.48 (0.90-2.46)  |  IQR: [0.70, 0.98]</a:t>
+                <a:t>subHR per 0.1 ratio decline: 1.15 (0.96-1.38), p_Bonf = 0.755 (n = 6)  |  per IQR decline (Δ = 0.28): 1.48 (0.90-2.46)  |  IQR: [0.70, 0.98]</a:t>
               </a:r>
             </a:p>
           </p:txBody>

--- a/docs/pptx/carbo/jx-carbo-linsubhr-sens-akikdigo.pptx
+++ b/docs/pptx/carbo/jx-carbo-linsubhr-sens-akikdigo.pptx
@@ -5062,8 +5062,8 @@
           </p:nvSpPr>
           <p:spPr>
             <a:xfrm>
-              <a:off x="2155289" y="5785772"/>
-              <a:ext cx="155356" cy="80101"/>
+              <a:off x="2152181" y="5785772"/>
+              <a:ext cx="161574" cy="80101"/>
             </a:xfrm>
             <a:prstGeom prst="rect">
               <a:avLst/>
@@ -5095,7 +5095,7 @@
                   <a:latin typeface="Helvetica"/>
                   <a:cs typeface="Helvetica"/>
                 </a:rPr>
-                <a:t>0.6</a:t>
+                <a:t>-40</a:t>
               </a:r>
             </a:p>
           </p:txBody>
@@ -5108,8 +5108,8 @@
           </p:nvSpPr>
           <p:spPr>
             <a:xfrm>
-              <a:off x="3887213" y="5785772"/>
-              <a:ext cx="155356" cy="80101"/>
+              <a:off x="3884104" y="5785772"/>
+              <a:ext cx="161574" cy="80101"/>
             </a:xfrm>
             <a:prstGeom prst="rect">
               <a:avLst/>
@@ -5141,7 +5141,7 @@
                   <a:latin typeface="Helvetica"/>
                   <a:cs typeface="Helvetica"/>
                 </a:rPr>
-                <a:t>0.8</a:t>
+                <a:t>-20</a:t>
               </a:r>
             </a:p>
           </p:txBody>
@@ -5154,8 +5154,8 @@
           </p:nvSpPr>
           <p:spPr>
             <a:xfrm>
-              <a:off x="5619136" y="5785772"/>
-              <a:ext cx="155356" cy="80101"/>
+              <a:off x="5665725" y="5785772"/>
+              <a:ext cx="62179" cy="80101"/>
             </a:xfrm>
             <a:prstGeom prst="rect">
               <a:avLst/>
@@ -5187,7 +5187,7 @@
                   <a:latin typeface="Helvetica"/>
                   <a:cs typeface="Helvetica"/>
                 </a:rPr>
-                <a:t>1.0</a:t>
+                <a:t>0</a:t>
               </a:r>
             </a:p>
           </p:txBody>
@@ -5200,8 +5200,8 @@
           </p:nvSpPr>
           <p:spPr>
             <a:xfrm>
-              <a:off x="7351060" y="5785772"/>
-              <a:ext cx="155356" cy="80101"/>
+              <a:off x="7366559" y="5785772"/>
+              <a:ext cx="124358" cy="80101"/>
             </a:xfrm>
             <a:prstGeom prst="rect">
               <a:avLst/>
@@ -5233,7 +5233,7 @@
                   <a:latin typeface="Helvetica"/>
                   <a:cs typeface="Helvetica"/>
                 </a:rPr>
-                <a:t>1.2</a:t>
+                <a:t>20</a:t>
               </a:r>
             </a:p>
           </p:txBody>
@@ -5246,8 +5246,8 @@
           </p:nvSpPr>
           <p:spPr>
             <a:xfrm>
-              <a:off x="2691419" y="5925448"/>
-              <a:ext cx="4051889" cy="100218"/>
+              <a:off x="1561815" y="5925448"/>
+              <a:ext cx="6311097" cy="100218"/>
             </a:xfrm>
             <a:prstGeom prst="rect">
               <a:avLst/>
@@ -5279,7 +5279,7 @@
                   <a:latin typeface="Helvetica"/>
                   <a:cs typeface="Helvetica"/>
                 </a:rPr>
-                <a:t>Sensitivity eGFR Ratio (CKD-EPI 2012 CysC / CKD-EPI 2021 Cr)</a:t>
+                <a:t>Sensitivity eGFR Difference (%): 100 × (CKD-EPI 2012 CysC − CKD-EPI 2021 Cr) / CKD-EPI 2021 Cr</a:t>
               </a:r>
             </a:p>
           </p:txBody>
@@ -5339,7 +5339,7 @@
           <p:spPr>
             <a:xfrm>
               <a:off x="817517" y="1896563"/>
-              <a:ext cx="6833128" cy="82021"/>
+              <a:ext cx="6959864" cy="82021"/>
             </a:xfrm>
             <a:prstGeom prst="rect">
               <a:avLst/>
@@ -5371,7 +5371,7 @@
                   <a:latin typeface="Helvetica"/>
                   <a:cs typeface="Helvetica"/>
                 </a:rPr>
-                <a:t>subHR per 0.1 ratio decline: 1.15 (0.96-1.38), p_Bonf = 0.755 (n = 6)  |  per IQR decline (Δ = 0.28): 1.48 (0.90-2.46)  |  IQR: [0.70, 0.98]</a:t>
+                <a:t>subHR per 10 % decline: 1.15 (0.96-1.38), p_Bonf = 0.755 (n = 6)  |  per IQR decline (Δ = 28.0 %): 1.48 (0.90-2.46)  |  IQR: [-30.0, -2.0] %</a:t>
               </a:r>
             </a:p>
           </p:txBody>

--- a/docs/pptx/carbo/jx-carbo-linsubhr-sens-akikdigo.pptx
+++ b/docs/pptx/carbo/jx-carbo-linsubhr-sens-akikdigo.pptx
@@ -2265,34 +2265,26 @@
         </p:sp>
         <p:sp>
           <p:nvSpPr>
-            <p:cNvPr id="4" name="pl4"/>
+            <p:cNvPr id="4" name="rc4"/>
             <p:cNvSpPr/>
             <p:nvPr/>
           </p:nvSpPr>
           <p:spPr>
             <a:xfrm>
-              <a:off x="817517" y="5142518"/>
-              <a:ext cx="7799693" cy="0"/>
+              <a:off x="457200" y="1600200"/>
+              <a:ext cx="8229600" cy="4525962"/>
             </a:xfrm>
-            <a:custGeom>
+            <a:prstGeom prst="rect">
               <a:avLst/>
-              <a:pathLst>
-                <a:path w="7799693" h="0">
-                  <a:moveTo>
-                    <a:pt x="0" y="0"/>
-                  </a:moveTo>
-                  <a:lnTo>
-                    <a:pt x="7799693" y="0"/>
-                  </a:lnTo>
-                  <a:lnTo>
-                    <a:pt x="7799693" y="0"/>
-                  </a:lnTo>
-                </a:path>
-              </a:pathLst>
-            </a:custGeom>
-            <a:ln w="6775" cap="flat">
+            </a:prstGeom>
+            <a:solidFill>
+              <a:srgbClr val="FFFFFF">
+                <a:alpha val="100000"/>
+              </a:srgbClr>
+            </a:solidFill>
+            <a:ln w="13550" cap="rnd">
               <a:solidFill>
-                <a:srgbClr val="EBEBEB">
+                <a:srgbClr val="FFFFFF">
                   <a:alpha val="100000"/>
                 </a:srgbClr>
               </a:solidFill>
@@ -2314,21 +2306,21 @@
           </p:nvSpPr>
           <p:spPr>
             <a:xfrm>
-              <a:off x="817517" y="4313054"/>
-              <a:ext cx="7799693" cy="0"/>
+              <a:off x="887106" y="3250627"/>
+              <a:ext cx="7660515" cy="0"/>
             </a:xfrm>
             <a:custGeom>
               <a:avLst/>
               <a:pathLst>
-                <a:path w="7799693" h="0">
+                <a:path w="7660515" h="0">
                   <a:moveTo>
                     <a:pt x="0" y="0"/>
                   </a:moveTo>
                   <a:lnTo>
-                    <a:pt x="7799693" y="0"/>
-                  </a:lnTo>
-                  <a:lnTo>
-                    <a:pt x="7799693" y="0"/>
+                    <a:pt x="7660515" y="0"/>
+                  </a:lnTo>
+                  <a:lnTo>
+                    <a:pt x="7660515" y="0"/>
                   </a:lnTo>
                 </a:path>
               </a:pathLst>
@@ -2357,21 +2349,21 @@
           </p:nvSpPr>
           <p:spPr>
             <a:xfrm>
-              <a:off x="817517" y="3483591"/>
-              <a:ext cx="7799693" cy="0"/>
+              <a:off x="887106" y="2951293"/>
+              <a:ext cx="7660515" cy="0"/>
             </a:xfrm>
             <a:custGeom>
               <a:avLst/>
               <a:pathLst>
-                <a:path w="7799693" h="0">
+                <a:path w="7660515" h="0">
                   <a:moveTo>
                     <a:pt x="0" y="0"/>
                   </a:moveTo>
                   <a:lnTo>
-                    <a:pt x="7799693" y="0"/>
-                  </a:lnTo>
-                  <a:lnTo>
-                    <a:pt x="7799693" y="0"/>
+                    <a:pt x="7660515" y="0"/>
+                  </a:lnTo>
+                  <a:lnTo>
+                    <a:pt x="7660515" y="0"/>
                   </a:lnTo>
                 </a:path>
               </a:pathLst>
@@ -2400,21 +2392,21 @@
           </p:nvSpPr>
           <p:spPr>
             <a:xfrm>
-              <a:off x="817517" y="2654127"/>
-              <a:ext cx="7799693" cy="0"/>
+              <a:off x="887106" y="2651959"/>
+              <a:ext cx="7660515" cy="0"/>
             </a:xfrm>
             <a:custGeom>
               <a:avLst/>
               <a:pathLst>
-                <a:path w="7799693" h="0">
+                <a:path w="7660515" h="0">
                   <a:moveTo>
                     <a:pt x="0" y="0"/>
                   </a:moveTo>
                   <a:lnTo>
-                    <a:pt x="7799693" y="0"/>
-                  </a:lnTo>
-                  <a:lnTo>
-                    <a:pt x="7799693" y="0"/>
+                    <a:pt x="7660515" y="0"/>
+                  </a:lnTo>
+                  <a:lnTo>
+                    <a:pt x="7660515" y="0"/>
                   </a:lnTo>
                 </a:path>
               </a:pathLst>
@@ -2443,21 +2435,21 @@
           </p:nvSpPr>
           <p:spPr>
             <a:xfrm>
-              <a:off x="1367006" y="2073503"/>
-              <a:ext cx="0" cy="3649639"/>
+              <a:off x="887106" y="2352625"/>
+              <a:ext cx="7660515" cy="0"/>
             </a:xfrm>
             <a:custGeom>
               <a:avLst/>
               <a:pathLst>
-                <a:path w="0" h="3649639">
+                <a:path w="7660515" h="0">
                   <a:moveTo>
-                    <a:pt x="0" y="3649639"/>
+                    <a:pt x="0" y="0"/>
                   </a:moveTo>
                   <a:lnTo>
-                    <a:pt x="0" y="0"/>
-                  </a:lnTo>
-                  <a:lnTo>
-                    <a:pt x="0" y="0"/>
+                    <a:pt x="7660515" y="0"/>
+                  </a:lnTo>
+                  <a:lnTo>
+                    <a:pt x="7660515" y="0"/>
                   </a:lnTo>
                 </a:path>
               </a:pathLst>
@@ -2486,15 +2478,15 @@
           </p:nvSpPr>
           <p:spPr>
             <a:xfrm>
-              <a:off x="3098929" y="2073503"/>
-              <a:ext cx="0" cy="3649639"/>
+              <a:off x="1426790" y="2143092"/>
+              <a:ext cx="0" cy="1317069"/>
             </a:xfrm>
             <a:custGeom>
               <a:avLst/>
               <a:pathLst>
-                <a:path w="0" h="3649639">
+                <a:path w="0" h="1317069">
                   <a:moveTo>
-                    <a:pt x="0" y="3649639"/>
+                    <a:pt x="0" y="1317069"/>
                   </a:moveTo>
                   <a:lnTo>
                     <a:pt x="0" y="0"/>
@@ -2529,15 +2521,15 @@
           </p:nvSpPr>
           <p:spPr>
             <a:xfrm>
-              <a:off x="4830853" y="2073503"/>
-              <a:ext cx="0" cy="3649639"/>
+              <a:off x="3127809" y="2143092"/>
+              <a:ext cx="0" cy="1317069"/>
             </a:xfrm>
             <a:custGeom>
               <a:avLst/>
               <a:pathLst>
-                <a:path w="0" h="3649639">
+                <a:path w="0" h="1317069">
                   <a:moveTo>
-                    <a:pt x="0" y="3649639"/>
+                    <a:pt x="0" y="1317069"/>
                   </a:moveTo>
                   <a:lnTo>
                     <a:pt x="0" y="0"/>
@@ -2572,15 +2564,15 @@
           </p:nvSpPr>
           <p:spPr>
             <a:xfrm>
-              <a:off x="6562776" y="2073503"/>
-              <a:ext cx="0" cy="3649639"/>
+              <a:off x="4828828" y="2143092"/>
+              <a:ext cx="0" cy="1317069"/>
             </a:xfrm>
             <a:custGeom>
               <a:avLst/>
               <a:pathLst>
-                <a:path w="0" h="3649639">
+                <a:path w="0" h="1317069">
                   <a:moveTo>
-                    <a:pt x="0" y="3649639"/>
+                    <a:pt x="0" y="1317069"/>
                   </a:moveTo>
                   <a:lnTo>
                     <a:pt x="0" y="0"/>
@@ -2615,15 +2607,15 @@
           </p:nvSpPr>
           <p:spPr>
             <a:xfrm>
-              <a:off x="8294700" y="2073503"/>
-              <a:ext cx="0" cy="3649639"/>
+              <a:off x="6529847" y="2143092"/>
+              <a:ext cx="0" cy="1317069"/>
             </a:xfrm>
             <a:custGeom>
               <a:avLst/>
               <a:pathLst>
-                <a:path w="0" h="3649639">
+                <a:path w="0" h="1317069">
                   <a:moveTo>
-                    <a:pt x="0" y="3649639"/>
+                    <a:pt x="0" y="1317069"/>
                   </a:moveTo>
                   <a:lnTo>
                     <a:pt x="0" y="0"/>
@@ -2658,26 +2650,26 @@
           </p:nvSpPr>
           <p:spPr>
             <a:xfrm>
-              <a:off x="817517" y="5557249"/>
-              <a:ext cx="7799693" cy="0"/>
+              <a:off x="8230866" y="2143092"/>
+              <a:ext cx="0" cy="1317069"/>
             </a:xfrm>
             <a:custGeom>
               <a:avLst/>
               <a:pathLst>
-                <a:path w="7799693" h="0">
+                <a:path w="0" h="1317069">
                   <a:moveTo>
+                    <a:pt x="0" y="1317069"/>
+                  </a:moveTo>
+                  <a:lnTo>
                     <a:pt x="0" y="0"/>
-                  </a:moveTo>
-                  <a:lnTo>
-                    <a:pt x="7799693" y="0"/>
-                  </a:lnTo>
-                  <a:lnTo>
-                    <a:pt x="7799693" y="0"/>
+                  </a:lnTo>
+                  <a:lnTo>
+                    <a:pt x="0" y="0"/>
                   </a:lnTo>
                 </a:path>
               </a:pathLst>
             </a:custGeom>
-            <a:ln w="13550" cap="flat">
+            <a:ln w="6775" cap="flat">
               <a:solidFill>
                 <a:srgbClr val="EBEBEB">
                   <a:alpha val="100000"/>
@@ -2701,21 +2693,21 @@
           </p:nvSpPr>
           <p:spPr>
             <a:xfrm>
-              <a:off x="817517" y="4727786"/>
-              <a:ext cx="7799693" cy="0"/>
+              <a:off x="887106" y="3400294"/>
+              <a:ext cx="7660515" cy="0"/>
             </a:xfrm>
             <a:custGeom>
               <a:avLst/>
               <a:pathLst>
-                <a:path w="7799693" h="0">
+                <a:path w="7660515" h="0">
                   <a:moveTo>
                     <a:pt x="0" y="0"/>
                   </a:moveTo>
                   <a:lnTo>
-                    <a:pt x="7799693" y="0"/>
-                  </a:lnTo>
-                  <a:lnTo>
-                    <a:pt x="7799693" y="0"/>
+                    <a:pt x="7660515" y="0"/>
+                  </a:lnTo>
+                  <a:lnTo>
+                    <a:pt x="7660515" y="0"/>
                   </a:lnTo>
                 </a:path>
               </a:pathLst>
@@ -2744,21 +2736,21 @@
           </p:nvSpPr>
           <p:spPr>
             <a:xfrm>
-              <a:off x="817517" y="3898322"/>
-              <a:ext cx="7799693" cy="0"/>
+              <a:off x="887106" y="3100960"/>
+              <a:ext cx="7660515" cy="0"/>
             </a:xfrm>
             <a:custGeom>
               <a:avLst/>
               <a:pathLst>
-                <a:path w="7799693" h="0">
+                <a:path w="7660515" h="0">
                   <a:moveTo>
                     <a:pt x="0" y="0"/>
                   </a:moveTo>
                   <a:lnTo>
-                    <a:pt x="7799693" y="0"/>
-                  </a:lnTo>
-                  <a:lnTo>
-                    <a:pt x="7799693" y="0"/>
+                    <a:pt x="7660515" y="0"/>
+                  </a:lnTo>
+                  <a:lnTo>
+                    <a:pt x="7660515" y="0"/>
                   </a:lnTo>
                 </a:path>
               </a:pathLst>
@@ -2787,21 +2779,21 @@
           </p:nvSpPr>
           <p:spPr>
             <a:xfrm>
-              <a:off x="817517" y="3068859"/>
-              <a:ext cx="7799693" cy="0"/>
+              <a:off x="887106" y="2801626"/>
+              <a:ext cx="7660515" cy="0"/>
             </a:xfrm>
             <a:custGeom>
               <a:avLst/>
               <a:pathLst>
-                <a:path w="7799693" h="0">
+                <a:path w="7660515" h="0">
                   <a:moveTo>
                     <a:pt x="0" y="0"/>
                   </a:moveTo>
                   <a:lnTo>
-                    <a:pt x="7799693" y="0"/>
-                  </a:lnTo>
-                  <a:lnTo>
-                    <a:pt x="7799693" y="0"/>
+                    <a:pt x="7660515" y="0"/>
+                  </a:lnTo>
+                  <a:lnTo>
+                    <a:pt x="7660515" y="0"/>
                   </a:lnTo>
                 </a:path>
               </a:pathLst>
@@ -2830,21 +2822,21 @@
           </p:nvSpPr>
           <p:spPr>
             <a:xfrm>
-              <a:off x="817517" y="2239395"/>
-              <a:ext cx="7799693" cy="0"/>
+              <a:off x="887106" y="2502292"/>
+              <a:ext cx="7660515" cy="0"/>
             </a:xfrm>
             <a:custGeom>
               <a:avLst/>
               <a:pathLst>
-                <a:path w="7799693" h="0">
+                <a:path w="7660515" h="0">
                   <a:moveTo>
                     <a:pt x="0" y="0"/>
                   </a:moveTo>
                   <a:lnTo>
-                    <a:pt x="7799693" y="0"/>
-                  </a:lnTo>
-                  <a:lnTo>
-                    <a:pt x="7799693" y="0"/>
+                    <a:pt x="7660515" y="0"/>
+                  </a:lnTo>
+                  <a:lnTo>
+                    <a:pt x="7660515" y="0"/>
                   </a:lnTo>
                 </a:path>
               </a:pathLst>
@@ -2873,21 +2865,21 @@
           </p:nvSpPr>
           <p:spPr>
             <a:xfrm>
-              <a:off x="2232968" y="2073503"/>
-              <a:ext cx="0" cy="3649639"/>
+              <a:off x="887106" y="2202958"/>
+              <a:ext cx="7660515" cy="0"/>
             </a:xfrm>
             <a:custGeom>
               <a:avLst/>
               <a:pathLst>
-                <a:path w="0" h="3649639">
+                <a:path w="7660515" h="0">
                   <a:moveTo>
-                    <a:pt x="0" y="3649639"/>
+                    <a:pt x="0" y="0"/>
                   </a:moveTo>
                   <a:lnTo>
-                    <a:pt x="0" y="0"/>
-                  </a:lnTo>
-                  <a:lnTo>
-                    <a:pt x="0" y="0"/>
+                    <a:pt x="7660515" y="0"/>
+                  </a:lnTo>
+                  <a:lnTo>
+                    <a:pt x="7660515" y="0"/>
                   </a:lnTo>
                 </a:path>
               </a:pathLst>
@@ -2916,15 +2908,15 @@
           </p:nvSpPr>
           <p:spPr>
             <a:xfrm>
-              <a:off x="3964891" y="2073503"/>
-              <a:ext cx="0" cy="3649639"/>
+              <a:off x="2277299" y="2143092"/>
+              <a:ext cx="0" cy="1317069"/>
             </a:xfrm>
             <a:custGeom>
               <a:avLst/>
               <a:pathLst>
-                <a:path w="0" h="3649639">
+                <a:path w="0" h="1317069">
                   <a:moveTo>
-                    <a:pt x="0" y="3649639"/>
+                    <a:pt x="0" y="1317069"/>
                   </a:moveTo>
                   <a:lnTo>
                     <a:pt x="0" y="0"/>
@@ -2959,15 +2951,15 @@
           </p:nvSpPr>
           <p:spPr>
             <a:xfrm>
-              <a:off x="5696815" y="2073503"/>
-              <a:ext cx="0" cy="3649639"/>
+              <a:off x="3978318" y="2143092"/>
+              <a:ext cx="0" cy="1317069"/>
             </a:xfrm>
             <a:custGeom>
               <a:avLst/>
               <a:pathLst>
-                <a:path w="0" h="3649639">
+                <a:path w="0" h="1317069">
                   <a:moveTo>
-                    <a:pt x="0" y="3649639"/>
+                    <a:pt x="0" y="1317069"/>
                   </a:moveTo>
                   <a:lnTo>
                     <a:pt x="0" y="0"/>
@@ -3002,15 +2994,15 @@
           </p:nvSpPr>
           <p:spPr>
             <a:xfrm>
-              <a:off x="7428738" y="2073503"/>
-              <a:ext cx="0" cy="3649639"/>
+              <a:off x="5679337" y="2143092"/>
+              <a:ext cx="0" cy="1317069"/>
             </a:xfrm>
             <a:custGeom>
               <a:avLst/>
               <a:pathLst>
-                <a:path w="0" h="3649639">
+                <a:path w="0" h="1317069">
                   <a:moveTo>
-                    <a:pt x="0" y="3649639"/>
+                    <a:pt x="0" y="1317069"/>
                   </a:moveTo>
                   <a:lnTo>
                     <a:pt x="0" y="0"/>
@@ -3039,618 +3031,661 @@
         </p:sp>
         <p:sp>
           <p:nvSpPr>
-            <p:cNvPr id="22" name="pg22"/>
+            <p:cNvPr id="22" name="pl22"/>
             <p:cNvSpPr/>
             <p:nvPr/>
           </p:nvSpPr>
           <p:spPr>
             <a:xfrm>
-              <a:off x="1172049" y="2926832"/>
-              <a:ext cx="7090630" cy="2440635"/>
+              <a:off x="7380356" y="2143092"/>
+              <a:ext cx="0" cy="1317069"/>
             </a:xfrm>
             <a:custGeom>
               <a:avLst/>
               <a:pathLst>
-                <a:path w="7090630" h="2440635">
+                <a:path w="0" h="1317069">
+                  <a:moveTo>
+                    <a:pt x="0" y="1317069"/>
+                  </a:moveTo>
+                  <a:lnTo>
+                    <a:pt x="0" y="0"/>
+                  </a:lnTo>
+                  <a:lnTo>
+                    <a:pt x="0" y="0"/>
+                  </a:lnTo>
+                </a:path>
+              </a:pathLst>
+            </a:custGeom>
+            <a:ln w="13550" cap="flat">
+              <a:solidFill>
+                <a:srgbClr val="EBEBEB">
+                  <a:alpha val="100000"/>
+                </a:srgbClr>
+              </a:solidFill>
+              <a:prstDash val="solid"/>
+              <a:round/>
+            </a:ln>
+          </p:spPr>
+          <p:txBody>
+            <a:bodyPr/>
+            <a:lstStyle/>
+            <a:p/>
+          </p:txBody>
+        </p:sp>
+        <p:sp>
+          <p:nvSpPr>
+            <p:cNvPr id="23" name="pg23"/>
+            <p:cNvSpPr/>
+            <p:nvPr/>
+          </p:nvSpPr>
+          <p:spPr>
+            <a:xfrm>
+              <a:off x="1235312" y="2451038"/>
+              <a:ext cx="6964104" cy="880767"/>
+            </a:xfrm>
+            <a:custGeom>
+              <a:avLst/>
+              <a:pathLst>
+                <a:path w="6964104" h="880767">
                   <a:moveTo>
                     <a:pt x="0" y="0"/>
                   </a:moveTo>
                   <a:lnTo>
-                    <a:pt x="71622" y="68933"/>
-                  </a:lnTo>
-                  <a:lnTo>
-                    <a:pt x="143245" y="136060"/>
-                  </a:lnTo>
-                  <a:lnTo>
-                    <a:pt x="214867" y="201427"/>
-                  </a:lnTo>
-                  <a:lnTo>
-                    <a:pt x="286490" y="265082"/>
-                  </a:lnTo>
-                  <a:lnTo>
-                    <a:pt x="358112" y="327069"/>
-                  </a:lnTo>
-                  <a:lnTo>
-                    <a:pt x="429735" y="387431"/>
-                  </a:lnTo>
-                  <a:lnTo>
-                    <a:pt x="501357" y="446211"/>
-                  </a:lnTo>
-                  <a:lnTo>
-                    <a:pt x="572980" y="503451"/>
-                  </a:lnTo>
-                  <a:lnTo>
-                    <a:pt x="644602" y="559191"/>
-                  </a:lnTo>
-                  <a:lnTo>
-                    <a:pt x="716225" y="613470"/>
-                  </a:lnTo>
-                  <a:lnTo>
-                    <a:pt x="787847" y="666326"/>
-                  </a:lnTo>
-                  <a:lnTo>
-                    <a:pt x="859470" y="717798"/>
-                  </a:lnTo>
-                  <a:lnTo>
-                    <a:pt x="931092" y="767920"/>
-                  </a:lnTo>
-                  <a:lnTo>
-                    <a:pt x="1002715" y="816729"/>
-                  </a:lnTo>
-                  <a:lnTo>
-                    <a:pt x="1074337" y="864259"/>
-                  </a:lnTo>
-                  <a:lnTo>
-                    <a:pt x="1145960" y="910544"/>
-                  </a:lnTo>
-                  <a:lnTo>
-                    <a:pt x="1217582" y="955615"/>
-                  </a:lnTo>
-                  <a:lnTo>
-                    <a:pt x="1289205" y="999505"/>
-                  </a:lnTo>
-                  <a:lnTo>
-                    <a:pt x="1360827" y="1042245"/>
-                  </a:lnTo>
-                  <a:lnTo>
-                    <a:pt x="1432450" y="1083865"/>
-                  </a:lnTo>
-                  <a:lnTo>
-                    <a:pt x="1504073" y="1124395"/>
-                  </a:lnTo>
-                  <a:lnTo>
-                    <a:pt x="1575695" y="1163862"/>
-                  </a:lnTo>
-                  <a:lnTo>
-                    <a:pt x="1647318" y="1202295"/>
-                  </a:lnTo>
-                  <a:lnTo>
-                    <a:pt x="1718940" y="1239720"/>
-                  </a:lnTo>
-                  <a:lnTo>
-                    <a:pt x="1790563" y="1276165"/>
-                  </a:lnTo>
-                  <a:lnTo>
-                    <a:pt x="1862185" y="1311655"/>
-                  </a:lnTo>
-                  <a:lnTo>
-                    <a:pt x="1933808" y="1346215"/>
-                  </a:lnTo>
-                  <a:lnTo>
-                    <a:pt x="2005430" y="1379869"/>
-                  </a:lnTo>
-                  <a:lnTo>
-                    <a:pt x="2077053" y="1412641"/>
-                  </a:lnTo>
-                  <a:lnTo>
-                    <a:pt x="2148675" y="1444555"/>
-                  </a:lnTo>
-                  <a:lnTo>
-                    <a:pt x="2220298" y="1475632"/>
-                  </a:lnTo>
-                  <a:lnTo>
-                    <a:pt x="2291920" y="1505894"/>
-                  </a:lnTo>
-                  <a:lnTo>
-                    <a:pt x="2363543" y="1535364"/>
-                  </a:lnTo>
-                  <a:lnTo>
-                    <a:pt x="2435165" y="1564061"/>
-                  </a:lnTo>
-                  <a:lnTo>
-                    <a:pt x="2506788" y="1592006"/>
-                  </a:lnTo>
-                  <a:lnTo>
-                    <a:pt x="2578410" y="1619219"/>
-                  </a:lnTo>
-                  <a:lnTo>
-                    <a:pt x="2650033" y="1645719"/>
-                  </a:lnTo>
-                  <a:lnTo>
-                    <a:pt x="2721655" y="1671524"/>
-                  </a:lnTo>
-                  <a:lnTo>
-                    <a:pt x="2793278" y="1696653"/>
-                  </a:lnTo>
-                  <a:lnTo>
-                    <a:pt x="2864901" y="1721123"/>
-                  </a:lnTo>
-                  <a:lnTo>
-                    <a:pt x="2936523" y="1744953"/>
-                  </a:lnTo>
-                  <a:lnTo>
-                    <a:pt x="3008146" y="1768157"/>
-                  </a:lnTo>
-                  <a:lnTo>
-                    <a:pt x="3079768" y="1790754"/>
-                  </a:lnTo>
-                  <a:lnTo>
-                    <a:pt x="3151391" y="1799491"/>
-                  </a:lnTo>
-                  <a:lnTo>
-                    <a:pt x="3223013" y="1796774"/>
-                  </a:lnTo>
-                  <a:lnTo>
-                    <a:pt x="3294636" y="1794049"/>
-                  </a:lnTo>
-                  <a:lnTo>
-                    <a:pt x="3366258" y="1791314"/>
-                  </a:lnTo>
-                  <a:lnTo>
-                    <a:pt x="3437881" y="1788571"/>
-                  </a:lnTo>
-                  <a:lnTo>
-                    <a:pt x="3509503" y="1785819"/>
-                  </a:lnTo>
-                  <a:lnTo>
-                    <a:pt x="3581126" y="1783057"/>
-                  </a:lnTo>
-                  <a:lnTo>
-                    <a:pt x="3652748" y="1780287"/>
-                  </a:lnTo>
-                  <a:lnTo>
-                    <a:pt x="3724371" y="1777507"/>
-                  </a:lnTo>
-                  <a:lnTo>
-                    <a:pt x="3795993" y="1774719"/>
-                  </a:lnTo>
-                  <a:lnTo>
-                    <a:pt x="3867616" y="1771921"/>
-                  </a:lnTo>
-                  <a:lnTo>
-                    <a:pt x="3939238" y="1769114"/>
-                  </a:lnTo>
-                  <a:lnTo>
-                    <a:pt x="4010861" y="1766298"/>
-                  </a:lnTo>
-                  <a:lnTo>
-                    <a:pt x="4082483" y="1763473"/>
-                  </a:lnTo>
-                  <a:lnTo>
-                    <a:pt x="4154106" y="1760638"/>
-                  </a:lnTo>
-                  <a:lnTo>
-                    <a:pt x="4225729" y="1757795"/>
-                  </a:lnTo>
-                  <a:lnTo>
-                    <a:pt x="4297351" y="1754942"/>
-                  </a:lnTo>
-                  <a:lnTo>
-                    <a:pt x="4368974" y="1752079"/>
-                  </a:lnTo>
-                  <a:lnTo>
-                    <a:pt x="4440596" y="1749208"/>
-                  </a:lnTo>
-                  <a:lnTo>
-                    <a:pt x="4512219" y="1746327"/>
-                  </a:lnTo>
-                  <a:lnTo>
-                    <a:pt x="4583841" y="1743436"/>
-                  </a:lnTo>
-                  <a:lnTo>
-                    <a:pt x="4655464" y="1740536"/>
-                  </a:lnTo>
-                  <a:lnTo>
-                    <a:pt x="4727086" y="1737627"/>
-                  </a:lnTo>
-                  <a:lnTo>
-                    <a:pt x="4798709" y="1734708"/>
-                  </a:lnTo>
-                  <a:lnTo>
-                    <a:pt x="4870331" y="1731779"/>
-                  </a:lnTo>
-                  <a:lnTo>
-                    <a:pt x="4941954" y="1728841"/>
-                  </a:lnTo>
-                  <a:lnTo>
-                    <a:pt x="5013576" y="1725893"/>
-                  </a:lnTo>
-                  <a:lnTo>
-                    <a:pt x="5085199" y="1722936"/>
-                  </a:lnTo>
-                  <a:lnTo>
-                    <a:pt x="5156821" y="1719969"/>
-                  </a:lnTo>
-                  <a:lnTo>
-                    <a:pt x="5228444" y="1716992"/>
-                  </a:lnTo>
-                  <a:lnTo>
-                    <a:pt x="5300066" y="1714006"/>
-                  </a:lnTo>
-                  <a:lnTo>
-                    <a:pt x="5371689" y="1711010"/>
-                  </a:lnTo>
-                  <a:lnTo>
-                    <a:pt x="5443311" y="1708004"/>
-                  </a:lnTo>
-                  <a:lnTo>
-                    <a:pt x="5514934" y="1704988"/>
-                  </a:lnTo>
-                  <a:lnTo>
-                    <a:pt x="5586557" y="1701962"/>
-                  </a:lnTo>
-                  <a:lnTo>
-                    <a:pt x="5658179" y="1698927"/>
-                  </a:lnTo>
-                  <a:lnTo>
-                    <a:pt x="5729802" y="1695881"/>
-                  </a:lnTo>
-                  <a:lnTo>
-                    <a:pt x="5801424" y="1692826"/>
-                  </a:lnTo>
-                  <a:lnTo>
-                    <a:pt x="5873047" y="1689760"/>
-                  </a:lnTo>
-                  <a:lnTo>
-                    <a:pt x="5944669" y="1686685"/>
-                  </a:lnTo>
-                  <a:lnTo>
-                    <a:pt x="6016292" y="1683599"/>
-                  </a:lnTo>
-                  <a:lnTo>
-                    <a:pt x="6087914" y="1680504"/>
-                  </a:lnTo>
-                  <a:lnTo>
-                    <a:pt x="6159537" y="1677398"/>
-                  </a:lnTo>
-                  <a:lnTo>
-                    <a:pt x="6231159" y="1674282"/>
-                  </a:lnTo>
-                  <a:lnTo>
-                    <a:pt x="6302782" y="1671156"/>
-                  </a:lnTo>
-                  <a:lnTo>
-                    <a:pt x="6374404" y="1668020"/>
-                  </a:lnTo>
-                  <a:lnTo>
-                    <a:pt x="6446027" y="1664873"/>
-                  </a:lnTo>
-                  <a:lnTo>
-                    <a:pt x="6517649" y="1661717"/>
-                  </a:lnTo>
-                  <a:lnTo>
-                    <a:pt x="6589272" y="1658549"/>
-                  </a:lnTo>
-                  <a:lnTo>
-                    <a:pt x="6660894" y="1655372"/>
-                  </a:lnTo>
-                  <a:lnTo>
-                    <a:pt x="6732517" y="1652184"/>
-                  </a:lnTo>
-                  <a:lnTo>
-                    <a:pt x="6804139" y="1648986"/>
-                  </a:lnTo>
-                  <a:lnTo>
-                    <a:pt x="6875762" y="1645777"/>
-                  </a:lnTo>
-                  <a:lnTo>
-                    <a:pt x="6947385" y="1642558"/>
-                  </a:lnTo>
-                  <a:lnTo>
-                    <a:pt x="7019007" y="1639328"/>
-                  </a:lnTo>
-                  <a:lnTo>
-                    <a:pt x="7090630" y="1636088"/>
-                  </a:lnTo>
-                  <a:lnTo>
-                    <a:pt x="7090630" y="2440635"/>
-                  </a:lnTo>
-                  <a:lnTo>
-                    <a:pt x="7019007" y="2435527"/>
-                  </a:lnTo>
-                  <a:lnTo>
-                    <a:pt x="6947385" y="2430283"/>
-                  </a:lnTo>
-                  <a:lnTo>
-                    <a:pt x="6875762" y="2424897"/>
-                  </a:lnTo>
-                  <a:lnTo>
-                    <a:pt x="6804139" y="2419366"/>
-                  </a:lnTo>
-                  <a:lnTo>
-                    <a:pt x="6732517" y="2413686"/>
-                  </a:lnTo>
-                  <a:lnTo>
-                    <a:pt x="6660894" y="2407853"/>
-                  </a:lnTo>
-                  <a:lnTo>
-                    <a:pt x="6589272" y="2401864"/>
-                  </a:lnTo>
-                  <a:lnTo>
-                    <a:pt x="6517649" y="2395713"/>
-                  </a:lnTo>
-                  <a:lnTo>
-                    <a:pt x="6446027" y="2389397"/>
-                  </a:lnTo>
-                  <a:lnTo>
-                    <a:pt x="6374404" y="2382911"/>
-                  </a:lnTo>
-                  <a:lnTo>
-                    <a:pt x="6302782" y="2376250"/>
-                  </a:lnTo>
-                  <a:lnTo>
-                    <a:pt x="6231159" y="2369410"/>
-                  </a:lnTo>
-                  <a:lnTo>
-                    <a:pt x="6159537" y="2362386"/>
-                  </a:lnTo>
-                  <a:lnTo>
-                    <a:pt x="6087914" y="2355173"/>
-                  </a:lnTo>
-                  <a:lnTo>
-                    <a:pt x="6016292" y="2347766"/>
-                  </a:lnTo>
-                  <a:lnTo>
-                    <a:pt x="5944669" y="2340159"/>
-                  </a:lnTo>
-                  <a:lnTo>
-                    <a:pt x="5873047" y="2332348"/>
-                  </a:lnTo>
-                  <a:lnTo>
-                    <a:pt x="5801424" y="2324326"/>
-                  </a:lnTo>
-                  <a:lnTo>
-                    <a:pt x="5729802" y="2316089"/>
-                  </a:lnTo>
-                  <a:lnTo>
-                    <a:pt x="5658179" y="2307630"/>
-                  </a:lnTo>
-                  <a:lnTo>
-                    <a:pt x="5586557" y="2298943"/>
-                  </a:lnTo>
-                  <a:lnTo>
-                    <a:pt x="5514934" y="2290023"/>
-                  </a:lnTo>
-                  <a:lnTo>
-                    <a:pt x="5443311" y="2280862"/>
-                  </a:lnTo>
-                  <a:lnTo>
-                    <a:pt x="5371689" y="2271455"/>
-                  </a:lnTo>
-                  <a:lnTo>
-                    <a:pt x="5300066" y="2261795"/>
-                  </a:lnTo>
-                  <a:lnTo>
-                    <a:pt x="5228444" y="2251875"/>
-                  </a:lnTo>
-                  <a:lnTo>
-                    <a:pt x="5156821" y="2241687"/>
-                  </a:lnTo>
-                  <a:lnTo>
-                    <a:pt x="5085199" y="2231226"/>
-                  </a:lnTo>
-                  <a:lnTo>
-                    <a:pt x="5013576" y="2220483"/>
-                  </a:lnTo>
-                  <a:lnTo>
-                    <a:pt x="4941954" y="2209451"/>
-                  </a:lnTo>
-                  <a:lnTo>
-                    <a:pt x="4870331" y="2198123"/>
-                  </a:lnTo>
-                  <a:lnTo>
-                    <a:pt x="4798709" y="2186489"/>
-                  </a:lnTo>
-                  <a:lnTo>
-                    <a:pt x="4727086" y="2174542"/>
-                  </a:lnTo>
-                  <a:lnTo>
-                    <a:pt x="4655464" y="2162274"/>
-                  </a:lnTo>
-                  <a:lnTo>
-                    <a:pt x="4583841" y="2149675"/>
-                  </a:lnTo>
-                  <a:lnTo>
-                    <a:pt x="4512219" y="2136738"/>
-                  </a:lnTo>
-                  <a:lnTo>
-                    <a:pt x="4440596" y="2123452"/>
-                  </a:lnTo>
-                  <a:lnTo>
-                    <a:pt x="4368974" y="2109809"/>
-                  </a:lnTo>
-                  <a:lnTo>
-                    <a:pt x="4297351" y="2095799"/>
-                  </a:lnTo>
-                  <a:lnTo>
-                    <a:pt x="4225729" y="2081411"/>
-                  </a:lnTo>
-                  <a:lnTo>
-                    <a:pt x="4154106" y="2066637"/>
-                  </a:lnTo>
-                  <a:lnTo>
-                    <a:pt x="4082483" y="2051465"/>
-                  </a:lnTo>
-                  <a:lnTo>
-                    <a:pt x="4010861" y="2035884"/>
-                  </a:lnTo>
-                  <a:lnTo>
-                    <a:pt x="3939238" y="2019884"/>
-                  </a:lnTo>
-                  <a:lnTo>
-                    <a:pt x="3867616" y="2003454"/>
-                  </a:lnTo>
-                  <a:lnTo>
-                    <a:pt x="3795993" y="1986581"/>
-                  </a:lnTo>
-                  <a:lnTo>
-                    <a:pt x="3724371" y="1969255"/>
-                  </a:lnTo>
-                  <a:lnTo>
-                    <a:pt x="3652748" y="1951462"/>
-                  </a:lnTo>
-                  <a:lnTo>
-                    <a:pt x="3581126" y="1933190"/>
-                  </a:lnTo>
-                  <a:lnTo>
-                    <a:pt x="3509503" y="1914427"/>
-                  </a:lnTo>
-                  <a:lnTo>
-                    <a:pt x="3437881" y="1895159"/>
-                  </a:lnTo>
-                  <a:lnTo>
-                    <a:pt x="3366258" y="1875372"/>
-                  </a:lnTo>
-                  <a:lnTo>
-                    <a:pt x="3294636" y="1855052"/>
-                  </a:lnTo>
-                  <a:lnTo>
-                    <a:pt x="3223013" y="1834186"/>
-                  </a:lnTo>
-                  <a:lnTo>
-                    <a:pt x="3151391" y="1812758"/>
-                  </a:lnTo>
-                  <a:lnTo>
-                    <a:pt x="3079768" y="1802199"/>
-                  </a:lnTo>
-                  <a:lnTo>
-                    <a:pt x="3008146" y="1804898"/>
-                  </a:lnTo>
-                  <a:lnTo>
-                    <a:pt x="2936523" y="1807588"/>
-                  </a:lnTo>
-                  <a:lnTo>
-                    <a:pt x="2864901" y="1810270"/>
-                  </a:lnTo>
-                  <a:lnTo>
-                    <a:pt x="2793278" y="1812942"/>
-                  </a:lnTo>
-                  <a:lnTo>
-                    <a:pt x="2721655" y="1815606"/>
-                  </a:lnTo>
-                  <a:lnTo>
-                    <a:pt x="2650033" y="1818262"/>
-                  </a:lnTo>
-                  <a:lnTo>
-                    <a:pt x="2578410" y="1820908"/>
-                  </a:lnTo>
-                  <a:lnTo>
-                    <a:pt x="2506788" y="1823546"/>
-                  </a:lnTo>
-                  <a:lnTo>
-                    <a:pt x="2435165" y="1826176"/>
-                  </a:lnTo>
-                  <a:lnTo>
-                    <a:pt x="2363543" y="1828797"/>
-                  </a:lnTo>
-                  <a:lnTo>
-                    <a:pt x="2291920" y="1831409"/>
-                  </a:lnTo>
-                  <a:lnTo>
-                    <a:pt x="2220298" y="1834013"/>
-                  </a:lnTo>
-                  <a:lnTo>
-                    <a:pt x="2148675" y="1836608"/>
-                  </a:lnTo>
-                  <a:lnTo>
-                    <a:pt x="2077053" y="1839195"/>
-                  </a:lnTo>
-                  <a:lnTo>
-                    <a:pt x="2005430" y="1841774"/>
-                  </a:lnTo>
-                  <a:lnTo>
-                    <a:pt x="1933808" y="1844344"/>
-                  </a:lnTo>
-                  <a:lnTo>
-                    <a:pt x="1862185" y="1846905"/>
-                  </a:lnTo>
-                  <a:lnTo>
-                    <a:pt x="1790563" y="1849459"/>
-                  </a:lnTo>
-                  <a:lnTo>
-                    <a:pt x="1718940" y="1852004"/>
-                  </a:lnTo>
-                  <a:lnTo>
-                    <a:pt x="1647318" y="1854540"/>
-                  </a:lnTo>
-                  <a:lnTo>
-                    <a:pt x="1575695" y="1857069"/>
-                  </a:lnTo>
-                  <a:lnTo>
-                    <a:pt x="1504073" y="1859589"/>
-                  </a:lnTo>
-                  <a:lnTo>
-                    <a:pt x="1432450" y="1862101"/>
-                  </a:lnTo>
-                  <a:lnTo>
-                    <a:pt x="1360827" y="1864605"/>
-                  </a:lnTo>
-                  <a:lnTo>
-                    <a:pt x="1289205" y="1867101"/>
-                  </a:lnTo>
-                  <a:lnTo>
-                    <a:pt x="1217582" y="1869588"/>
-                  </a:lnTo>
-                  <a:lnTo>
-                    <a:pt x="1145960" y="1872067"/>
-                  </a:lnTo>
-                  <a:lnTo>
-                    <a:pt x="1074337" y="1874539"/>
-                  </a:lnTo>
-                  <a:lnTo>
-                    <a:pt x="1002715" y="1877002"/>
-                  </a:lnTo>
-                  <a:lnTo>
-                    <a:pt x="931092" y="1879457"/>
-                  </a:lnTo>
-                  <a:lnTo>
-                    <a:pt x="859470" y="1881905"/>
-                  </a:lnTo>
-                  <a:lnTo>
-                    <a:pt x="787847" y="1884344"/>
-                  </a:lnTo>
-                  <a:lnTo>
-                    <a:pt x="716225" y="1886775"/>
-                  </a:lnTo>
-                  <a:lnTo>
-                    <a:pt x="644602" y="1889199"/>
-                  </a:lnTo>
-                  <a:lnTo>
-                    <a:pt x="572980" y="1891614"/>
-                  </a:lnTo>
-                  <a:lnTo>
-                    <a:pt x="501357" y="1894022"/>
-                  </a:lnTo>
-                  <a:lnTo>
-                    <a:pt x="429735" y="1896421"/>
-                  </a:lnTo>
-                  <a:lnTo>
-                    <a:pt x="358112" y="1898813"/>
-                  </a:lnTo>
-                  <a:lnTo>
-                    <a:pt x="286490" y="1901198"/>
-                  </a:lnTo>
-                  <a:lnTo>
-                    <a:pt x="214867" y="1903574"/>
-                  </a:lnTo>
-                  <a:lnTo>
-                    <a:pt x="143245" y="1905943"/>
-                  </a:lnTo>
-                  <a:lnTo>
-                    <a:pt x="71622" y="1908304"/>
-                  </a:lnTo>
-                  <a:lnTo>
-                    <a:pt x="0" y="1910657"/>
+                    <a:pt x="70344" y="24876"/>
+                  </a:lnTo>
+                  <a:lnTo>
+                    <a:pt x="140688" y="49100"/>
+                  </a:lnTo>
+                  <a:lnTo>
+                    <a:pt x="211033" y="72690"/>
+                  </a:lnTo>
+                  <a:lnTo>
+                    <a:pt x="281377" y="95662"/>
+                  </a:lnTo>
+                  <a:lnTo>
+                    <a:pt x="351722" y="118031"/>
+                  </a:lnTo>
+                  <a:lnTo>
+                    <a:pt x="422066" y="139814"/>
+                  </a:lnTo>
+                  <a:lnTo>
+                    <a:pt x="492411" y="161027"/>
+                  </a:lnTo>
+                  <a:lnTo>
+                    <a:pt x="562755" y="181683"/>
+                  </a:lnTo>
+                  <a:lnTo>
+                    <a:pt x="633100" y="201798"/>
+                  </a:lnTo>
+                  <a:lnTo>
+                    <a:pt x="703444" y="221386"/>
+                  </a:lnTo>
+                  <a:lnTo>
+                    <a:pt x="773789" y="240461"/>
+                  </a:lnTo>
+                  <a:lnTo>
+                    <a:pt x="844133" y="259036"/>
+                  </a:lnTo>
+                  <a:lnTo>
+                    <a:pt x="914478" y="277124"/>
+                  </a:lnTo>
+                  <a:lnTo>
+                    <a:pt x="984822" y="294738"/>
+                  </a:lnTo>
+                  <a:lnTo>
+                    <a:pt x="1055167" y="311891"/>
+                  </a:lnTo>
+                  <a:lnTo>
+                    <a:pt x="1125511" y="328593"/>
+                  </a:lnTo>
+                  <a:lnTo>
+                    <a:pt x="1195856" y="344859"/>
+                  </a:lnTo>
+                  <a:lnTo>
+                    <a:pt x="1266200" y="360698"/>
+                  </a:lnTo>
+                  <a:lnTo>
+                    <a:pt x="1336545" y="376121"/>
+                  </a:lnTo>
+                  <a:lnTo>
+                    <a:pt x="1406889" y="391141"/>
+                  </a:lnTo>
+                  <a:lnTo>
+                    <a:pt x="1477234" y="405767"/>
+                  </a:lnTo>
+                  <a:lnTo>
+                    <a:pt x="1547578" y="420010"/>
+                  </a:lnTo>
+                  <a:lnTo>
+                    <a:pt x="1617923" y="433880"/>
+                  </a:lnTo>
+                  <a:lnTo>
+                    <a:pt x="1688267" y="447386"/>
+                  </a:lnTo>
+                  <a:lnTo>
+                    <a:pt x="1758612" y="460538"/>
+                  </a:lnTo>
+                  <a:lnTo>
+                    <a:pt x="1828956" y="473345"/>
+                  </a:lnTo>
+                  <a:lnTo>
+                    <a:pt x="1899301" y="485817"/>
+                  </a:lnTo>
+                  <a:lnTo>
+                    <a:pt x="1969645" y="497962"/>
+                  </a:lnTo>
+                  <a:lnTo>
+                    <a:pt x="2039990" y="509789"/>
+                  </a:lnTo>
+                  <a:lnTo>
+                    <a:pt x="2110334" y="521305"/>
+                  </a:lnTo>
+                  <a:lnTo>
+                    <a:pt x="2180679" y="532520"/>
+                  </a:lnTo>
+                  <a:lnTo>
+                    <a:pt x="2251023" y="543441"/>
+                  </a:lnTo>
+                  <a:lnTo>
+                    <a:pt x="2321368" y="554076"/>
+                  </a:lnTo>
+                  <a:lnTo>
+                    <a:pt x="2391712" y="564432"/>
+                  </a:lnTo>
+                  <a:lnTo>
+                    <a:pt x="2462057" y="574517"/>
+                  </a:lnTo>
+                  <a:lnTo>
+                    <a:pt x="2532401" y="584338"/>
+                  </a:lnTo>
+                  <a:lnTo>
+                    <a:pt x="2602746" y="593901"/>
+                  </a:lnTo>
+                  <a:lnTo>
+                    <a:pt x="2673090" y="603213"/>
+                  </a:lnTo>
+                  <a:lnTo>
+                    <a:pt x="2743435" y="612282"/>
+                  </a:lnTo>
+                  <a:lnTo>
+                    <a:pt x="2813779" y="621113"/>
+                  </a:lnTo>
+                  <a:lnTo>
+                    <a:pt x="2884124" y="629712"/>
+                  </a:lnTo>
+                  <a:lnTo>
+                    <a:pt x="2954468" y="638086"/>
+                  </a:lnTo>
+                  <a:lnTo>
+                    <a:pt x="3024813" y="646241"/>
+                  </a:lnTo>
+                  <a:lnTo>
+                    <a:pt x="3095157" y="649394"/>
+                  </a:lnTo>
+                  <a:lnTo>
+                    <a:pt x="3165502" y="648413"/>
+                  </a:lnTo>
+                  <a:lnTo>
+                    <a:pt x="3235846" y="647430"/>
+                  </a:lnTo>
+                  <a:lnTo>
+                    <a:pt x="3306191" y="646443"/>
+                  </a:lnTo>
+                  <a:lnTo>
+                    <a:pt x="3376535" y="645453"/>
+                  </a:lnTo>
+                  <a:lnTo>
+                    <a:pt x="3446880" y="644460"/>
+                  </a:lnTo>
+                  <a:lnTo>
+                    <a:pt x="3517224" y="643463"/>
+                  </a:lnTo>
+                  <a:lnTo>
+                    <a:pt x="3587569" y="642463"/>
+                  </a:lnTo>
+                  <a:lnTo>
+                    <a:pt x="3657913" y="641460"/>
+                  </a:lnTo>
+                  <a:lnTo>
+                    <a:pt x="3728257" y="640454"/>
+                  </a:lnTo>
+                  <a:lnTo>
+                    <a:pt x="3798602" y="639444"/>
+                  </a:lnTo>
+                  <a:lnTo>
+                    <a:pt x="3868946" y="638431"/>
+                  </a:lnTo>
+                  <a:lnTo>
+                    <a:pt x="3939291" y="637415"/>
+                  </a:lnTo>
+                  <a:lnTo>
+                    <a:pt x="4009635" y="636396"/>
+                  </a:lnTo>
+                  <a:lnTo>
+                    <a:pt x="4079980" y="635373"/>
+                  </a:lnTo>
+                  <a:lnTo>
+                    <a:pt x="4150324" y="634346"/>
+                  </a:lnTo>
+                  <a:lnTo>
+                    <a:pt x="4220669" y="633317"/>
+                  </a:lnTo>
+                  <a:lnTo>
+                    <a:pt x="4291013" y="632284"/>
+                  </a:lnTo>
+                  <a:lnTo>
+                    <a:pt x="4361358" y="631248"/>
+                  </a:lnTo>
+                  <a:lnTo>
+                    <a:pt x="4431702" y="630208"/>
+                  </a:lnTo>
+                  <a:lnTo>
+                    <a:pt x="4502047" y="629165"/>
+                  </a:lnTo>
+                  <a:lnTo>
+                    <a:pt x="4572391" y="628118"/>
+                  </a:lnTo>
+                  <a:lnTo>
+                    <a:pt x="4642736" y="627068"/>
+                  </a:lnTo>
+                  <a:lnTo>
+                    <a:pt x="4713080" y="626015"/>
+                  </a:lnTo>
+                  <a:lnTo>
+                    <a:pt x="4783425" y="624958"/>
+                  </a:lnTo>
+                  <a:lnTo>
+                    <a:pt x="4853769" y="623898"/>
+                  </a:lnTo>
+                  <a:lnTo>
+                    <a:pt x="4924114" y="622834"/>
+                  </a:lnTo>
+                  <a:lnTo>
+                    <a:pt x="4994458" y="621767"/>
+                  </a:lnTo>
+                  <a:lnTo>
+                    <a:pt x="5064803" y="620696"/>
+                  </a:lnTo>
+                  <a:lnTo>
+                    <a:pt x="5135147" y="619622"/>
+                  </a:lnTo>
+                  <a:lnTo>
+                    <a:pt x="5205492" y="618544"/>
+                  </a:lnTo>
+                  <a:lnTo>
+                    <a:pt x="5275836" y="617463"/>
+                  </a:lnTo>
+                  <a:lnTo>
+                    <a:pt x="5346181" y="616378"/>
+                  </a:lnTo>
+                  <a:lnTo>
+                    <a:pt x="5416525" y="615290"/>
+                  </a:lnTo>
+                  <a:lnTo>
+                    <a:pt x="5486870" y="614198"/>
+                  </a:lnTo>
+                  <a:lnTo>
+                    <a:pt x="5557214" y="613102"/>
+                  </a:lnTo>
+                  <a:lnTo>
+                    <a:pt x="5627559" y="612003"/>
+                  </a:lnTo>
+                  <a:lnTo>
+                    <a:pt x="5697903" y="610901"/>
+                  </a:lnTo>
+                  <a:lnTo>
+                    <a:pt x="5768248" y="609794"/>
+                  </a:lnTo>
+                  <a:lnTo>
+                    <a:pt x="5838592" y="608685"/>
+                  </a:lnTo>
+                  <a:lnTo>
+                    <a:pt x="5908937" y="607571"/>
+                  </a:lnTo>
+                  <a:lnTo>
+                    <a:pt x="5979281" y="606454"/>
+                  </a:lnTo>
+                  <a:lnTo>
+                    <a:pt x="6049626" y="605333"/>
+                  </a:lnTo>
+                  <a:lnTo>
+                    <a:pt x="6119970" y="604209"/>
+                  </a:lnTo>
+                  <a:lnTo>
+                    <a:pt x="6190315" y="603081"/>
+                  </a:lnTo>
+                  <a:lnTo>
+                    <a:pt x="6260659" y="601949"/>
+                  </a:lnTo>
+                  <a:lnTo>
+                    <a:pt x="6331004" y="600813"/>
+                  </a:lnTo>
+                  <a:lnTo>
+                    <a:pt x="6401348" y="599674"/>
+                  </a:lnTo>
+                  <a:lnTo>
+                    <a:pt x="6471693" y="598531"/>
+                  </a:lnTo>
+                  <a:lnTo>
+                    <a:pt x="6542037" y="597384"/>
+                  </a:lnTo>
+                  <a:lnTo>
+                    <a:pt x="6612382" y="596234"/>
+                  </a:lnTo>
+                  <a:lnTo>
+                    <a:pt x="6682726" y="595080"/>
+                  </a:lnTo>
+                  <a:lnTo>
+                    <a:pt x="6753071" y="593922"/>
+                  </a:lnTo>
+                  <a:lnTo>
+                    <a:pt x="6823415" y="592760"/>
+                  </a:lnTo>
+                  <a:lnTo>
+                    <a:pt x="6893760" y="591595"/>
+                  </a:lnTo>
+                  <a:lnTo>
+                    <a:pt x="6964104" y="590425"/>
+                  </a:lnTo>
+                  <a:lnTo>
+                    <a:pt x="6964104" y="880767"/>
+                  </a:lnTo>
+                  <a:lnTo>
+                    <a:pt x="6893760" y="878924"/>
+                  </a:lnTo>
+                  <a:lnTo>
+                    <a:pt x="6823415" y="877031"/>
+                  </a:lnTo>
+                  <a:lnTo>
+                    <a:pt x="6753071" y="875088"/>
+                  </a:lnTo>
+                  <a:lnTo>
+                    <a:pt x="6682726" y="873092"/>
+                  </a:lnTo>
+                  <a:lnTo>
+                    <a:pt x="6612382" y="871042"/>
+                  </a:lnTo>
+                  <a:lnTo>
+                    <a:pt x="6542037" y="868937"/>
+                  </a:lnTo>
+                  <a:lnTo>
+                    <a:pt x="6471693" y="866776"/>
+                  </a:lnTo>
+                  <a:lnTo>
+                    <a:pt x="6401348" y="864556"/>
+                  </a:lnTo>
+                  <a:lnTo>
+                    <a:pt x="6331004" y="862277"/>
+                  </a:lnTo>
+                  <a:lnTo>
+                    <a:pt x="6260659" y="859936"/>
+                  </a:lnTo>
+                  <a:lnTo>
+                    <a:pt x="6190315" y="857532"/>
+                  </a:lnTo>
+                  <a:lnTo>
+                    <a:pt x="6119970" y="855064"/>
+                  </a:lnTo>
+                  <a:lnTo>
+                    <a:pt x="6049626" y="852529"/>
+                  </a:lnTo>
+                  <a:lnTo>
+                    <a:pt x="5979281" y="849926"/>
+                  </a:lnTo>
+                  <a:lnTo>
+                    <a:pt x="5908937" y="847253"/>
+                  </a:lnTo>
+                  <a:lnTo>
+                    <a:pt x="5838592" y="844508"/>
+                  </a:lnTo>
+                  <a:lnTo>
+                    <a:pt x="5768248" y="841689"/>
+                  </a:lnTo>
+                  <a:lnTo>
+                    <a:pt x="5697903" y="838794"/>
+                  </a:lnTo>
+                  <a:lnTo>
+                    <a:pt x="5627559" y="835822"/>
+                  </a:lnTo>
+                  <a:lnTo>
+                    <a:pt x="5557214" y="832769"/>
+                  </a:lnTo>
+                  <a:lnTo>
+                    <a:pt x="5486870" y="829634"/>
+                  </a:lnTo>
+                  <a:lnTo>
+                    <a:pt x="5416525" y="826415"/>
+                  </a:lnTo>
+                  <a:lnTo>
+                    <a:pt x="5346181" y="823109"/>
+                  </a:lnTo>
+                  <a:lnTo>
+                    <a:pt x="5275836" y="819714"/>
+                  </a:lnTo>
+                  <a:lnTo>
+                    <a:pt x="5205492" y="816228"/>
+                  </a:lnTo>
+                  <a:lnTo>
+                    <a:pt x="5135147" y="812648"/>
+                  </a:lnTo>
+                  <a:lnTo>
+                    <a:pt x="5064803" y="808972"/>
+                  </a:lnTo>
+                  <a:lnTo>
+                    <a:pt x="4994458" y="805197"/>
+                  </a:lnTo>
+                  <a:lnTo>
+                    <a:pt x="4924114" y="801320"/>
+                  </a:lnTo>
+                  <a:lnTo>
+                    <a:pt x="4853769" y="797339"/>
+                  </a:lnTo>
+                  <a:lnTo>
+                    <a:pt x="4783425" y="793250"/>
+                  </a:lnTo>
+                  <a:lnTo>
+                    <a:pt x="4713080" y="789052"/>
+                  </a:lnTo>
+                  <a:lnTo>
+                    <a:pt x="4642736" y="784741"/>
+                  </a:lnTo>
+                  <a:lnTo>
+                    <a:pt x="4572391" y="780313"/>
+                  </a:lnTo>
+                  <a:lnTo>
+                    <a:pt x="4502047" y="775767"/>
+                  </a:lnTo>
+                  <a:lnTo>
+                    <a:pt x="4431702" y="771098"/>
+                  </a:lnTo>
+                  <a:lnTo>
+                    <a:pt x="4361358" y="766304"/>
+                  </a:lnTo>
+                  <a:lnTo>
+                    <a:pt x="4291013" y="761380"/>
+                  </a:lnTo>
+                  <a:lnTo>
+                    <a:pt x="4220669" y="756324"/>
+                  </a:lnTo>
+                  <a:lnTo>
+                    <a:pt x="4150324" y="751132"/>
+                  </a:lnTo>
+                  <a:lnTo>
+                    <a:pt x="4079980" y="745800"/>
+                  </a:lnTo>
+                  <a:lnTo>
+                    <a:pt x="4009635" y="740325"/>
+                  </a:lnTo>
+                  <a:lnTo>
+                    <a:pt x="3939291" y="734702"/>
+                  </a:lnTo>
+                  <a:lnTo>
+                    <a:pt x="3868946" y="728928"/>
+                  </a:lnTo>
+                  <a:lnTo>
+                    <a:pt x="3798602" y="722999"/>
+                  </a:lnTo>
+                  <a:lnTo>
+                    <a:pt x="3728257" y="716910"/>
+                  </a:lnTo>
+                  <a:lnTo>
+                    <a:pt x="3657913" y="710657"/>
+                  </a:lnTo>
+                  <a:lnTo>
+                    <a:pt x="3587569" y="704236"/>
+                  </a:lnTo>
+                  <a:lnTo>
+                    <a:pt x="3517224" y="697643"/>
+                  </a:lnTo>
+                  <a:lnTo>
+                    <a:pt x="3446880" y="690871"/>
+                  </a:lnTo>
+                  <a:lnTo>
+                    <a:pt x="3376535" y="683918"/>
+                  </a:lnTo>
+                  <a:lnTo>
+                    <a:pt x="3306191" y="676777"/>
+                  </a:lnTo>
+                  <a:lnTo>
+                    <a:pt x="3235846" y="669444"/>
+                  </a:lnTo>
+                  <a:lnTo>
+                    <a:pt x="3165502" y="661914"/>
+                  </a:lnTo>
+                  <a:lnTo>
+                    <a:pt x="3095157" y="654181"/>
+                  </a:lnTo>
+                  <a:lnTo>
+                    <a:pt x="3024813" y="650371"/>
+                  </a:lnTo>
+                  <a:lnTo>
+                    <a:pt x="2954468" y="651345"/>
+                  </a:lnTo>
+                  <a:lnTo>
+                    <a:pt x="2884124" y="652316"/>
+                  </a:lnTo>
+                  <a:lnTo>
+                    <a:pt x="2813779" y="653283"/>
+                  </a:lnTo>
+                  <a:lnTo>
+                    <a:pt x="2743435" y="654248"/>
+                  </a:lnTo>
+                  <a:lnTo>
+                    <a:pt x="2673090" y="655209"/>
+                  </a:lnTo>
+                  <a:lnTo>
+                    <a:pt x="2602746" y="656168"/>
+                  </a:lnTo>
+                  <a:lnTo>
+                    <a:pt x="2532401" y="657123"/>
+                  </a:lnTo>
+                  <a:lnTo>
+                    <a:pt x="2462057" y="658075"/>
+                  </a:lnTo>
+                  <a:lnTo>
+                    <a:pt x="2391712" y="659024"/>
+                  </a:lnTo>
+                  <a:lnTo>
+                    <a:pt x="2321368" y="659969"/>
+                  </a:lnTo>
+                  <a:lnTo>
+                    <a:pt x="2251023" y="660912"/>
+                  </a:lnTo>
+                  <a:lnTo>
+                    <a:pt x="2180679" y="661852"/>
+                  </a:lnTo>
+                  <a:lnTo>
+                    <a:pt x="2110334" y="662788"/>
+                  </a:lnTo>
+                  <a:lnTo>
+                    <a:pt x="2039990" y="663722"/>
+                  </a:lnTo>
+                  <a:lnTo>
+                    <a:pt x="1969645" y="664652"/>
+                  </a:lnTo>
+                  <a:lnTo>
+                    <a:pt x="1899301" y="665580"/>
+                  </a:lnTo>
+                  <a:lnTo>
+                    <a:pt x="1828956" y="666504"/>
+                  </a:lnTo>
+                  <a:lnTo>
+                    <a:pt x="1758612" y="667426"/>
+                  </a:lnTo>
+                  <a:lnTo>
+                    <a:pt x="1688267" y="668344"/>
+                  </a:lnTo>
+                  <a:lnTo>
+                    <a:pt x="1617923" y="669260"/>
+                  </a:lnTo>
+                  <a:lnTo>
+                    <a:pt x="1547578" y="670172"/>
+                  </a:lnTo>
+                  <a:lnTo>
+                    <a:pt x="1477234" y="671082"/>
+                  </a:lnTo>
+                  <a:lnTo>
+                    <a:pt x="1406889" y="671988"/>
+                  </a:lnTo>
+                  <a:lnTo>
+                    <a:pt x="1336545" y="672892"/>
+                  </a:lnTo>
+                  <a:lnTo>
+                    <a:pt x="1266200" y="673792"/>
+                  </a:lnTo>
+                  <a:lnTo>
+                    <a:pt x="1195856" y="674690"/>
+                  </a:lnTo>
+                  <a:lnTo>
+                    <a:pt x="1125511" y="675585"/>
+                  </a:lnTo>
+                  <a:lnTo>
+                    <a:pt x="1055167" y="676477"/>
+                  </a:lnTo>
+                  <a:lnTo>
+                    <a:pt x="984822" y="677366"/>
+                  </a:lnTo>
+                  <a:lnTo>
+                    <a:pt x="914478" y="678252"/>
+                  </a:lnTo>
+                  <a:lnTo>
+                    <a:pt x="844133" y="679135"/>
+                  </a:lnTo>
+                  <a:lnTo>
+                    <a:pt x="773789" y="680015"/>
+                  </a:lnTo>
+                  <a:lnTo>
+                    <a:pt x="703444" y="680892"/>
+                  </a:lnTo>
+                  <a:lnTo>
+                    <a:pt x="633100" y="681767"/>
+                  </a:lnTo>
+                  <a:lnTo>
+                    <a:pt x="562755" y="682639"/>
+                  </a:lnTo>
+                  <a:lnTo>
+                    <a:pt x="492411" y="683508"/>
+                  </a:lnTo>
+                  <a:lnTo>
+                    <a:pt x="422066" y="684374"/>
+                  </a:lnTo>
+                  <a:lnTo>
+                    <a:pt x="351722" y="685237"/>
+                  </a:lnTo>
+                  <a:lnTo>
+                    <a:pt x="281377" y="686097"/>
+                  </a:lnTo>
+                  <a:lnTo>
+                    <a:pt x="211033" y="686955"/>
+                  </a:lnTo>
+                  <a:lnTo>
+                    <a:pt x="140688" y="687810"/>
+                  </a:lnTo>
+                  <a:lnTo>
+                    <a:pt x="70344" y="688662"/>
+                  </a:lnTo>
+                  <a:lnTo>
+                    <a:pt x="0" y="689511"/>
                   </a:lnTo>
                   <a:close/>
                 </a:path>
@@ -3670,643 +3705,318 @@
         </p:sp>
         <p:sp>
           <p:nvSpPr>
-            <p:cNvPr id="23" name="pl23"/>
-            <p:cNvSpPr/>
-            <p:nvPr/>
-          </p:nvSpPr>
-          <p:spPr>
-            <a:xfrm>
-              <a:off x="1172049" y="2926832"/>
-              <a:ext cx="7090630" cy="1799491"/>
-            </a:xfrm>
-            <a:custGeom>
-              <a:avLst/>
-              <a:pathLst>
-                <a:path w="7090630" h="1799491">
-                  <a:moveTo>
-                    <a:pt x="0" y="0"/>
-                  </a:moveTo>
-                  <a:lnTo>
-                    <a:pt x="71622" y="68933"/>
-                  </a:lnTo>
-                  <a:lnTo>
-                    <a:pt x="143245" y="136060"/>
-                  </a:lnTo>
-                  <a:lnTo>
-                    <a:pt x="214867" y="201427"/>
-                  </a:lnTo>
-                  <a:lnTo>
-                    <a:pt x="286490" y="265082"/>
-                  </a:lnTo>
-                  <a:lnTo>
-                    <a:pt x="358112" y="327069"/>
-                  </a:lnTo>
-                  <a:lnTo>
-                    <a:pt x="429735" y="387431"/>
-                  </a:lnTo>
-                  <a:lnTo>
-                    <a:pt x="501357" y="446211"/>
-                  </a:lnTo>
-                  <a:lnTo>
-                    <a:pt x="572980" y="503451"/>
-                  </a:lnTo>
-                  <a:lnTo>
-                    <a:pt x="644602" y="559191"/>
-                  </a:lnTo>
-                  <a:lnTo>
-                    <a:pt x="716225" y="613470"/>
-                  </a:lnTo>
-                  <a:lnTo>
-                    <a:pt x="787847" y="666326"/>
-                  </a:lnTo>
-                  <a:lnTo>
-                    <a:pt x="859470" y="717798"/>
-                  </a:lnTo>
-                  <a:lnTo>
-                    <a:pt x="931092" y="767920"/>
-                  </a:lnTo>
-                  <a:lnTo>
-                    <a:pt x="1002715" y="816729"/>
-                  </a:lnTo>
-                  <a:lnTo>
-                    <a:pt x="1074337" y="864259"/>
-                  </a:lnTo>
-                  <a:lnTo>
-                    <a:pt x="1145960" y="910544"/>
-                  </a:lnTo>
-                  <a:lnTo>
-                    <a:pt x="1217582" y="955615"/>
-                  </a:lnTo>
-                  <a:lnTo>
-                    <a:pt x="1289205" y="999505"/>
-                  </a:lnTo>
-                  <a:lnTo>
-                    <a:pt x="1360827" y="1042245"/>
-                  </a:lnTo>
-                  <a:lnTo>
-                    <a:pt x="1432450" y="1083865"/>
-                  </a:lnTo>
-                  <a:lnTo>
-                    <a:pt x="1504073" y="1124395"/>
-                  </a:lnTo>
-                  <a:lnTo>
-                    <a:pt x="1575695" y="1163862"/>
-                  </a:lnTo>
-                  <a:lnTo>
-                    <a:pt x="1647318" y="1202295"/>
-                  </a:lnTo>
-                  <a:lnTo>
-                    <a:pt x="1718940" y="1239720"/>
-                  </a:lnTo>
-                  <a:lnTo>
-                    <a:pt x="1790563" y="1276165"/>
-                  </a:lnTo>
-                  <a:lnTo>
-                    <a:pt x="1862185" y="1311655"/>
-                  </a:lnTo>
-                  <a:lnTo>
-                    <a:pt x="1933808" y="1346215"/>
-                  </a:lnTo>
-                  <a:lnTo>
-                    <a:pt x="2005430" y="1379869"/>
-                  </a:lnTo>
-                  <a:lnTo>
-                    <a:pt x="2077053" y="1412641"/>
-                  </a:lnTo>
-                  <a:lnTo>
-                    <a:pt x="2148675" y="1444555"/>
-                  </a:lnTo>
-                  <a:lnTo>
-                    <a:pt x="2220298" y="1475632"/>
-                  </a:lnTo>
-                  <a:lnTo>
-                    <a:pt x="2291920" y="1505894"/>
-                  </a:lnTo>
-                  <a:lnTo>
-                    <a:pt x="2363543" y="1535364"/>
-                  </a:lnTo>
-                  <a:lnTo>
-                    <a:pt x="2435165" y="1564061"/>
-                  </a:lnTo>
-                  <a:lnTo>
-                    <a:pt x="2506788" y="1592006"/>
-                  </a:lnTo>
-                  <a:lnTo>
-                    <a:pt x="2578410" y="1619219"/>
-                  </a:lnTo>
-                  <a:lnTo>
-                    <a:pt x="2650033" y="1645719"/>
-                  </a:lnTo>
-                  <a:lnTo>
-                    <a:pt x="2721655" y="1671524"/>
-                  </a:lnTo>
-                  <a:lnTo>
-                    <a:pt x="2793278" y="1696653"/>
-                  </a:lnTo>
-                  <a:lnTo>
-                    <a:pt x="2864901" y="1721123"/>
-                  </a:lnTo>
-                  <a:lnTo>
-                    <a:pt x="2936523" y="1744953"/>
-                  </a:lnTo>
-                  <a:lnTo>
-                    <a:pt x="3008146" y="1768157"/>
-                  </a:lnTo>
-                  <a:lnTo>
-                    <a:pt x="3079768" y="1790754"/>
-                  </a:lnTo>
-                  <a:lnTo>
-                    <a:pt x="3151391" y="1799491"/>
-                  </a:lnTo>
-                  <a:lnTo>
-                    <a:pt x="3223013" y="1796774"/>
-                  </a:lnTo>
-                  <a:lnTo>
-                    <a:pt x="3294636" y="1794049"/>
-                  </a:lnTo>
-                  <a:lnTo>
-                    <a:pt x="3366258" y="1791314"/>
-                  </a:lnTo>
-                  <a:lnTo>
-                    <a:pt x="3437881" y="1788571"/>
-                  </a:lnTo>
-                  <a:lnTo>
-                    <a:pt x="3509503" y="1785819"/>
-                  </a:lnTo>
-                  <a:lnTo>
-                    <a:pt x="3581126" y="1783057"/>
-                  </a:lnTo>
-                  <a:lnTo>
-                    <a:pt x="3652748" y="1780287"/>
-                  </a:lnTo>
-                  <a:lnTo>
-                    <a:pt x="3724371" y="1777507"/>
-                  </a:lnTo>
-                  <a:lnTo>
-                    <a:pt x="3795993" y="1774719"/>
-                  </a:lnTo>
-                  <a:lnTo>
-                    <a:pt x="3867616" y="1771921"/>
-                  </a:lnTo>
-                  <a:lnTo>
-                    <a:pt x="3939238" y="1769114"/>
-                  </a:lnTo>
-                  <a:lnTo>
-                    <a:pt x="4010861" y="1766298"/>
-                  </a:lnTo>
-                  <a:lnTo>
-                    <a:pt x="4082483" y="1763473"/>
-                  </a:lnTo>
-                  <a:lnTo>
-                    <a:pt x="4154106" y="1760638"/>
-                  </a:lnTo>
-                  <a:lnTo>
-                    <a:pt x="4225729" y="1757795"/>
-                  </a:lnTo>
-                  <a:lnTo>
-                    <a:pt x="4297351" y="1754942"/>
-                  </a:lnTo>
-                  <a:lnTo>
-                    <a:pt x="4368974" y="1752079"/>
-                  </a:lnTo>
-                  <a:lnTo>
-                    <a:pt x="4440596" y="1749208"/>
-                  </a:lnTo>
-                  <a:lnTo>
-                    <a:pt x="4512219" y="1746327"/>
-                  </a:lnTo>
-                  <a:lnTo>
-                    <a:pt x="4583841" y="1743436"/>
-                  </a:lnTo>
-                  <a:lnTo>
-                    <a:pt x="4655464" y="1740536"/>
-                  </a:lnTo>
-                  <a:lnTo>
-                    <a:pt x="4727086" y="1737627"/>
-                  </a:lnTo>
-                  <a:lnTo>
-                    <a:pt x="4798709" y="1734708"/>
-                  </a:lnTo>
-                  <a:lnTo>
-                    <a:pt x="4870331" y="1731779"/>
-                  </a:lnTo>
-                  <a:lnTo>
-                    <a:pt x="4941954" y="1728841"/>
-                  </a:lnTo>
-                  <a:lnTo>
-                    <a:pt x="5013576" y="1725893"/>
-                  </a:lnTo>
-                  <a:lnTo>
-                    <a:pt x="5085199" y="1722936"/>
-                  </a:lnTo>
-                  <a:lnTo>
-                    <a:pt x="5156821" y="1719969"/>
-                  </a:lnTo>
-                  <a:lnTo>
-                    <a:pt x="5228444" y="1716992"/>
-                  </a:lnTo>
-                  <a:lnTo>
-                    <a:pt x="5300066" y="1714006"/>
-                  </a:lnTo>
-                  <a:lnTo>
-                    <a:pt x="5371689" y="1711010"/>
-                  </a:lnTo>
-                  <a:lnTo>
-                    <a:pt x="5443311" y="1708004"/>
-                  </a:lnTo>
-                  <a:lnTo>
-                    <a:pt x="5514934" y="1704988"/>
-                  </a:lnTo>
-                  <a:lnTo>
-                    <a:pt x="5586557" y="1701962"/>
-                  </a:lnTo>
-                  <a:lnTo>
-                    <a:pt x="5658179" y="1698927"/>
-                  </a:lnTo>
-                  <a:lnTo>
-                    <a:pt x="5729802" y="1695881"/>
-                  </a:lnTo>
-                  <a:lnTo>
-                    <a:pt x="5801424" y="1692826"/>
-                  </a:lnTo>
-                  <a:lnTo>
-                    <a:pt x="5873047" y="1689760"/>
-                  </a:lnTo>
-                  <a:lnTo>
-                    <a:pt x="5944669" y="1686685"/>
-                  </a:lnTo>
-                  <a:lnTo>
-                    <a:pt x="6016292" y="1683599"/>
-                  </a:lnTo>
-                  <a:lnTo>
-                    <a:pt x="6087914" y="1680504"/>
-                  </a:lnTo>
-                  <a:lnTo>
-                    <a:pt x="6159537" y="1677398"/>
-                  </a:lnTo>
-                  <a:lnTo>
-                    <a:pt x="6231159" y="1674282"/>
-                  </a:lnTo>
-                  <a:lnTo>
-                    <a:pt x="6302782" y="1671156"/>
-                  </a:lnTo>
-                  <a:lnTo>
-                    <a:pt x="6374404" y="1668020"/>
-                  </a:lnTo>
-                  <a:lnTo>
-                    <a:pt x="6446027" y="1664873"/>
-                  </a:lnTo>
-                  <a:lnTo>
-                    <a:pt x="6517649" y="1661717"/>
-                  </a:lnTo>
-                  <a:lnTo>
-                    <a:pt x="6589272" y="1658549"/>
-                  </a:lnTo>
-                  <a:lnTo>
-                    <a:pt x="6660894" y="1655372"/>
-                  </a:lnTo>
-                  <a:lnTo>
-                    <a:pt x="6732517" y="1652184"/>
-                  </a:lnTo>
-                  <a:lnTo>
-                    <a:pt x="6804139" y="1648986"/>
-                  </a:lnTo>
-                  <a:lnTo>
-                    <a:pt x="6875762" y="1645777"/>
-                  </a:lnTo>
-                  <a:lnTo>
-                    <a:pt x="6947385" y="1642558"/>
-                  </a:lnTo>
-                  <a:lnTo>
-                    <a:pt x="7019007" y="1639328"/>
-                  </a:lnTo>
-                  <a:lnTo>
-                    <a:pt x="7090630" y="1636088"/>
-                  </a:lnTo>
-                </a:path>
-              </a:pathLst>
-            </a:custGeom>
-          </p:spPr>
-          <p:txBody>
-            <a:bodyPr/>
-            <a:lstStyle/>
-            <a:p/>
-          </p:txBody>
-        </p:sp>
-        <p:sp>
-          <p:nvSpPr>
             <p:cNvPr id="24" name="pl24"/>
             <p:cNvSpPr/>
             <p:nvPr/>
           </p:nvSpPr>
           <p:spPr>
             <a:xfrm>
-              <a:off x="1172049" y="4729031"/>
-              <a:ext cx="7090630" cy="638435"/>
+              <a:off x="1235312" y="2451038"/>
+              <a:ext cx="6964104" cy="649394"/>
             </a:xfrm>
             <a:custGeom>
               <a:avLst/>
               <a:pathLst>
-                <a:path w="7090630" h="638435">
+                <a:path w="6964104" h="649394">
                   <a:moveTo>
-                    <a:pt x="7090630" y="638435"/>
+                    <a:pt x="0" y="0"/>
                   </a:moveTo>
                   <a:lnTo>
-                    <a:pt x="7019007" y="633328"/>
-                  </a:lnTo>
-                  <a:lnTo>
-                    <a:pt x="6947385" y="628083"/>
-                  </a:lnTo>
-                  <a:lnTo>
-                    <a:pt x="6875762" y="622697"/>
-                  </a:lnTo>
-                  <a:lnTo>
-                    <a:pt x="6804139" y="617166"/>
-                  </a:lnTo>
-                  <a:lnTo>
-                    <a:pt x="6732517" y="611487"/>
-                  </a:lnTo>
-                  <a:lnTo>
-                    <a:pt x="6660894" y="605654"/>
-                  </a:lnTo>
-                  <a:lnTo>
-                    <a:pt x="6589272" y="599664"/>
-                  </a:lnTo>
-                  <a:lnTo>
-                    <a:pt x="6517649" y="593514"/>
-                  </a:lnTo>
-                  <a:lnTo>
-                    <a:pt x="6446027" y="587197"/>
-                  </a:lnTo>
-                  <a:lnTo>
-                    <a:pt x="6374404" y="580711"/>
-                  </a:lnTo>
-                  <a:lnTo>
-                    <a:pt x="6302782" y="574050"/>
-                  </a:lnTo>
-                  <a:lnTo>
-                    <a:pt x="6231159" y="567210"/>
-                  </a:lnTo>
-                  <a:lnTo>
-                    <a:pt x="6159537" y="560186"/>
-                  </a:lnTo>
-                  <a:lnTo>
-                    <a:pt x="6087914" y="552973"/>
-                  </a:lnTo>
-                  <a:lnTo>
-                    <a:pt x="6016292" y="545566"/>
-                  </a:lnTo>
-                  <a:lnTo>
-                    <a:pt x="5944669" y="537959"/>
-                  </a:lnTo>
-                  <a:lnTo>
-                    <a:pt x="5873047" y="530148"/>
-                  </a:lnTo>
-                  <a:lnTo>
-                    <a:pt x="5801424" y="522127"/>
-                  </a:lnTo>
-                  <a:lnTo>
-                    <a:pt x="5729802" y="513889"/>
-                  </a:lnTo>
-                  <a:lnTo>
-                    <a:pt x="5658179" y="505430"/>
-                  </a:lnTo>
-                  <a:lnTo>
-                    <a:pt x="5586557" y="496744"/>
-                  </a:lnTo>
-                  <a:lnTo>
-                    <a:pt x="5514934" y="487823"/>
-                  </a:lnTo>
-                  <a:lnTo>
-                    <a:pt x="5443311" y="478663"/>
-                  </a:lnTo>
-                  <a:lnTo>
-                    <a:pt x="5371689" y="469255"/>
-                  </a:lnTo>
-                  <a:lnTo>
-                    <a:pt x="5300066" y="459595"/>
-                  </a:lnTo>
-                  <a:lnTo>
-                    <a:pt x="5228444" y="449675"/>
-                  </a:lnTo>
-                  <a:lnTo>
-                    <a:pt x="5156821" y="439488"/>
-                  </a:lnTo>
-                  <a:lnTo>
-                    <a:pt x="5085199" y="429027"/>
-                  </a:lnTo>
-                  <a:lnTo>
-                    <a:pt x="5013576" y="418284"/>
-                  </a:lnTo>
-                  <a:lnTo>
-                    <a:pt x="4941954" y="407252"/>
-                  </a:lnTo>
-                  <a:lnTo>
-                    <a:pt x="4870331" y="395923"/>
-                  </a:lnTo>
-                  <a:lnTo>
-                    <a:pt x="4798709" y="384289"/>
-                  </a:lnTo>
-                  <a:lnTo>
-                    <a:pt x="4727086" y="372343"/>
-                  </a:lnTo>
-                  <a:lnTo>
-                    <a:pt x="4655464" y="360074"/>
-                  </a:lnTo>
-                  <a:lnTo>
-                    <a:pt x="4583841" y="347476"/>
-                  </a:lnTo>
-                  <a:lnTo>
-                    <a:pt x="4512219" y="334538"/>
-                  </a:lnTo>
-                  <a:lnTo>
-                    <a:pt x="4440596" y="321253"/>
-                  </a:lnTo>
-                  <a:lnTo>
-                    <a:pt x="4368974" y="307610"/>
-                  </a:lnTo>
-                  <a:lnTo>
-                    <a:pt x="4297351" y="293599"/>
-                  </a:lnTo>
-                  <a:lnTo>
-                    <a:pt x="4225729" y="279212"/>
-                  </a:lnTo>
-                  <a:lnTo>
-                    <a:pt x="4154106" y="264437"/>
-                  </a:lnTo>
-                  <a:lnTo>
-                    <a:pt x="4082483" y="249265"/>
-                  </a:lnTo>
-                  <a:lnTo>
-                    <a:pt x="4010861" y="233685"/>
-                  </a:lnTo>
-                  <a:lnTo>
-                    <a:pt x="3939238" y="217685"/>
-                  </a:lnTo>
-                  <a:lnTo>
-                    <a:pt x="3867616" y="201254"/>
-                  </a:lnTo>
-                  <a:lnTo>
-                    <a:pt x="3795993" y="184382"/>
-                  </a:lnTo>
-                  <a:lnTo>
-                    <a:pt x="3724371" y="167055"/>
-                  </a:lnTo>
-                  <a:lnTo>
-                    <a:pt x="3652748" y="149263"/>
-                  </a:lnTo>
-                  <a:lnTo>
-                    <a:pt x="3581126" y="130991"/>
-                  </a:lnTo>
-                  <a:lnTo>
-                    <a:pt x="3509503" y="112227"/>
-                  </a:lnTo>
-                  <a:lnTo>
-                    <a:pt x="3437881" y="92959"/>
-                  </a:lnTo>
-                  <a:lnTo>
-                    <a:pt x="3366258" y="73172"/>
-                  </a:lnTo>
-                  <a:lnTo>
-                    <a:pt x="3294636" y="52853"/>
-                  </a:lnTo>
-                  <a:lnTo>
-                    <a:pt x="3223013" y="31987"/>
-                  </a:lnTo>
-                  <a:lnTo>
-                    <a:pt x="3151391" y="10559"/>
-                  </a:lnTo>
-                  <a:lnTo>
-                    <a:pt x="3079768" y="0"/>
-                  </a:lnTo>
-                  <a:lnTo>
-                    <a:pt x="3008146" y="2699"/>
-                  </a:lnTo>
-                  <a:lnTo>
-                    <a:pt x="2936523" y="5389"/>
-                  </a:lnTo>
-                  <a:lnTo>
-                    <a:pt x="2864901" y="8070"/>
-                  </a:lnTo>
-                  <a:lnTo>
-                    <a:pt x="2793278" y="10743"/>
-                  </a:lnTo>
-                  <a:lnTo>
-                    <a:pt x="2721655" y="13407"/>
-                  </a:lnTo>
-                  <a:lnTo>
-                    <a:pt x="2650033" y="16062"/>
-                  </a:lnTo>
-                  <a:lnTo>
-                    <a:pt x="2578410" y="18709"/>
-                  </a:lnTo>
-                  <a:lnTo>
-                    <a:pt x="2506788" y="21347"/>
-                  </a:lnTo>
-                  <a:lnTo>
-                    <a:pt x="2435165" y="23976"/>
-                  </a:lnTo>
-                  <a:lnTo>
-                    <a:pt x="2363543" y="26597"/>
-                  </a:lnTo>
-                  <a:lnTo>
-                    <a:pt x="2291920" y="29210"/>
-                  </a:lnTo>
-                  <a:lnTo>
-                    <a:pt x="2220298" y="31813"/>
-                  </a:lnTo>
-                  <a:lnTo>
-                    <a:pt x="2148675" y="34409"/>
-                  </a:lnTo>
-                  <a:lnTo>
-                    <a:pt x="2077053" y="36996"/>
-                  </a:lnTo>
-                  <a:lnTo>
-                    <a:pt x="2005430" y="39574"/>
-                  </a:lnTo>
-                  <a:lnTo>
-                    <a:pt x="1933808" y="42144"/>
-                  </a:lnTo>
-                  <a:lnTo>
-                    <a:pt x="1862185" y="44706"/>
-                  </a:lnTo>
-                  <a:lnTo>
-                    <a:pt x="1790563" y="47259"/>
-                  </a:lnTo>
-                  <a:lnTo>
-                    <a:pt x="1718940" y="49804"/>
-                  </a:lnTo>
-                  <a:lnTo>
-                    <a:pt x="1647318" y="52341"/>
-                  </a:lnTo>
-                  <a:lnTo>
-                    <a:pt x="1575695" y="54869"/>
-                  </a:lnTo>
-                  <a:lnTo>
-                    <a:pt x="1504073" y="57390"/>
-                  </a:lnTo>
-                  <a:lnTo>
-                    <a:pt x="1432450" y="59902"/>
-                  </a:lnTo>
-                  <a:lnTo>
-                    <a:pt x="1360827" y="62405"/>
-                  </a:lnTo>
-                  <a:lnTo>
-                    <a:pt x="1289205" y="64901"/>
-                  </a:lnTo>
-                  <a:lnTo>
-                    <a:pt x="1217582" y="67389"/>
-                  </a:lnTo>
-                  <a:lnTo>
-                    <a:pt x="1145960" y="69868"/>
-                  </a:lnTo>
-                  <a:lnTo>
-                    <a:pt x="1074337" y="72339"/>
-                  </a:lnTo>
-                  <a:lnTo>
-                    <a:pt x="1002715" y="74803"/>
-                  </a:lnTo>
-                  <a:lnTo>
-                    <a:pt x="931092" y="77258"/>
-                  </a:lnTo>
-                  <a:lnTo>
-                    <a:pt x="859470" y="79705"/>
-                  </a:lnTo>
-                  <a:lnTo>
-                    <a:pt x="787847" y="82144"/>
-                  </a:lnTo>
-                  <a:lnTo>
-                    <a:pt x="716225" y="84576"/>
-                  </a:lnTo>
-                  <a:lnTo>
-                    <a:pt x="644602" y="86999"/>
-                  </a:lnTo>
-                  <a:lnTo>
-                    <a:pt x="572980" y="89415"/>
-                  </a:lnTo>
-                  <a:lnTo>
-                    <a:pt x="501357" y="91822"/>
-                  </a:lnTo>
-                  <a:lnTo>
-                    <a:pt x="429735" y="94222"/>
-                  </a:lnTo>
-                  <a:lnTo>
-                    <a:pt x="358112" y="96614"/>
-                  </a:lnTo>
-                  <a:lnTo>
-                    <a:pt x="286490" y="98998"/>
-                  </a:lnTo>
-                  <a:lnTo>
-                    <a:pt x="214867" y="101374"/>
-                  </a:lnTo>
-                  <a:lnTo>
-                    <a:pt x="143245" y="103743"/>
-                  </a:lnTo>
-                  <a:lnTo>
-                    <a:pt x="71622" y="106104"/>
-                  </a:lnTo>
-                  <a:lnTo>
-                    <a:pt x="0" y="108457"/>
+                    <a:pt x="70344" y="24876"/>
+                  </a:lnTo>
+                  <a:lnTo>
+                    <a:pt x="140688" y="49100"/>
+                  </a:lnTo>
+                  <a:lnTo>
+                    <a:pt x="211033" y="72690"/>
+                  </a:lnTo>
+                  <a:lnTo>
+                    <a:pt x="281377" y="95662"/>
+                  </a:lnTo>
+                  <a:lnTo>
+                    <a:pt x="351722" y="118031"/>
+                  </a:lnTo>
+                  <a:lnTo>
+                    <a:pt x="422066" y="139814"/>
+                  </a:lnTo>
+                  <a:lnTo>
+                    <a:pt x="492411" y="161027"/>
+                  </a:lnTo>
+                  <a:lnTo>
+                    <a:pt x="562755" y="181683"/>
+                  </a:lnTo>
+                  <a:lnTo>
+                    <a:pt x="633100" y="201798"/>
+                  </a:lnTo>
+                  <a:lnTo>
+                    <a:pt x="703444" y="221386"/>
+                  </a:lnTo>
+                  <a:lnTo>
+                    <a:pt x="773789" y="240461"/>
+                  </a:lnTo>
+                  <a:lnTo>
+                    <a:pt x="844133" y="259036"/>
+                  </a:lnTo>
+                  <a:lnTo>
+                    <a:pt x="914478" y="277124"/>
+                  </a:lnTo>
+                  <a:lnTo>
+                    <a:pt x="984822" y="294738"/>
+                  </a:lnTo>
+                  <a:lnTo>
+                    <a:pt x="1055167" y="311891"/>
+                  </a:lnTo>
+                  <a:lnTo>
+                    <a:pt x="1125511" y="328593"/>
+                  </a:lnTo>
+                  <a:lnTo>
+                    <a:pt x="1195856" y="344859"/>
+                  </a:lnTo>
+                  <a:lnTo>
+                    <a:pt x="1266200" y="360698"/>
+                  </a:lnTo>
+                  <a:lnTo>
+                    <a:pt x="1336545" y="376121"/>
+                  </a:lnTo>
+                  <a:lnTo>
+                    <a:pt x="1406889" y="391141"/>
+                  </a:lnTo>
+                  <a:lnTo>
+                    <a:pt x="1477234" y="405767"/>
+                  </a:lnTo>
+                  <a:lnTo>
+                    <a:pt x="1547578" y="420010"/>
+                  </a:lnTo>
+                  <a:lnTo>
+                    <a:pt x="1617923" y="433880"/>
+                  </a:lnTo>
+                  <a:lnTo>
+                    <a:pt x="1688267" y="447386"/>
+                  </a:lnTo>
+                  <a:lnTo>
+                    <a:pt x="1758612" y="460538"/>
+                  </a:lnTo>
+                  <a:lnTo>
+                    <a:pt x="1828956" y="473345"/>
+                  </a:lnTo>
+                  <a:lnTo>
+                    <a:pt x="1899301" y="485817"/>
+                  </a:lnTo>
+                  <a:lnTo>
+                    <a:pt x="1969645" y="497962"/>
+                  </a:lnTo>
+                  <a:lnTo>
+                    <a:pt x="2039990" y="509789"/>
+                  </a:lnTo>
+                  <a:lnTo>
+                    <a:pt x="2110334" y="521305"/>
+                  </a:lnTo>
+                  <a:lnTo>
+                    <a:pt x="2180679" y="532520"/>
+                  </a:lnTo>
+                  <a:lnTo>
+                    <a:pt x="2251023" y="543441"/>
+                  </a:lnTo>
+                  <a:lnTo>
+                    <a:pt x="2321368" y="554076"/>
+                  </a:lnTo>
+                  <a:lnTo>
+                    <a:pt x="2391712" y="564432"/>
+                  </a:lnTo>
+                  <a:lnTo>
+                    <a:pt x="2462057" y="574517"/>
+                  </a:lnTo>
+                  <a:lnTo>
+                    <a:pt x="2532401" y="584338"/>
+                  </a:lnTo>
+                  <a:lnTo>
+                    <a:pt x="2602746" y="593901"/>
+                  </a:lnTo>
+                  <a:lnTo>
+                    <a:pt x="2673090" y="603213"/>
+                  </a:lnTo>
+                  <a:lnTo>
+                    <a:pt x="2743435" y="612282"/>
+                  </a:lnTo>
+                  <a:lnTo>
+                    <a:pt x="2813779" y="621113"/>
+                  </a:lnTo>
+                  <a:lnTo>
+                    <a:pt x="2884124" y="629712"/>
+                  </a:lnTo>
+                  <a:lnTo>
+                    <a:pt x="2954468" y="638086"/>
+                  </a:lnTo>
+                  <a:lnTo>
+                    <a:pt x="3024813" y="646241"/>
+                  </a:lnTo>
+                  <a:lnTo>
+                    <a:pt x="3095157" y="649394"/>
+                  </a:lnTo>
+                  <a:lnTo>
+                    <a:pt x="3165502" y="648413"/>
+                  </a:lnTo>
+                  <a:lnTo>
+                    <a:pt x="3235846" y="647430"/>
+                  </a:lnTo>
+                  <a:lnTo>
+                    <a:pt x="3306191" y="646443"/>
+                  </a:lnTo>
+                  <a:lnTo>
+                    <a:pt x="3376535" y="645453"/>
+                  </a:lnTo>
+                  <a:lnTo>
+                    <a:pt x="3446880" y="644460"/>
+                  </a:lnTo>
+                  <a:lnTo>
+                    <a:pt x="3517224" y="643463"/>
+                  </a:lnTo>
+                  <a:lnTo>
+                    <a:pt x="3587569" y="642463"/>
+                  </a:lnTo>
+                  <a:lnTo>
+                    <a:pt x="3657913" y="641460"/>
+                  </a:lnTo>
+                  <a:lnTo>
+                    <a:pt x="3728257" y="640454"/>
+                  </a:lnTo>
+                  <a:lnTo>
+                    <a:pt x="3798602" y="639444"/>
+                  </a:lnTo>
+                  <a:lnTo>
+                    <a:pt x="3868946" y="638431"/>
+                  </a:lnTo>
+                  <a:lnTo>
+                    <a:pt x="3939291" y="637415"/>
+                  </a:lnTo>
+                  <a:lnTo>
+                    <a:pt x="4009635" y="636396"/>
+                  </a:lnTo>
+                  <a:lnTo>
+                    <a:pt x="4079980" y="635373"/>
+                  </a:lnTo>
+                  <a:lnTo>
+                    <a:pt x="4150324" y="634346"/>
+                  </a:lnTo>
+                  <a:lnTo>
+                    <a:pt x="4220669" y="633317"/>
+                  </a:lnTo>
+                  <a:lnTo>
+                    <a:pt x="4291013" y="632284"/>
+                  </a:lnTo>
+                  <a:lnTo>
+                    <a:pt x="4361358" y="631248"/>
+                  </a:lnTo>
+                  <a:lnTo>
+                    <a:pt x="4431702" y="630208"/>
+                  </a:lnTo>
+                  <a:lnTo>
+                    <a:pt x="4502047" y="629165"/>
+                  </a:lnTo>
+                  <a:lnTo>
+                    <a:pt x="4572391" y="628118"/>
+                  </a:lnTo>
+                  <a:lnTo>
+                    <a:pt x="4642736" y="627068"/>
+                  </a:lnTo>
+                  <a:lnTo>
+                    <a:pt x="4713080" y="626015"/>
+                  </a:lnTo>
+                  <a:lnTo>
+                    <a:pt x="4783425" y="624958"/>
+                  </a:lnTo>
+                  <a:lnTo>
+                    <a:pt x="4853769" y="623898"/>
+                  </a:lnTo>
+                  <a:lnTo>
+                    <a:pt x="4924114" y="622834"/>
+                  </a:lnTo>
+                  <a:lnTo>
+                    <a:pt x="4994458" y="621767"/>
+                  </a:lnTo>
+                  <a:lnTo>
+                    <a:pt x="5064803" y="620696"/>
+                  </a:lnTo>
+                  <a:lnTo>
+                    <a:pt x="5135147" y="619622"/>
+                  </a:lnTo>
+                  <a:lnTo>
+                    <a:pt x="5205492" y="618544"/>
+                  </a:lnTo>
+                  <a:lnTo>
+                    <a:pt x="5275836" y="617463"/>
+                  </a:lnTo>
+                  <a:lnTo>
+                    <a:pt x="5346181" y="616378"/>
+                  </a:lnTo>
+                  <a:lnTo>
+                    <a:pt x="5416525" y="615290"/>
+                  </a:lnTo>
+                  <a:lnTo>
+                    <a:pt x="5486870" y="614198"/>
+                  </a:lnTo>
+                  <a:lnTo>
+                    <a:pt x="5557214" y="613102"/>
+                  </a:lnTo>
+                  <a:lnTo>
+                    <a:pt x="5627559" y="612003"/>
+                  </a:lnTo>
+                  <a:lnTo>
+                    <a:pt x="5697903" y="610901"/>
+                  </a:lnTo>
+                  <a:lnTo>
+                    <a:pt x="5768248" y="609794"/>
+                  </a:lnTo>
+                  <a:lnTo>
+                    <a:pt x="5838592" y="608685"/>
+                  </a:lnTo>
+                  <a:lnTo>
+                    <a:pt x="5908937" y="607571"/>
+                  </a:lnTo>
+                  <a:lnTo>
+                    <a:pt x="5979281" y="606454"/>
+                  </a:lnTo>
+                  <a:lnTo>
+                    <a:pt x="6049626" y="605333"/>
+                  </a:lnTo>
+                  <a:lnTo>
+                    <a:pt x="6119970" y="604209"/>
+                  </a:lnTo>
+                  <a:lnTo>
+                    <a:pt x="6190315" y="603081"/>
+                  </a:lnTo>
+                  <a:lnTo>
+                    <a:pt x="6260659" y="601949"/>
+                  </a:lnTo>
+                  <a:lnTo>
+                    <a:pt x="6331004" y="600813"/>
+                  </a:lnTo>
+                  <a:lnTo>
+                    <a:pt x="6401348" y="599674"/>
+                  </a:lnTo>
+                  <a:lnTo>
+                    <a:pt x="6471693" y="598531"/>
+                  </a:lnTo>
+                  <a:lnTo>
+                    <a:pt x="6542037" y="597384"/>
+                  </a:lnTo>
+                  <a:lnTo>
+                    <a:pt x="6612382" y="596234"/>
+                  </a:lnTo>
+                  <a:lnTo>
+                    <a:pt x="6682726" y="595080"/>
+                  </a:lnTo>
+                  <a:lnTo>
+                    <a:pt x="6753071" y="593922"/>
+                  </a:lnTo>
+                  <a:lnTo>
+                    <a:pt x="6823415" y="592760"/>
+                  </a:lnTo>
+                  <a:lnTo>
+                    <a:pt x="6893760" y="591595"/>
+                  </a:lnTo>
+                  <a:lnTo>
+                    <a:pt x="6964104" y="590425"/>
                   </a:lnTo>
                 </a:path>
               </a:pathLst>
@@ -4326,312 +4036,637 @@
           </p:nvSpPr>
           <p:spPr>
             <a:xfrm>
-              <a:off x="1172049" y="4181288"/>
-              <a:ext cx="7090630" cy="941558"/>
+              <a:off x="1235312" y="3101409"/>
+              <a:ext cx="6964104" cy="230396"/>
             </a:xfrm>
             <a:custGeom>
               <a:avLst/>
               <a:pathLst>
-                <a:path w="7090630" h="941558">
+                <a:path w="6964104" h="230396">
+                  <a:moveTo>
+                    <a:pt x="6964104" y="230396"/>
+                  </a:moveTo>
+                  <a:lnTo>
+                    <a:pt x="6893760" y="228553"/>
+                  </a:lnTo>
+                  <a:lnTo>
+                    <a:pt x="6823415" y="226660"/>
+                  </a:lnTo>
+                  <a:lnTo>
+                    <a:pt x="6753071" y="224716"/>
+                  </a:lnTo>
+                  <a:lnTo>
+                    <a:pt x="6682726" y="222720"/>
+                  </a:lnTo>
+                  <a:lnTo>
+                    <a:pt x="6612382" y="220671"/>
+                  </a:lnTo>
+                  <a:lnTo>
+                    <a:pt x="6542037" y="218566"/>
+                  </a:lnTo>
+                  <a:lnTo>
+                    <a:pt x="6471693" y="216404"/>
+                  </a:lnTo>
+                  <a:lnTo>
+                    <a:pt x="6401348" y="214185"/>
+                  </a:lnTo>
+                  <a:lnTo>
+                    <a:pt x="6331004" y="211905"/>
+                  </a:lnTo>
+                  <a:lnTo>
+                    <a:pt x="6260659" y="209565"/>
+                  </a:lnTo>
+                  <a:lnTo>
+                    <a:pt x="6190315" y="207161"/>
+                  </a:lnTo>
+                  <a:lnTo>
+                    <a:pt x="6119970" y="204693"/>
+                  </a:lnTo>
+                  <a:lnTo>
+                    <a:pt x="6049626" y="202158"/>
+                  </a:lnTo>
+                  <a:lnTo>
+                    <a:pt x="5979281" y="199555"/>
+                  </a:lnTo>
+                  <a:lnTo>
+                    <a:pt x="5908937" y="196882"/>
+                  </a:lnTo>
+                  <a:lnTo>
+                    <a:pt x="5838592" y="194137"/>
+                  </a:lnTo>
+                  <a:lnTo>
+                    <a:pt x="5768248" y="191318"/>
+                  </a:lnTo>
+                  <a:lnTo>
+                    <a:pt x="5697903" y="188423"/>
+                  </a:lnTo>
+                  <a:lnTo>
+                    <a:pt x="5627559" y="185450"/>
+                  </a:lnTo>
+                  <a:lnTo>
+                    <a:pt x="5557214" y="182398"/>
+                  </a:lnTo>
+                  <a:lnTo>
+                    <a:pt x="5486870" y="179263"/>
+                  </a:lnTo>
+                  <a:lnTo>
+                    <a:pt x="5416525" y="176044"/>
+                  </a:lnTo>
+                  <a:lnTo>
+                    <a:pt x="5346181" y="172738"/>
+                  </a:lnTo>
+                  <a:lnTo>
+                    <a:pt x="5275836" y="169343"/>
+                  </a:lnTo>
+                  <a:lnTo>
+                    <a:pt x="5205492" y="165857"/>
+                  </a:lnTo>
+                  <a:lnTo>
+                    <a:pt x="5135147" y="162277"/>
+                  </a:lnTo>
+                  <a:lnTo>
+                    <a:pt x="5064803" y="158601"/>
+                  </a:lnTo>
+                  <a:lnTo>
+                    <a:pt x="4994458" y="154825"/>
+                  </a:lnTo>
+                  <a:lnTo>
+                    <a:pt x="4924114" y="150948"/>
+                  </a:lnTo>
+                  <a:lnTo>
+                    <a:pt x="4853769" y="146967"/>
+                  </a:lnTo>
+                  <a:lnTo>
+                    <a:pt x="4783425" y="142879"/>
+                  </a:lnTo>
+                  <a:lnTo>
+                    <a:pt x="4713080" y="138681"/>
+                  </a:lnTo>
+                  <a:lnTo>
+                    <a:pt x="4642736" y="134369"/>
+                  </a:lnTo>
+                  <a:lnTo>
+                    <a:pt x="4572391" y="129942"/>
+                  </a:lnTo>
+                  <a:lnTo>
+                    <a:pt x="4502047" y="125396"/>
+                  </a:lnTo>
+                  <a:lnTo>
+                    <a:pt x="4431702" y="120727"/>
+                  </a:lnTo>
+                  <a:lnTo>
+                    <a:pt x="4361358" y="115932"/>
+                  </a:lnTo>
+                  <a:lnTo>
+                    <a:pt x="4291013" y="111009"/>
+                  </a:lnTo>
+                  <a:lnTo>
+                    <a:pt x="4220669" y="105953"/>
+                  </a:lnTo>
+                  <a:lnTo>
+                    <a:pt x="4150324" y="100761"/>
+                  </a:lnTo>
+                  <a:lnTo>
+                    <a:pt x="4079980" y="95429"/>
+                  </a:lnTo>
+                  <a:lnTo>
+                    <a:pt x="4009635" y="89954"/>
+                  </a:lnTo>
+                  <a:lnTo>
+                    <a:pt x="3939291" y="84331"/>
+                  </a:lnTo>
+                  <a:lnTo>
+                    <a:pt x="3868946" y="78557"/>
+                  </a:lnTo>
+                  <a:lnTo>
+                    <a:pt x="3798602" y="72628"/>
+                  </a:lnTo>
+                  <a:lnTo>
+                    <a:pt x="3728257" y="66539"/>
+                  </a:lnTo>
+                  <a:lnTo>
+                    <a:pt x="3657913" y="60286"/>
+                  </a:lnTo>
+                  <a:lnTo>
+                    <a:pt x="3587569" y="53865"/>
+                  </a:lnTo>
+                  <a:lnTo>
+                    <a:pt x="3517224" y="47271"/>
+                  </a:lnTo>
+                  <a:lnTo>
+                    <a:pt x="3446880" y="40500"/>
+                  </a:lnTo>
+                  <a:lnTo>
+                    <a:pt x="3376535" y="33546"/>
+                  </a:lnTo>
+                  <a:lnTo>
+                    <a:pt x="3306191" y="26406"/>
+                  </a:lnTo>
+                  <a:lnTo>
+                    <a:pt x="3235846" y="19073"/>
+                  </a:lnTo>
+                  <a:lnTo>
+                    <a:pt x="3165502" y="11543"/>
+                  </a:lnTo>
+                  <a:lnTo>
+                    <a:pt x="3095157" y="3810"/>
+                  </a:lnTo>
+                  <a:lnTo>
+                    <a:pt x="3024813" y="0"/>
+                  </a:lnTo>
+                  <a:lnTo>
+                    <a:pt x="2954468" y="974"/>
+                  </a:lnTo>
+                  <a:lnTo>
+                    <a:pt x="2884124" y="1944"/>
+                  </a:lnTo>
+                  <a:lnTo>
+                    <a:pt x="2813779" y="2912"/>
+                  </a:lnTo>
+                  <a:lnTo>
+                    <a:pt x="2743435" y="3877"/>
+                  </a:lnTo>
+                  <a:lnTo>
+                    <a:pt x="2673090" y="4838"/>
+                  </a:lnTo>
+                  <a:lnTo>
+                    <a:pt x="2602746" y="5796"/>
+                  </a:lnTo>
+                  <a:lnTo>
+                    <a:pt x="2532401" y="6751"/>
+                  </a:lnTo>
+                  <a:lnTo>
+                    <a:pt x="2462057" y="7703"/>
+                  </a:lnTo>
+                  <a:lnTo>
+                    <a:pt x="2391712" y="8652"/>
+                  </a:lnTo>
+                  <a:lnTo>
+                    <a:pt x="2321368" y="9598"/>
+                  </a:lnTo>
+                  <a:lnTo>
+                    <a:pt x="2251023" y="10541"/>
+                  </a:lnTo>
+                  <a:lnTo>
+                    <a:pt x="2180679" y="11480"/>
+                  </a:lnTo>
+                  <a:lnTo>
+                    <a:pt x="2110334" y="12417"/>
+                  </a:lnTo>
+                  <a:lnTo>
+                    <a:pt x="2039990" y="13351"/>
+                  </a:lnTo>
+                  <a:lnTo>
+                    <a:pt x="1969645" y="14281"/>
+                  </a:lnTo>
+                  <a:lnTo>
+                    <a:pt x="1899301" y="15209"/>
+                  </a:lnTo>
+                  <a:lnTo>
+                    <a:pt x="1828956" y="16133"/>
+                  </a:lnTo>
+                  <a:lnTo>
+                    <a:pt x="1758612" y="17054"/>
+                  </a:lnTo>
+                  <a:lnTo>
+                    <a:pt x="1688267" y="17973"/>
+                  </a:lnTo>
+                  <a:lnTo>
+                    <a:pt x="1617923" y="18888"/>
+                  </a:lnTo>
+                  <a:lnTo>
+                    <a:pt x="1547578" y="19801"/>
+                  </a:lnTo>
+                  <a:lnTo>
+                    <a:pt x="1477234" y="20710"/>
+                  </a:lnTo>
+                  <a:lnTo>
+                    <a:pt x="1406889" y="21617"/>
+                  </a:lnTo>
+                  <a:lnTo>
+                    <a:pt x="1336545" y="22520"/>
+                  </a:lnTo>
+                  <a:lnTo>
+                    <a:pt x="1266200" y="23421"/>
+                  </a:lnTo>
+                  <a:lnTo>
+                    <a:pt x="1195856" y="24319"/>
+                  </a:lnTo>
+                  <a:lnTo>
+                    <a:pt x="1125511" y="25213"/>
+                  </a:lnTo>
+                  <a:lnTo>
+                    <a:pt x="1055167" y="26105"/>
+                  </a:lnTo>
+                  <a:lnTo>
+                    <a:pt x="984822" y="26994"/>
+                  </a:lnTo>
+                  <a:lnTo>
+                    <a:pt x="914478" y="27880"/>
+                  </a:lnTo>
+                  <a:lnTo>
+                    <a:pt x="844133" y="28763"/>
+                  </a:lnTo>
+                  <a:lnTo>
+                    <a:pt x="773789" y="29644"/>
+                  </a:lnTo>
+                  <a:lnTo>
+                    <a:pt x="703444" y="30521"/>
+                  </a:lnTo>
+                  <a:lnTo>
+                    <a:pt x="633100" y="31396"/>
+                  </a:lnTo>
+                  <a:lnTo>
+                    <a:pt x="562755" y="32267"/>
+                  </a:lnTo>
+                  <a:lnTo>
+                    <a:pt x="492411" y="33136"/>
+                  </a:lnTo>
+                  <a:lnTo>
+                    <a:pt x="422066" y="34002"/>
+                  </a:lnTo>
+                  <a:lnTo>
+                    <a:pt x="351722" y="34865"/>
+                  </a:lnTo>
+                  <a:lnTo>
+                    <a:pt x="281377" y="35726"/>
+                  </a:lnTo>
+                  <a:lnTo>
+                    <a:pt x="211033" y="36583"/>
+                  </a:lnTo>
+                  <a:lnTo>
+                    <a:pt x="140688" y="37438"/>
+                  </a:lnTo>
+                  <a:lnTo>
+                    <a:pt x="70344" y="38290"/>
+                  </a:lnTo>
+                  <a:lnTo>
+                    <a:pt x="0" y="39139"/>
+                  </a:lnTo>
+                </a:path>
+              </a:pathLst>
+            </a:custGeom>
+          </p:spPr>
+          <p:txBody>
+            <a:bodyPr/>
+            <a:lstStyle/>
+            <a:p/>
+          </p:txBody>
+        </p:sp>
+        <p:sp>
+          <p:nvSpPr>
+            <p:cNvPr id="26" name="pl26"/>
+            <p:cNvSpPr/>
+            <p:nvPr/>
+          </p:nvSpPr>
+          <p:spPr>
+            <a:xfrm>
+              <a:off x="1235312" y="2903742"/>
+              <a:ext cx="6964104" cy="339786"/>
+            </a:xfrm>
+            <a:custGeom>
+              <a:avLst/>
+              <a:pathLst>
+                <a:path w="6964104" h="339786">
                   <a:moveTo>
                     <a:pt x="0" y="0"/>
                   </a:moveTo>
                   <a:lnTo>
-                    <a:pt x="71622" y="15931"/>
-                  </a:lnTo>
-                  <a:lnTo>
-                    <a:pt x="143245" y="31677"/>
-                  </a:lnTo>
-                  <a:lnTo>
-                    <a:pt x="214867" y="47242"/>
-                  </a:lnTo>
-                  <a:lnTo>
-                    <a:pt x="286490" y="62626"/>
-                  </a:lnTo>
-                  <a:lnTo>
-                    <a:pt x="358112" y="77832"/>
-                  </a:lnTo>
-                  <a:lnTo>
-                    <a:pt x="429735" y="92862"/>
-                  </a:lnTo>
-                  <a:lnTo>
-                    <a:pt x="501357" y="107718"/>
-                  </a:lnTo>
-                  <a:lnTo>
-                    <a:pt x="572980" y="122402"/>
-                  </a:lnTo>
-                  <a:lnTo>
-                    <a:pt x="644602" y="136916"/>
-                  </a:lnTo>
-                  <a:lnTo>
-                    <a:pt x="716225" y="151262"/>
-                  </a:lnTo>
-                  <a:lnTo>
-                    <a:pt x="787847" y="165442"/>
-                  </a:lnTo>
-                  <a:lnTo>
-                    <a:pt x="859470" y="179458"/>
-                  </a:lnTo>
-                  <a:lnTo>
-                    <a:pt x="931092" y="193311"/>
-                  </a:lnTo>
-                  <a:lnTo>
-                    <a:pt x="1002715" y="207004"/>
-                  </a:lnTo>
-                  <a:lnTo>
-                    <a:pt x="1074337" y="220539"/>
-                  </a:lnTo>
-                  <a:lnTo>
-                    <a:pt x="1145960" y="233917"/>
-                  </a:lnTo>
-                  <a:lnTo>
-                    <a:pt x="1217582" y="247140"/>
-                  </a:lnTo>
-                  <a:lnTo>
-                    <a:pt x="1289205" y="260209"/>
-                  </a:lnTo>
-                  <a:lnTo>
-                    <a:pt x="1360827" y="273128"/>
-                  </a:lnTo>
-                  <a:lnTo>
-                    <a:pt x="1432450" y="285897"/>
-                  </a:lnTo>
-                  <a:lnTo>
-                    <a:pt x="1504073" y="298518"/>
-                  </a:lnTo>
-                  <a:lnTo>
-                    <a:pt x="1575695" y="310993"/>
-                  </a:lnTo>
-                  <a:lnTo>
-                    <a:pt x="1647318" y="323323"/>
-                  </a:lnTo>
-                  <a:lnTo>
-                    <a:pt x="1718940" y="335511"/>
-                  </a:lnTo>
-                  <a:lnTo>
-                    <a:pt x="1790563" y="347557"/>
-                  </a:lnTo>
-                  <a:lnTo>
-                    <a:pt x="1862185" y="359464"/>
-                  </a:lnTo>
-                  <a:lnTo>
-                    <a:pt x="1933808" y="371234"/>
-                  </a:lnTo>
-                  <a:lnTo>
-                    <a:pt x="2005430" y="382867"/>
-                  </a:lnTo>
-                  <a:lnTo>
-                    <a:pt x="2077053" y="394365"/>
-                  </a:lnTo>
-                  <a:lnTo>
-                    <a:pt x="2148675" y="405730"/>
-                  </a:lnTo>
-                  <a:lnTo>
-                    <a:pt x="2220298" y="416964"/>
-                  </a:lnTo>
-                  <a:lnTo>
-                    <a:pt x="2291920" y="428067"/>
-                  </a:lnTo>
-                  <a:lnTo>
-                    <a:pt x="2363543" y="439042"/>
-                  </a:lnTo>
-                  <a:lnTo>
-                    <a:pt x="2435165" y="449890"/>
-                  </a:lnTo>
-                  <a:lnTo>
-                    <a:pt x="2506788" y="460612"/>
-                  </a:lnTo>
-                  <a:lnTo>
-                    <a:pt x="2578410" y="471210"/>
-                  </a:lnTo>
-                  <a:lnTo>
-                    <a:pt x="2650033" y="481686"/>
-                  </a:lnTo>
-                  <a:lnTo>
-                    <a:pt x="2721655" y="492040"/>
-                  </a:lnTo>
-                  <a:lnTo>
-                    <a:pt x="2793278" y="502274"/>
-                  </a:lnTo>
-                  <a:lnTo>
-                    <a:pt x="2864901" y="512390"/>
-                  </a:lnTo>
-                  <a:lnTo>
-                    <a:pt x="2936523" y="522389"/>
-                  </a:lnTo>
-                  <a:lnTo>
-                    <a:pt x="3008146" y="532272"/>
-                  </a:lnTo>
-                  <a:lnTo>
-                    <a:pt x="3079768" y="542040"/>
-                  </a:lnTo>
-                  <a:lnTo>
-                    <a:pt x="3151391" y="551695"/>
-                  </a:lnTo>
-                  <a:lnTo>
-                    <a:pt x="3223013" y="561239"/>
-                  </a:lnTo>
-                  <a:lnTo>
-                    <a:pt x="3294636" y="570672"/>
-                  </a:lnTo>
-                  <a:lnTo>
-                    <a:pt x="3366258" y="579996"/>
-                  </a:lnTo>
-                  <a:lnTo>
-                    <a:pt x="3437881" y="589212"/>
-                  </a:lnTo>
-                  <a:lnTo>
-                    <a:pt x="3509503" y="598321"/>
-                  </a:lnTo>
-                  <a:lnTo>
-                    <a:pt x="3581126" y="607325"/>
-                  </a:lnTo>
-                  <a:lnTo>
-                    <a:pt x="3652748" y="616224"/>
-                  </a:lnTo>
-                  <a:lnTo>
-                    <a:pt x="3724371" y="625021"/>
-                  </a:lnTo>
-                  <a:lnTo>
-                    <a:pt x="3795993" y="633715"/>
-                  </a:lnTo>
-                  <a:lnTo>
-                    <a:pt x="3867616" y="642309"/>
-                  </a:lnTo>
-                  <a:lnTo>
-                    <a:pt x="3939238" y="650803"/>
-                  </a:lnTo>
-                  <a:lnTo>
-                    <a:pt x="4010861" y="659199"/>
-                  </a:lnTo>
-                  <a:lnTo>
-                    <a:pt x="4082483" y="667498"/>
-                  </a:lnTo>
-                  <a:lnTo>
-                    <a:pt x="4154106" y="675701"/>
-                  </a:lnTo>
-                  <a:lnTo>
-                    <a:pt x="4225729" y="683809"/>
-                  </a:lnTo>
-                  <a:lnTo>
-                    <a:pt x="4297351" y="691823"/>
-                  </a:lnTo>
-                  <a:lnTo>
-                    <a:pt x="4368974" y="699744"/>
-                  </a:lnTo>
-                  <a:lnTo>
-                    <a:pt x="4440596" y="707573"/>
-                  </a:lnTo>
-                  <a:lnTo>
-                    <a:pt x="4512219" y="715312"/>
-                  </a:lnTo>
-                  <a:lnTo>
-                    <a:pt x="4583841" y="722961"/>
-                  </a:lnTo>
-                  <a:lnTo>
-                    <a:pt x="4655464" y="730522"/>
-                  </a:lnTo>
-                  <a:lnTo>
-                    <a:pt x="4727086" y="737995"/>
-                  </a:lnTo>
-                  <a:lnTo>
-                    <a:pt x="4798709" y="745381"/>
-                  </a:lnTo>
-                  <a:lnTo>
-                    <a:pt x="4870331" y="752682"/>
-                  </a:lnTo>
-                  <a:lnTo>
-                    <a:pt x="4941954" y="759899"/>
-                  </a:lnTo>
-                  <a:lnTo>
-                    <a:pt x="5013576" y="767032"/>
-                  </a:lnTo>
-                  <a:lnTo>
-                    <a:pt x="5085199" y="774082"/>
-                  </a:lnTo>
-                  <a:lnTo>
-                    <a:pt x="5156821" y="781051"/>
-                  </a:lnTo>
-                  <a:lnTo>
-                    <a:pt x="5228444" y="787939"/>
-                  </a:lnTo>
-                  <a:lnTo>
-                    <a:pt x="5300066" y="794747"/>
-                  </a:lnTo>
-                  <a:lnTo>
-                    <a:pt x="5371689" y="801477"/>
-                  </a:lnTo>
-                  <a:lnTo>
-                    <a:pt x="5443311" y="808128"/>
-                  </a:lnTo>
-                  <a:lnTo>
-                    <a:pt x="5514934" y="814703"/>
-                  </a:lnTo>
-                  <a:lnTo>
-                    <a:pt x="5586557" y="821201"/>
-                  </a:lnTo>
-                  <a:lnTo>
-                    <a:pt x="5658179" y="827624"/>
-                  </a:lnTo>
-                  <a:lnTo>
-                    <a:pt x="5729802" y="833973"/>
-                  </a:lnTo>
-                  <a:lnTo>
-                    <a:pt x="5801424" y="840248"/>
-                  </a:lnTo>
-                  <a:lnTo>
-                    <a:pt x="5873047" y="846451"/>
-                  </a:lnTo>
-                  <a:lnTo>
-                    <a:pt x="5944669" y="852582"/>
-                  </a:lnTo>
-                  <a:lnTo>
-                    <a:pt x="6016292" y="858642"/>
-                  </a:lnTo>
-                  <a:lnTo>
-                    <a:pt x="6087914" y="864631"/>
-                  </a:lnTo>
-                  <a:lnTo>
-                    <a:pt x="6159537" y="870551"/>
-                  </a:lnTo>
-                  <a:lnTo>
-                    <a:pt x="6231159" y="876403"/>
-                  </a:lnTo>
-                  <a:lnTo>
-                    <a:pt x="6302782" y="882187"/>
-                  </a:lnTo>
-                  <a:lnTo>
-                    <a:pt x="6374404" y="887904"/>
-                  </a:lnTo>
-                  <a:lnTo>
-                    <a:pt x="6446027" y="893555"/>
-                  </a:lnTo>
-                  <a:lnTo>
-                    <a:pt x="6517649" y="899141"/>
-                  </a:lnTo>
-                  <a:lnTo>
-                    <a:pt x="6589272" y="904661"/>
-                  </a:lnTo>
-                  <a:lnTo>
-                    <a:pt x="6660894" y="910118"/>
-                  </a:lnTo>
-                  <a:lnTo>
-                    <a:pt x="6732517" y="915512"/>
-                  </a:lnTo>
-                  <a:lnTo>
-                    <a:pt x="6804139" y="920843"/>
-                  </a:lnTo>
-                  <a:lnTo>
-                    <a:pt x="6875762" y="926112"/>
-                  </a:lnTo>
-                  <a:lnTo>
-                    <a:pt x="6947385" y="931321"/>
-                  </a:lnTo>
-                  <a:lnTo>
-                    <a:pt x="7019007" y="936469"/>
-                  </a:lnTo>
-                  <a:lnTo>
-                    <a:pt x="7090630" y="941558"/>
+                    <a:pt x="70344" y="5749"/>
+                  </a:lnTo>
+                  <a:lnTo>
+                    <a:pt x="140688" y="11431"/>
+                  </a:lnTo>
+                  <a:lnTo>
+                    <a:pt x="211033" y="17048"/>
+                  </a:lnTo>
+                  <a:lnTo>
+                    <a:pt x="281377" y="22600"/>
+                  </a:lnTo>
+                  <a:lnTo>
+                    <a:pt x="351722" y="28088"/>
+                  </a:lnTo>
+                  <a:lnTo>
+                    <a:pt x="422066" y="33512"/>
+                  </a:lnTo>
+                  <a:lnTo>
+                    <a:pt x="492411" y="38873"/>
+                  </a:lnTo>
+                  <a:lnTo>
+                    <a:pt x="562755" y="44172"/>
+                  </a:lnTo>
+                  <a:lnTo>
+                    <a:pt x="633100" y="49410"/>
+                  </a:lnTo>
+                  <a:lnTo>
+                    <a:pt x="703444" y="54587"/>
+                  </a:lnTo>
+                  <a:lnTo>
+                    <a:pt x="773789" y="59704"/>
+                  </a:lnTo>
+                  <a:lnTo>
+                    <a:pt x="844133" y="64762"/>
+                  </a:lnTo>
+                  <a:lnTo>
+                    <a:pt x="914478" y="69761"/>
+                  </a:lnTo>
+                  <a:lnTo>
+                    <a:pt x="984822" y="74703"/>
+                  </a:lnTo>
+                  <a:lnTo>
+                    <a:pt x="1055167" y="79587"/>
+                  </a:lnTo>
+                  <a:lnTo>
+                    <a:pt x="1125511" y="84415"/>
+                  </a:lnTo>
+                  <a:lnTo>
+                    <a:pt x="1195856" y="89187"/>
+                  </a:lnTo>
+                  <a:lnTo>
+                    <a:pt x="1266200" y="93903"/>
+                  </a:lnTo>
+                  <a:lnTo>
+                    <a:pt x="1336545" y="98565"/>
+                  </a:lnTo>
+                  <a:lnTo>
+                    <a:pt x="1406889" y="103173"/>
+                  </a:lnTo>
+                  <a:lnTo>
+                    <a:pt x="1477234" y="107728"/>
+                  </a:lnTo>
+                  <a:lnTo>
+                    <a:pt x="1547578" y="112230"/>
+                  </a:lnTo>
+                  <a:lnTo>
+                    <a:pt x="1617923" y="116679"/>
+                  </a:lnTo>
+                  <a:lnTo>
+                    <a:pt x="1688267" y="121078"/>
+                  </a:lnTo>
+                  <a:lnTo>
+                    <a:pt x="1758612" y="125425"/>
+                  </a:lnTo>
+                  <a:lnTo>
+                    <a:pt x="1828956" y="129722"/>
+                  </a:lnTo>
+                  <a:lnTo>
+                    <a:pt x="1899301" y="133969"/>
+                  </a:lnTo>
+                  <a:lnTo>
+                    <a:pt x="1969645" y="138167"/>
+                  </a:lnTo>
+                  <a:lnTo>
+                    <a:pt x="2039990" y="142317"/>
+                  </a:lnTo>
+                  <a:lnTo>
+                    <a:pt x="2110334" y="146418"/>
+                  </a:lnTo>
+                  <a:lnTo>
+                    <a:pt x="2180679" y="150472"/>
+                  </a:lnTo>
+                  <a:lnTo>
+                    <a:pt x="2251023" y="154479"/>
+                  </a:lnTo>
+                  <a:lnTo>
+                    <a:pt x="2321368" y="158440"/>
+                  </a:lnTo>
+                  <a:lnTo>
+                    <a:pt x="2391712" y="162354"/>
+                  </a:lnTo>
+                  <a:lnTo>
+                    <a:pt x="2462057" y="166224"/>
+                  </a:lnTo>
+                  <a:lnTo>
+                    <a:pt x="2532401" y="170048"/>
+                  </a:lnTo>
+                  <a:lnTo>
+                    <a:pt x="2602746" y="173829"/>
+                  </a:lnTo>
+                  <a:lnTo>
+                    <a:pt x="2673090" y="177565"/>
+                  </a:lnTo>
+                  <a:lnTo>
+                    <a:pt x="2743435" y="181259"/>
+                  </a:lnTo>
+                  <a:lnTo>
+                    <a:pt x="2813779" y="184909"/>
+                  </a:lnTo>
+                  <a:lnTo>
+                    <a:pt x="2884124" y="188517"/>
+                  </a:lnTo>
+                  <a:lnTo>
+                    <a:pt x="2954468" y="192084"/>
+                  </a:lnTo>
+                  <a:lnTo>
+                    <a:pt x="3024813" y="195609"/>
+                  </a:lnTo>
+                  <a:lnTo>
+                    <a:pt x="3095157" y="199094"/>
+                  </a:lnTo>
+                  <a:lnTo>
+                    <a:pt x="3165502" y="202538"/>
+                  </a:lnTo>
+                  <a:lnTo>
+                    <a:pt x="3235846" y="205942"/>
+                  </a:lnTo>
+                  <a:lnTo>
+                    <a:pt x="3306191" y="209307"/>
+                  </a:lnTo>
+                  <a:lnTo>
+                    <a:pt x="3376535" y="212632"/>
+                  </a:lnTo>
+                  <a:lnTo>
+                    <a:pt x="3446880" y="215920"/>
+                  </a:lnTo>
+                  <a:lnTo>
+                    <a:pt x="3517224" y="219169"/>
+                  </a:lnTo>
+                  <a:lnTo>
+                    <a:pt x="3587569" y="222380"/>
+                  </a:lnTo>
+                  <a:lnTo>
+                    <a:pt x="3657913" y="225555"/>
+                  </a:lnTo>
+                  <a:lnTo>
+                    <a:pt x="3728257" y="228693"/>
+                  </a:lnTo>
+                  <a:lnTo>
+                    <a:pt x="3798602" y="231794"/>
+                  </a:lnTo>
+                  <a:lnTo>
+                    <a:pt x="3868946" y="234859"/>
+                  </a:lnTo>
+                  <a:lnTo>
+                    <a:pt x="3939291" y="237889"/>
+                  </a:lnTo>
+                  <a:lnTo>
+                    <a:pt x="4009635" y="240884"/>
+                  </a:lnTo>
+                  <a:lnTo>
+                    <a:pt x="4079980" y="243844"/>
+                  </a:lnTo>
+                  <a:lnTo>
+                    <a:pt x="4150324" y="246770"/>
+                  </a:lnTo>
+                  <a:lnTo>
+                    <a:pt x="4220669" y="249662"/>
+                  </a:lnTo>
+                  <a:lnTo>
+                    <a:pt x="4291013" y="252521"/>
+                  </a:lnTo>
+                  <a:lnTo>
+                    <a:pt x="4361358" y="255346"/>
+                  </a:lnTo>
+                  <a:lnTo>
+                    <a:pt x="4431702" y="258139"/>
+                  </a:lnTo>
+                  <a:lnTo>
+                    <a:pt x="4502047" y="260899"/>
+                  </a:lnTo>
+                  <a:lnTo>
+                    <a:pt x="4572391" y="263628"/>
+                  </a:lnTo>
+                  <a:lnTo>
+                    <a:pt x="4642736" y="266325"/>
+                  </a:lnTo>
+                  <a:lnTo>
+                    <a:pt x="4713080" y="268990"/>
+                  </a:lnTo>
+                  <a:lnTo>
+                    <a:pt x="4783425" y="271625"/>
+                  </a:lnTo>
+                  <a:lnTo>
+                    <a:pt x="4853769" y="274229"/>
+                  </a:lnTo>
+                  <a:lnTo>
+                    <a:pt x="4924114" y="276803"/>
+                  </a:lnTo>
+                  <a:lnTo>
+                    <a:pt x="4994458" y="279348"/>
+                  </a:lnTo>
+                  <a:lnTo>
+                    <a:pt x="5064803" y="281863"/>
+                  </a:lnTo>
+                  <a:lnTo>
+                    <a:pt x="5135147" y="284348"/>
+                  </a:lnTo>
+                  <a:lnTo>
+                    <a:pt x="5205492" y="286805"/>
+                  </a:lnTo>
+                  <a:lnTo>
+                    <a:pt x="5275836" y="289234"/>
+                  </a:lnTo>
+                  <a:lnTo>
+                    <a:pt x="5346181" y="291634"/>
+                  </a:lnTo>
+                  <a:lnTo>
+                    <a:pt x="5416525" y="294007"/>
+                  </a:lnTo>
+                  <a:lnTo>
+                    <a:pt x="5486870" y="296352"/>
+                  </a:lnTo>
+                  <a:lnTo>
+                    <a:pt x="5557214" y="298670"/>
+                  </a:lnTo>
+                  <a:lnTo>
+                    <a:pt x="5627559" y="300961"/>
+                  </a:lnTo>
+                  <a:lnTo>
+                    <a:pt x="5697903" y="303226"/>
+                  </a:lnTo>
+                  <a:lnTo>
+                    <a:pt x="5768248" y="305464"/>
+                  </a:lnTo>
+                  <a:lnTo>
+                    <a:pt x="5838592" y="307676"/>
+                  </a:lnTo>
+                  <a:lnTo>
+                    <a:pt x="5908937" y="309863"/>
+                  </a:lnTo>
+                  <a:lnTo>
+                    <a:pt x="5979281" y="312025"/>
+                  </a:lnTo>
+                  <a:lnTo>
+                    <a:pt x="6049626" y="314161"/>
+                  </a:lnTo>
+                  <a:lnTo>
+                    <a:pt x="6119970" y="316273"/>
+                  </a:lnTo>
+                  <a:lnTo>
+                    <a:pt x="6190315" y="318360"/>
+                  </a:lnTo>
+                  <a:lnTo>
+                    <a:pt x="6260659" y="320423"/>
+                  </a:lnTo>
+                  <a:lnTo>
+                    <a:pt x="6331004" y="322463"/>
+                  </a:lnTo>
+                  <a:lnTo>
+                    <a:pt x="6401348" y="324478"/>
+                  </a:lnTo>
+                  <a:lnTo>
+                    <a:pt x="6471693" y="326471"/>
+                  </a:lnTo>
+                  <a:lnTo>
+                    <a:pt x="6542037" y="328440"/>
+                  </a:lnTo>
+                  <a:lnTo>
+                    <a:pt x="6612382" y="330386"/>
+                  </a:lnTo>
+                  <a:lnTo>
+                    <a:pt x="6682726" y="332310"/>
+                  </a:lnTo>
+                  <a:lnTo>
+                    <a:pt x="6753071" y="334212"/>
+                  </a:lnTo>
+                  <a:lnTo>
+                    <a:pt x="6823415" y="336091"/>
+                  </a:lnTo>
+                  <a:lnTo>
+                    <a:pt x="6893760" y="337949"/>
+                  </a:lnTo>
+                  <a:lnTo>
+                    <a:pt x="6964104" y="339786"/>
                   </a:lnTo>
                 </a:path>
               </a:pathLst>
@@ -4654,27 +4689,27 @@
         </p:sp>
         <p:sp>
           <p:nvSpPr>
-            <p:cNvPr id="26" name="pl26"/>
+            <p:cNvPr id="27" name="pl27"/>
             <p:cNvSpPr/>
             <p:nvPr/>
           </p:nvSpPr>
           <p:spPr>
             <a:xfrm>
-              <a:off x="817517" y="4727786"/>
-              <a:ext cx="7799693" cy="0"/>
+              <a:off x="887106" y="3100960"/>
+              <a:ext cx="7660515" cy="0"/>
             </a:xfrm>
             <a:custGeom>
               <a:avLst/>
               <a:pathLst>
-                <a:path w="7799693" h="0">
+                <a:path w="7660515" h="0">
                   <a:moveTo>
                     <a:pt x="0" y="0"/>
                   </a:moveTo>
                   <a:lnTo>
-                    <a:pt x="7799693" y="0"/>
-                  </a:lnTo>
-                  <a:lnTo>
-                    <a:pt x="7799693" y="0"/>
+                    <a:pt x="7660515" y="0"/>
+                  </a:lnTo>
+                  <a:lnTo>
+                    <a:pt x="7660515" y="0"/>
                   </a:lnTo>
                 </a:path>
               </a:pathLst>
@@ -4697,21 +4732,21 @@
         </p:sp>
         <p:sp>
           <p:nvSpPr>
-            <p:cNvPr id="27" name="pl27"/>
+            <p:cNvPr id="28" name="pl28"/>
             <p:cNvSpPr/>
             <p:nvPr/>
           </p:nvSpPr>
           <p:spPr>
             <a:xfrm>
-              <a:off x="4284781" y="2073503"/>
-              <a:ext cx="0" cy="3649639"/>
+              <a:off x="4292500" y="2143092"/>
+              <a:ext cx="0" cy="1317069"/>
             </a:xfrm>
             <a:custGeom>
               <a:avLst/>
               <a:pathLst>
-                <a:path w="0" h="3649639">
+                <a:path w="0" h="1317069">
                   <a:moveTo>
-                    <a:pt x="0" y="3649639"/>
+                    <a:pt x="0" y="1317069"/>
                   </a:moveTo>
                   <a:lnTo>
                     <a:pt x="0" y="0"/>
@@ -4740,21 +4775,21 @@
         </p:sp>
         <p:sp>
           <p:nvSpPr>
-            <p:cNvPr id="28" name="pl28"/>
+            <p:cNvPr id="29" name="pl29"/>
             <p:cNvSpPr/>
             <p:nvPr/>
           </p:nvSpPr>
           <p:spPr>
             <a:xfrm>
-              <a:off x="3095906" y="2073503"/>
-              <a:ext cx="0" cy="3649639"/>
+              <a:off x="3124839" y="2143092"/>
+              <a:ext cx="0" cy="1317069"/>
             </a:xfrm>
             <a:custGeom>
               <a:avLst/>
               <a:pathLst>
-                <a:path w="0" h="3649639">
+                <a:path w="0" h="1317069">
                   <a:moveTo>
-                    <a:pt x="0" y="3649639"/>
+                    <a:pt x="0" y="1317069"/>
                   </a:moveTo>
                   <a:lnTo>
                     <a:pt x="0" y="0"/>
@@ -4783,21 +4818,21 @@
         </p:sp>
         <p:sp>
           <p:nvSpPr>
-            <p:cNvPr id="29" name="pl29"/>
+            <p:cNvPr id="30" name="pl30"/>
             <p:cNvSpPr/>
             <p:nvPr/>
           </p:nvSpPr>
           <p:spPr>
             <a:xfrm>
-              <a:off x="5522967" y="2073503"/>
-              <a:ext cx="0" cy="3649639"/>
+              <a:off x="5508592" y="2143092"/>
+              <a:ext cx="0" cy="1317069"/>
             </a:xfrm>
             <a:custGeom>
               <a:avLst/>
               <a:pathLst>
-                <a:path w="0" h="3649639">
+                <a:path w="0" h="1317069">
                   <a:moveTo>
-                    <a:pt x="0" y="3649639"/>
+                    <a:pt x="0" y="1317069"/>
                   </a:moveTo>
                   <a:lnTo>
                     <a:pt x="0" y="0"/>
@@ -4826,13 +4861,13 @@
         </p:sp>
         <p:sp>
           <p:nvSpPr>
-            <p:cNvPr id="30" name="tx30"/>
+            <p:cNvPr id="31" name="tx31"/>
             <p:cNvSpPr/>
             <p:nvPr/>
           </p:nvSpPr>
           <p:spPr>
             <a:xfrm>
-              <a:off x="692708" y="5517199"/>
+              <a:off x="762297" y="3360243"/>
               <a:ext cx="62179" cy="80101"/>
             </a:xfrm>
             <a:prstGeom prst="rect">
@@ -4872,13 +4907,13 @@
         </p:sp>
         <p:sp>
           <p:nvSpPr>
-            <p:cNvPr id="31" name="tx31"/>
+            <p:cNvPr id="32" name="tx32"/>
             <p:cNvSpPr/>
             <p:nvPr/>
           </p:nvSpPr>
           <p:spPr>
             <a:xfrm>
-              <a:off x="692708" y="4687735"/>
+              <a:off x="762297" y="3060909"/>
               <a:ext cx="62179" cy="80101"/>
             </a:xfrm>
             <a:prstGeom prst="rect">
@@ -4918,13 +4953,13 @@
         </p:sp>
         <p:sp>
           <p:nvSpPr>
-            <p:cNvPr id="32" name="tx32"/>
+            <p:cNvPr id="33" name="tx33"/>
             <p:cNvSpPr/>
             <p:nvPr/>
           </p:nvSpPr>
           <p:spPr>
             <a:xfrm>
-              <a:off x="692708" y="3858272"/>
+              <a:off x="762297" y="2761575"/>
               <a:ext cx="62179" cy="80101"/>
             </a:xfrm>
             <a:prstGeom prst="rect">
@@ -4964,13 +4999,13 @@
         </p:sp>
         <p:sp>
           <p:nvSpPr>
-            <p:cNvPr id="33" name="tx33"/>
+            <p:cNvPr id="34" name="tx34"/>
             <p:cNvSpPr/>
             <p:nvPr/>
           </p:nvSpPr>
           <p:spPr>
             <a:xfrm>
-              <a:off x="692708" y="3028808"/>
+              <a:off x="762297" y="2462242"/>
               <a:ext cx="62179" cy="80101"/>
             </a:xfrm>
             <a:prstGeom prst="rect">
@@ -5010,13 +5045,13 @@
         </p:sp>
         <p:sp>
           <p:nvSpPr>
-            <p:cNvPr id="34" name="tx34"/>
+            <p:cNvPr id="35" name="tx35"/>
             <p:cNvSpPr/>
             <p:nvPr/>
           </p:nvSpPr>
           <p:spPr>
             <a:xfrm>
-              <a:off x="692708" y="2199345"/>
+              <a:off x="762297" y="2162908"/>
               <a:ext cx="62179" cy="80101"/>
             </a:xfrm>
             <a:prstGeom prst="rect">
@@ -5056,13 +5091,13 @@
         </p:sp>
         <p:sp>
           <p:nvSpPr>
-            <p:cNvPr id="35" name="tx35"/>
+            <p:cNvPr id="36" name="tx36"/>
             <p:cNvSpPr/>
             <p:nvPr/>
           </p:nvSpPr>
           <p:spPr>
             <a:xfrm>
-              <a:off x="2152181" y="5785772"/>
+              <a:off x="2196512" y="3522791"/>
               <a:ext cx="161574" cy="80101"/>
             </a:xfrm>
             <a:prstGeom prst="rect">
@@ -5102,13 +5137,13 @@
         </p:sp>
         <p:sp>
           <p:nvSpPr>
-            <p:cNvPr id="36" name="tx36"/>
+            <p:cNvPr id="37" name="tx37"/>
             <p:cNvSpPr/>
             <p:nvPr/>
           </p:nvSpPr>
           <p:spPr>
             <a:xfrm>
-              <a:off x="3884104" y="5785772"/>
+              <a:off x="3897531" y="3522791"/>
               <a:ext cx="161574" cy="80101"/>
             </a:xfrm>
             <a:prstGeom prst="rect">
@@ -5148,13 +5183,13 @@
         </p:sp>
         <p:sp>
           <p:nvSpPr>
-            <p:cNvPr id="37" name="tx37"/>
+            <p:cNvPr id="38" name="tx38"/>
             <p:cNvSpPr/>
             <p:nvPr/>
           </p:nvSpPr>
           <p:spPr>
             <a:xfrm>
-              <a:off x="5665725" y="5785772"/>
+              <a:off x="5648248" y="3522791"/>
               <a:ext cx="62179" cy="80101"/>
             </a:xfrm>
             <a:prstGeom prst="rect">
@@ -5194,13 +5229,13 @@
         </p:sp>
         <p:sp>
           <p:nvSpPr>
-            <p:cNvPr id="38" name="tx38"/>
+            <p:cNvPr id="39" name="tx39"/>
             <p:cNvSpPr/>
             <p:nvPr/>
           </p:nvSpPr>
           <p:spPr>
             <a:xfrm>
-              <a:off x="7366559" y="5785772"/>
+              <a:off x="7318177" y="3522791"/>
               <a:ext cx="124358" cy="80101"/>
             </a:xfrm>
             <a:prstGeom prst="rect">
@@ -5240,13 +5275,13 @@
         </p:sp>
         <p:sp>
           <p:nvSpPr>
-            <p:cNvPr id="39" name="tx39"/>
+            <p:cNvPr id="40" name="tx40"/>
             <p:cNvSpPr/>
             <p:nvPr/>
           </p:nvSpPr>
           <p:spPr>
             <a:xfrm>
-              <a:off x="1561815" y="5925448"/>
+              <a:off x="1561815" y="3662467"/>
               <a:ext cx="6311097" cy="100218"/>
             </a:xfrm>
             <a:prstGeom prst="rect">
@@ -5286,13 +5321,13 @@
         </p:sp>
         <p:sp>
           <p:nvSpPr>
-            <p:cNvPr id="40" name="tx40"/>
+            <p:cNvPr id="41" name="tx41"/>
             <p:cNvSpPr/>
             <p:nvPr/>
           </p:nvSpPr>
           <p:spPr>
             <a:xfrm rot="-5400000">
-              <a:off x="68446" y="3848213"/>
+              <a:off x="138035" y="2751517"/>
               <a:ext cx="1016904" cy="100218"/>
             </a:xfrm>
             <a:prstGeom prst="rect">
@@ -5332,13 +5367,13 @@
         </p:sp>
         <p:sp>
           <p:nvSpPr>
-            <p:cNvPr id="41" name="tx41"/>
+            <p:cNvPr id="42" name="tx42"/>
             <p:cNvSpPr/>
             <p:nvPr/>
           </p:nvSpPr>
           <p:spPr>
             <a:xfrm>
-              <a:off x="817517" y="1896563"/>
+              <a:off x="887106" y="1966152"/>
               <a:ext cx="6959864" cy="82021"/>
             </a:xfrm>
             <a:prstGeom prst="rect">
@@ -5378,13 +5413,3789 @@
         </p:sp>
         <p:sp>
           <p:nvSpPr>
-            <p:cNvPr id="42" name="tx42"/>
+            <p:cNvPr id="43" name="tx43"/>
             <p:cNvSpPr/>
             <p:nvPr/>
           </p:nvSpPr>
           <p:spPr>
             <a:xfrm>
-              <a:off x="817517" y="1669789"/>
+              <a:off x="887106" y="1739378"/>
+              <a:ext cx="2830068" cy="120152"/>
+            </a:xfrm>
+            <a:prstGeom prst="rect">
+              <a:avLst/>
+            </a:prstGeom>
+            <a:noFill/>
+          </p:spPr>
+          <p:txBody>
+            <a:bodyPr lIns="0" rIns="0" tIns="0" bIns="0" anchorCtr="1" anchor="ctr" wrap="none"/>
+            <a:lstStyle/>
+            <a:p>
+              <a:pPr algn="l" marL="0" marR="0" indent="0">
+                <a:lnSpc>
+                  <a:spcPts val="1320"/>
+                </a:lnSpc>
+                <a:spcBef>
+                  <a:spcPts val="0"/>
+                </a:spcBef>
+                <a:spcAft>
+                  <a:spcPts val="0"/>
+                </a:spcAft>
+              </a:pPr>
+              <a:r>
+                <a:rPr sz="1320">
+                  <a:solidFill>
+                    <a:srgbClr val="000000">
+                      <a:alpha val="100000"/>
+                    </a:srgbClr>
+                  </a:solidFill>
+                  <a:latin typeface="Helvetica"/>
+                  <a:cs typeface="Helvetica"/>
+                </a:rPr>
+                <a:t>AKI (KDIGO) (Sensitivity, Carboplatin)</a:t>
+              </a:r>
+            </a:p>
+          </p:txBody>
+        </p:sp>
+        <p:sp>
+          <p:nvSpPr>
+            <p:cNvPr id="44" name="pl44"/>
+            <p:cNvSpPr/>
+            <p:nvPr/>
+          </p:nvSpPr>
+          <p:spPr>
+            <a:xfrm>
+              <a:off x="887106" y="5444019"/>
+              <a:ext cx="7660515" cy="0"/>
+            </a:xfrm>
+            <a:custGeom>
+              <a:avLst/>
+              <a:pathLst>
+                <a:path w="7660515" h="0">
+                  <a:moveTo>
+                    <a:pt x="0" y="0"/>
+                  </a:moveTo>
+                  <a:lnTo>
+                    <a:pt x="7660515" y="0"/>
+                  </a:lnTo>
+                  <a:lnTo>
+                    <a:pt x="7660515" y="0"/>
+                  </a:lnTo>
+                </a:path>
+              </a:pathLst>
+            </a:custGeom>
+            <a:ln w="6775" cap="flat">
+              <a:solidFill>
+                <a:srgbClr val="EBEBEB">
+                  <a:alpha val="100000"/>
+                </a:srgbClr>
+              </a:solidFill>
+              <a:prstDash val="solid"/>
+              <a:round/>
+            </a:ln>
+          </p:spPr>
+          <p:txBody>
+            <a:bodyPr/>
+            <a:lstStyle/>
+            <a:p/>
+          </p:txBody>
+        </p:sp>
+        <p:sp>
+          <p:nvSpPr>
+            <p:cNvPr id="45" name="pl45"/>
+            <p:cNvSpPr/>
+            <p:nvPr/>
+          </p:nvSpPr>
+          <p:spPr>
+            <a:xfrm>
+              <a:off x="887106" y="5144686"/>
+              <a:ext cx="7660515" cy="0"/>
+            </a:xfrm>
+            <a:custGeom>
+              <a:avLst/>
+              <a:pathLst>
+                <a:path w="7660515" h="0">
+                  <a:moveTo>
+                    <a:pt x="0" y="0"/>
+                  </a:moveTo>
+                  <a:lnTo>
+                    <a:pt x="7660515" y="0"/>
+                  </a:lnTo>
+                  <a:lnTo>
+                    <a:pt x="7660515" y="0"/>
+                  </a:lnTo>
+                </a:path>
+              </a:pathLst>
+            </a:custGeom>
+            <a:ln w="6775" cap="flat">
+              <a:solidFill>
+                <a:srgbClr val="EBEBEB">
+                  <a:alpha val="100000"/>
+                </a:srgbClr>
+              </a:solidFill>
+              <a:prstDash val="solid"/>
+              <a:round/>
+            </a:ln>
+          </p:spPr>
+          <p:txBody>
+            <a:bodyPr/>
+            <a:lstStyle/>
+            <a:p/>
+          </p:txBody>
+        </p:sp>
+        <p:sp>
+          <p:nvSpPr>
+            <p:cNvPr id="46" name="pl46"/>
+            <p:cNvSpPr/>
+            <p:nvPr/>
+          </p:nvSpPr>
+          <p:spPr>
+            <a:xfrm>
+              <a:off x="887106" y="4845352"/>
+              <a:ext cx="7660515" cy="0"/>
+            </a:xfrm>
+            <a:custGeom>
+              <a:avLst/>
+              <a:pathLst>
+                <a:path w="7660515" h="0">
+                  <a:moveTo>
+                    <a:pt x="0" y="0"/>
+                  </a:moveTo>
+                  <a:lnTo>
+                    <a:pt x="7660515" y="0"/>
+                  </a:lnTo>
+                  <a:lnTo>
+                    <a:pt x="7660515" y="0"/>
+                  </a:lnTo>
+                </a:path>
+              </a:pathLst>
+            </a:custGeom>
+            <a:ln w="6775" cap="flat">
+              <a:solidFill>
+                <a:srgbClr val="EBEBEB">
+                  <a:alpha val="100000"/>
+                </a:srgbClr>
+              </a:solidFill>
+              <a:prstDash val="solid"/>
+              <a:round/>
+            </a:ln>
+          </p:spPr>
+          <p:txBody>
+            <a:bodyPr/>
+            <a:lstStyle/>
+            <a:p/>
+          </p:txBody>
+        </p:sp>
+        <p:sp>
+          <p:nvSpPr>
+            <p:cNvPr id="47" name="pl47"/>
+            <p:cNvSpPr/>
+            <p:nvPr/>
+          </p:nvSpPr>
+          <p:spPr>
+            <a:xfrm>
+              <a:off x="887106" y="4546018"/>
+              <a:ext cx="7660515" cy="0"/>
+            </a:xfrm>
+            <a:custGeom>
+              <a:avLst/>
+              <a:pathLst>
+                <a:path w="7660515" h="0">
+                  <a:moveTo>
+                    <a:pt x="0" y="0"/>
+                  </a:moveTo>
+                  <a:lnTo>
+                    <a:pt x="7660515" y="0"/>
+                  </a:lnTo>
+                  <a:lnTo>
+                    <a:pt x="7660515" y="0"/>
+                  </a:lnTo>
+                </a:path>
+              </a:pathLst>
+            </a:custGeom>
+            <a:ln w="6775" cap="flat">
+              <a:solidFill>
+                <a:srgbClr val="EBEBEB">
+                  <a:alpha val="100000"/>
+                </a:srgbClr>
+              </a:solidFill>
+              <a:prstDash val="solid"/>
+              <a:round/>
+            </a:ln>
+          </p:spPr>
+          <p:txBody>
+            <a:bodyPr/>
+            <a:lstStyle/>
+            <a:p/>
+          </p:txBody>
+        </p:sp>
+        <p:sp>
+          <p:nvSpPr>
+            <p:cNvPr id="48" name="pl48"/>
+            <p:cNvSpPr/>
+            <p:nvPr/>
+          </p:nvSpPr>
+          <p:spPr>
+            <a:xfrm>
+              <a:off x="1001535" y="4336484"/>
+              <a:ext cx="0" cy="1317069"/>
+            </a:xfrm>
+            <a:custGeom>
+              <a:avLst/>
+              <a:pathLst>
+                <a:path w="0" h="1317069">
+                  <a:moveTo>
+                    <a:pt x="0" y="1317069"/>
+                  </a:moveTo>
+                  <a:lnTo>
+                    <a:pt x="0" y="0"/>
+                  </a:lnTo>
+                  <a:lnTo>
+                    <a:pt x="0" y="0"/>
+                  </a:lnTo>
+                </a:path>
+              </a:pathLst>
+            </a:custGeom>
+            <a:ln w="6775" cap="flat">
+              <a:solidFill>
+                <a:srgbClr val="EBEBEB">
+                  <a:alpha val="100000"/>
+                </a:srgbClr>
+              </a:solidFill>
+              <a:prstDash val="solid"/>
+              <a:round/>
+            </a:ln>
+          </p:spPr>
+          <p:txBody>
+            <a:bodyPr/>
+            <a:lstStyle/>
+            <a:p/>
+          </p:txBody>
+        </p:sp>
+        <p:sp>
+          <p:nvSpPr>
+            <p:cNvPr id="49" name="pl49"/>
+            <p:cNvSpPr/>
+            <p:nvPr/>
+          </p:nvSpPr>
+          <p:spPr>
+            <a:xfrm>
+              <a:off x="1852045" y="4336484"/>
+              <a:ext cx="0" cy="1317069"/>
+            </a:xfrm>
+            <a:custGeom>
+              <a:avLst/>
+              <a:pathLst>
+                <a:path w="0" h="1317069">
+                  <a:moveTo>
+                    <a:pt x="0" y="1317069"/>
+                  </a:moveTo>
+                  <a:lnTo>
+                    <a:pt x="0" y="0"/>
+                  </a:lnTo>
+                  <a:lnTo>
+                    <a:pt x="0" y="0"/>
+                  </a:lnTo>
+                </a:path>
+              </a:pathLst>
+            </a:custGeom>
+            <a:ln w="6775" cap="flat">
+              <a:solidFill>
+                <a:srgbClr val="EBEBEB">
+                  <a:alpha val="100000"/>
+                </a:srgbClr>
+              </a:solidFill>
+              <a:prstDash val="solid"/>
+              <a:round/>
+            </a:ln>
+          </p:spPr>
+          <p:txBody>
+            <a:bodyPr/>
+            <a:lstStyle/>
+            <a:p/>
+          </p:txBody>
+        </p:sp>
+        <p:sp>
+          <p:nvSpPr>
+            <p:cNvPr id="50" name="pl50"/>
+            <p:cNvSpPr/>
+            <p:nvPr/>
+          </p:nvSpPr>
+          <p:spPr>
+            <a:xfrm>
+              <a:off x="2702554" y="4336484"/>
+              <a:ext cx="0" cy="1317069"/>
+            </a:xfrm>
+            <a:custGeom>
+              <a:avLst/>
+              <a:pathLst>
+                <a:path w="0" h="1317069">
+                  <a:moveTo>
+                    <a:pt x="0" y="1317069"/>
+                  </a:moveTo>
+                  <a:lnTo>
+                    <a:pt x="0" y="0"/>
+                  </a:lnTo>
+                  <a:lnTo>
+                    <a:pt x="0" y="0"/>
+                  </a:lnTo>
+                </a:path>
+              </a:pathLst>
+            </a:custGeom>
+            <a:ln w="6775" cap="flat">
+              <a:solidFill>
+                <a:srgbClr val="EBEBEB">
+                  <a:alpha val="100000"/>
+                </a:srgbClr>
+              </a:solidFill>
+              <a:prstDash val="solid"/>
+              <a:round/>
+            </a:ln>
+          </p:spPr>
+          <p:txBody>
+            <a:bodyPr/>
+            <a:lstStyle/>
+            <a:p/>
+          </p:txBody>
+        </p:sp>
+        <p:sp>
+          <p:nvSpPr>
+            <p:cNvPr id="51" name="pl51"/>
+            <p:cNvSpPr/>
+            <p:nvPr/>
+          </p:nvSpPr>
+          <p:spPr>
+            <a:xfrm>
+              <a:off x="3553064" y="4336484"/>
+              <a:ext cx="0" cy="1317069"/>
+            </a:xfrm>
+            <a:custGeom>
+              <a:avLst/>
+              <a:pathLst>
+                <a:path w="0" h="1317069">
+                  <a:moveTo>
+                    <a:pt x="0" y="1317069"/>
+                  </a:moveTo>
+                  <a:lnTo>
+                    <a:pt x="0" y="0"/>
+                  </a:lnTo>
+                  <a:lnTo>
+                    <a:pt x="0" y="0"/>
+                  </a:lnTo>
+                </a:path>
+              </a:pathLst>
+            </a:custGeom>
+            <a:ln w="6775" cap="flat">
+              <a:solidFill>
+                <a:srgbClr val="EBEBEB">
+                  <a:alpha val="100000"/>
+                </a:srgbClr>
+              </a:solidFill>
+              <a:prstDash val="solid"/>
+              <a:round/>
+            </a:ln>
+          </p:spPr>
+          <p:txBody>
+            <a:bodyPr/>
+            <a:lstStyle/>
+            <a:p/>
+          </p:txBody>
+        </p:sp>
+        <p:sp>
+          <p:nvSpPr>
+            <p:cNvPr id="52" name="pl52"/>
+            <p:cNvSpPr/>
+            <p:nvPr/>
+          </p:nvSpPr>
+          <p:spPr>
+            <a:xfrm>
+              <a:off x="4403573" y="4336484"/>
+              <a:ext cx="0" cy="1317069"/>
+            </a:xfrm>
+            <a:custGeom>
+              <a:avLst/>
+              <a:pathLst>
+                <a:path w="0" h="1317069">
+                  <a:moveTo>
+                    <a:pt x="0" y="1317069"/>
+                  </a:moveTo>
+                  <a:lnTo>
+                    <a:pt x="0" y="0"/>
+                  </a:lnTo>
+                  <a:lnTo>
+                    <a:pt x="0" y="0"/>
+                  </a:lnTo>
+                </a:path>
+              </a:pathLst>
+            </a:custGeom>
+            <a:ln w="6775" cap="flat">
+              <a:solidFill>
+                <a:srgbClr val="EBEBEB">
+                  <a:alpha val="100000"/>
+                </a:srgbClr>
+              </a:solidFill>
+              <a:prstDash val="solid"/>
+              <a:round/>
+            </a:ln>
+          </p:spPr>
+          <p:txBody>
+            <a:bodyPr/>
+            <a:lstStyle/>
+            <a:p/>
+          </p:txBody>
+        </p:sp>
+        <p:sp>
+          <p:nvSpPr>
+            <p:cNvPr id="53" name="pl53"/>
+            <p:cNvSpPr/>
+            <p:nvPr/>
+          </p:nvSpPr>
+          <p:spPr>
+            <a:xfrm>
+              <a:off x="5254082" y="4336484"/>
+              <a:ext cx="0" cy="1317069"/>
+            </a:xfrm>
+            <a:custGeom>
+              <a:avLst/>
+              <a:pathLst>
+                <a:path w="0" h="1317069">
+                  <a:moveTo>
+                    <a:pt x="0" y="1317069"/>
+                  </a:moveTo>
+                  <a:lnTo>
+                    <a:pt x="0" y="0"/>
+                  </a:lnTo>
+                  <a:lnTo>
+                    <a:pt x="0" y="0"/>
+                  </a:lnTo>
+                </a:path>
+              </a:pathLst>
+            </a:custGeom>
+            <a:ln w="6775" cap="flat">
+              <a:solidFill>
+                <a:srgbClr val="EBEBEB">
+                  <a:alpha val="100000"/>
+                </a:srgbClr>
+              </a:solidFill>
+              <a:prstDash val="solid"/>
+              <a:round/>
+            </a:ln>
+          </p:spPr>
+          <p:txBody>
+            <a:bodyPr/>
+            <a:lstStyle/>
+            <a:p/>
+          </p:txBody>
+        </p:sp>
+        <p:sp>
+          <p:nvSpPr>
+            <p:cNvPr id="54" name="pl54"/>
+            <p:cNvSpPr/>
+            <p:nvPr/>
+          </p:nvSpPr>
+          <p:spPr>
+            <a:xfrm>
+              <a:off x="6104592" y="4336484"/>
+              <a:ext cx="0" cy="1317069"/>
+            </a:xfrm>
+            <a:custGeom>
+              <a:avLst/>
+              <a:pathLst>
+                <a:path w="0" h="1317069">
+                  <a:moveTo>
+                    <a:pt x="0" y="1317069"/>
+                  </a:moveTo>
+                  <a:lnTo>
+                    <a:pt x="0" y="0"/>
+                  </a:lnTo>
+                  <a:lnTo>
+                    <a:pt x="0" y="0"/>
+                  </a:lnTo>
+                </a:path>
+              </a:pathLst>
+            </a:custGeom>
+            <a:ln w="6775" cap="flat">
+              <a:solidFill>
+                <a:srgbClr val="EBEBEB">
+                  <a:alpha val="100000"/>
+                </a:srgbClr>
+              </a:solidFill>
+              <a:prstDash val="solid"/>
+              <a:round/>
+            </a:ln>
+          </p:spPr>
+          <p:txBody>
+            <a:bodyPr/>
+            <a:lstStyle/>
+            <a:p/>
+          </p:txBody>
+        </p:sp>
+        <p:sp>
+          <p:nvSpPr>
+            <p:cNvPr id="55" name="pl55"/>
+            <p:cNvSpPr/>
+            <p:nvPr/>
+          </p:nvSpPr>
+          <p:spPr>
+            <a:xfrm>
+              <a:off x="6955101" y="4336484"/>
+              <a:ext cx="0" cy="1317069"/>
+            </a:xfrm>
+            <a:custGeom>
+              <a:avLst/>
+              <a:pathLst>
+                <a:path w="0" h="1317069">
+                  <a:moveTo>
+                    <a:pt x="0" y="1317069"/>
+                  </a:moveTo>
+                  <a:lnTo>
+                    <a:pt x="0" y="0"/>
+                  </a:lnTo>
+                  <a:lnTo>
+                    <a:pt x="0" y="0"/>
+                  </a:lnTo>
+                </a:path>
+              </a:pathLst>
+            </a:custGeom>
+            <a:ln w="6775" cap="flat">
+              <a:solidFill>
+                <a:srgbClr val="EBEBEB">
+                  <a:alpha val="100000"/>
+                </a:srgbClr>
+              </a:solidFill>
+              <a:prstDash val="solid"/>
+              <a:round/>
+            </a:ln>
+          </p:spPr>
+          <p:txBody>
+            <a:bodyPr/>
+            <a:lstStyle/>
+            <a:p/>
+          </p:txBody>
+        </p:sp>
+        <p:sp>
+          <p:nvSpPr>
+            <p:cNvPr id="56" name="pl56"/>
+            <p:cNvSpPr/>
+            <p:nvPr/>
+          </p:nvSpPr>
+          <p:spPr>
+            <a:xfrm>
+              <a:off x="7805611" y="4336484"/>
+              <a:ext cx="0" cy="1317069"/>
+            </a:xfrm>
+            <a:custGeom>
+              <a:avLst/>
+              <a:pathLst>
+                <a:path w="0" h="1317069">
+                  <a:moveTo>
+                    <a:pt x="0" y="1317069"/>
+                  </a:moveTo>
+                  <a:lnTo>
+                    <a:pt x="0" y="0"/>
+                  </a:lnTo>
+                  <a:lnTo>
+                    <a:pt x="0" y="0"/>
+                  </a:lnTo>
+                </a:path>
+              </a:pathLst>
+            </a:custGeom>
+            <a:ln w="6775" cap="flat">
+              <a:solidFill>
+                <a:srgbClr val="EBEBEB">
+                  <a:alpha val="100000"/>
+                </a:srgbClr>
+              </a:solidFill>
+              <a:prstDash val="solid"/>
+              <a:round/>
+            </a:ln>
+          </p:spPr>
+          <p:txBody>
+            <a:bodyPr/>
+            <a:lstStyle/>
+            <a:p/>
+          </p:txBody>
+        </p:sp>
+        <p:sp>
+          <p:nvSpPr>
+            <p:cNvPr id="57" name="pl57"/>
+            <p:cNvSpPr/>
+            <p:nvPr/>
+          </p:nvSpPr>
+          <p:spPr>
+            <a:xfrm>
+              <a:off x="887106" y="5593686"/>
+              <a:ext cx="7660515" cy="0"/>
+            </a:xfrm>
+            <a:custGeom>
+              <a:avLst/>
+              <a:pathLst>
+                <a:path w="7660515" h="0">
+                  <a:moveTo>
+                    <a:pt x="0" y="0"/>
+                  </a:moveTo>
+                  <a:lnTo>
+                    <a:pt x="7660515" y="0"/>
+                  </a:lnTo>
+                  <a:lnTo>
+                    <a:pt x="7660515" y="0"/>
+                  </a:lnTo>
+                </a:path>
+              </a:pathLst>
+            </a:custGeom>
+            <a:ln w="13550" cap="flat">
+              <a:solidFill>
+                <a:srgbClr val="EBEBEB">
+                  <a:alpha val="100000"/>
+                </a:srgbClr>
+              </a:solidFill>
+              <a:prstDash val="solid"/>
+              <a:round/>
+            </a:ln>
+          </p:spPr>
+          <p:txBody>
+            <a:bodyPr/>
+            <a:lstStyle/>
+            <a:p/>
+          </p:txBody>
+        </p:sp>
+        <p:sp>
+          <p:nvSpPr>
+            <p:cNvPr id="58" name="pl58"/>
+            <p:cNvSpPr/>
+            <p:nvPr/>
+          </p:nvSpPr>
+          <p:spPr>
+            <a:xfrm>
+              <a:off x="887106" y="5294352"/>
+              <a:ext cx="7660515" cy="0"/>
+            </a:xfrm>
+            <a:custGeom>
+              <a:avLst/>
+              <a:pathLst>
+                <a:path w="7660515" h="0">
+                  <a:moveTo>
+                    <a:pt x="0" y="0"/>
+                  </a:moveTo>
+                  <a:lnTo>
+                    <a:pt x="7660515" y="0"/>
+                  </a:lnTo>
+                  <a:lnTo>
+                    <a:pt x="7660515" y="0"/>
+                  </a:lnTo>
+                </a:path>
+              </a:pathLst>
+            </a:custGeom>
+            <a:ln w="13550" cap="flat">
+              <a:solidFill>
+                <a:srgbClr val="EBEBEB">
+                  <a:alpha val="100000"/>
+                </a:srgbClr>
+              </a:solidFill>
+              <a:prstDash val="solid"/>
+              <a:round/>
+            </a:ln>
+          </p:spPr>
+          <p:txBody>
+            <a:bodyPr/>
+            <a:lstStyle/>
+            <a:p/>
+          </p:txBody>
+        </p:sp>
+        <p:sp>
+          <p:nvSpPr>
+            <p:cNvPr id="59" name="pl59"/>
+            <p:cNvSpPr/>
+            <p:nvPr/>
+          </p:nvSpPr>
+          <p:spPr>
+            <a:xfrm>
+              <a:off x="887106" y="4995019"/>
+              <a:ext cx="7660515" cy="0"/>
+            </a:xfrm>
+            <a:custGeom>
+              <a:avLst/>
+              <a:pathLst>
+                <a:path w="7660515" h="0">
+                  <a:moveTo>
+                    <a:pt x="0" y="0"/>
+                  </a:moveTo>
+                  <a:lnTo>
+                    <a:pt x="7660515" y="0"/>
+                  </a:lnTo>
+                  <a:lnTo>
+                    <a:pt x="7660515" y="0"/>
+                  </a:lnTo>
+                </a:path>
+              </a:pathLst>
+            </a:custGeom>
+            <a:ln w="13550" cap="flat">
+              <a:solidFill>
+                <a:srgbClr val="EBEBEB">
+                  <a:alpha val="100000"/>
+                </a:srgbClr>
+              </a:solidFill>
+              <a:prstDash val="solid"/>
+              <a:round/>
+            </a:ln>
+          </p:spPr>
+          <p:txBody>
+            <a:bodyPr/>
+            <a:lstStyle/>
+            <a:p/>
+          </p:txBody>
+        </p:sp>
+        <p:sp>
+          <p:nvSpPr>
+            <p:cNvPr id="60" name="pl60"/>
+            <p:cNvSpPr/>
+            <p:nvPr/>
+          </p:nvSpPr>
+          <p:spPr>
+            <a:xfrm>
+              <a:off x="887106" y="4695685"/>
+              <a:ext cx="7660515" cy="0"/>
+            </a:xfrm>
+            <a:custGeom>
+              <a:avLst/>
+              <a:pathLst>
+                <a:path w="7660515" h="0">
+                  <a:moveTo>
+                    <a:pt x="0" y="0"/>
+                  </a:moveTo>
+                  <a:lnTo>
+                    <a:pt x="7660515" y="0"/>
+                  </a:lnTo>
+                  <a:lnTo>
+                    <a:pt x="7660515" y="0"/>
+                  </a:lnTo>
+                </a:path>
+              </a:pathLst>
+            </a:custGeom>
+            <a:ln w="13550" cap="flat">
+              <a:solidFill>
+                <a:srgbClr val="EBEBEB">
+                  <a:alpha val="100000"/>
+                </a:srgbClr>
+              </a:solidFill>
+              <a:prstDash val="solid"/>
+              <a:round/>
+            </a:ln>
+          </p:spPr>
+          <p:txBody>
+            <a:bodyPr/>
+            <a:lstStyle/>
+            <a:p/>
+          </p:txBody>
+        </p:sp>
+        <p:sp>
+          <p:nvSpPr>
+            <p:cNvPr id="61" name="pl61"/>
+            <p:cNvSpPr/>
+            <p:nvPr/>
+          </p:nvSpPr>
+          <p:spPr>
+            <a:xfrm>
+              <a:off x="887106" y="4396351"/>
+              <a:ext cx="7660515" cy="0"/>
+            </a:xfrm>
+            <a:custGeom>
+              <a:avLst/>
+              <a:pathLst>
+                <a:path w="7660515" h="0">
+                  <a:moveTo>
+                    <a:pt x="0" y="0"/>
+                  </a:moveTo>
+                  <a:lnTo>
+                    <a:pt x="7660515" y="0"/>
+                  </a:lnTo>
+                  <a:lnTo>
+                    <a:pt x="7660515" y="0"/>
+                  </a:lnTo>
+                </a:path>
+              </a:pathLst>
+            </a:custGeom>
+            <a:ln w="13550" cap="flat">
+              <a:solidFill>
+                <a:srgbClr val="EBEBEB">
+                  <a:alpha val="100000"/>
+                </a:srgbClr>
+              </a:solidFill>
+              <a:prstDash val="solid"/>
+              <a:round/>
+            </a:ln>
+          </p:spPr>
+          <p:txBody>
+            <a:bodyPr/>
+            <a:lstStyle/>
+            <a:p/>
+          </p:txBody>
+        </p:sp>
+        <p:sp>
+          <p:nvSpPr>
+            <p:cNvPr id="62" name="pl62"/>
+            <p:cNvSpPr/>
+            <p:nvPr/>
+          </p:nvSpPr>
+          <p:spPr>
+            <a:xfrm>
+              <a:off x="1426790" y="4336484"/>
+              <a:ext cx="0" cy="1317069"/>
+            </a:xfrm>
+            <a:custGeom>
+              <a:avLst/>
+              <a:pathLst>
+                <a:path w="0" h="1317069">
+                  <a:moveTo>
+                    <a:pt x="0" y="1317069"/>
+                  </a:moveTo>
+                  <a:lnTo>
+                    <a:pt x="0" y="0"/>
+                  </a:lnTo>
+                  <a:lnTo>
+                    <a:pt x="0" y="0"/>
+                  </a:lnTo>
+                </a:path>
+              </a:pathLst>
+            </a:custGeom>
+            <a:ln w="13550" cap="flat">
+              <a:solidFill>
+                <a:srgbClr val="EBEBEB">
+                  <a:alpha val="100000"/>
+                </a:srgbClr>
+              </a:solidFill>
+              <a:prstDash val="solid"/>
+              <a:round/>
+            </a:ln>
+          </p:spPr>
+          <p:txBody>
+            <a:bodyPr/>
+            <a:lstStyle/>
+            <a:p/>
+          </p:txBody>
+        </p:sp>
+        <p:sp>
+          <p:nvSpPr>
+            <p:cNvPr id="63" name="pl63"/>
+            <p:cNvSpPr/>
+            <p:nvPr/>
+          </p:nvSpPr>
+          <p:spPr>
+            <a:xfrm>
+              <a:off x="2277299" y="4336484"/>
+              <a:ext cx="0" cy="1317069"/>
+            </a:xfrm>
+            <a:custGeom>
+              <a:avLst/>
+              <a:pathLst>
+                <a:path w="0" h="1317069">
+                  <a:moveTo>
+                    <a:pt x="0" y="1317069"/>
+                  </a:moveTo>
+                  <a:lnTo>
+                    <a:pt x="0" y="0"/>
+                  </a:lnTo>
+                  <a:lnTo>
+                    <a:pt x="0" y="0"/>
+                  </a:lnTo>
+                </a:path>
+              </a:pathLst>
+            </a:custGeom>
+            <a:ln w="13550" cap="flat">
+              <a:solidFill>
+                <a:srgbClr val="EBEBEB">
+                  <a:alpha val="100000"/>
+                </a:srgbClr>
+              </a:solidFill>
+              <a:prstDash val="solid"/>
+              <a:round/>
+            </a:ln>
+          </p:spPr>
+          <p:txBody>
+            <a:bodyPr/>
+            <a:lstStyle/>
+            <a:p/>
+          </p:txBody>
+        </p:sp>
+        <p:sp>
+          <p:nvSpPr>
+            <p:cNvPr id="64" name="pl64"/>
+            <p:cNvSpPr/>
+            <p:nvPr/>
+          </p:nvSpPr>
+          <p:spPr>
+            <a:xfrm>
+              <a:off x="3127809" y="4336484"/>
+              <a:ext cx="0" cy="1317069"/>
+            </a:xfrm>
+            <a:custGeom>
+              <a:avLst/>
+              <a:pathLst>
+                <a:path w="0" h="1317069">
+                  <a:moveTo>
+                    <a:pt x="0" y="1317069"/>
+                  </a:moveTo>
+                  <a:lnTo>
+                    <a:pt x="0" y="0"/>
+                  </a:lnTo>
+                  <a:lnTo>
+                    <a:pt x="0" y="0"/>
+                  </a:lnTo>
+                </a:path>
+              </a:pathLst>
+            </a:custGeom>
+            <a:ln w="13550" cap="flat">
+              <a:solidFill>
+                <a:srgbClr val="EBEBEB">
+                  <a:alpha val="100000"/>
+                </a:srgbClr>
+              </a:solidFill>
+              <a:prstDash val="solid"/>
+              <a:round/>
+            </a:ln>
+          </p:spPr>
+          <p:txBody>
+            <a:bodyPr/>
+            <a:lstStyle/>
+            <a:p/>
+          </p:txBody>
+        </p:sp>
+        <p:sp>
+          <p:nvSpPr>
+            <p:cNvPr id="65" name="pl65"/>
+            <p:cNvSpPr/>
+            <p:nvPr/>
+          </p:nvSpPr>
+          <p:spPr>
+            <a:xfrm>
+              <a:off x="3978318" y="4336484"/>
+              <a:ext cx="0" cy="1317069"/>
+            </a:xfrm>
+            <a:custGeom>
+              <a:avLst/>
+              <a:pathLst>
+                <a:path w="0" h="1317069">
+                  <a:moveTo>
+                    <a:pt x="0" y="1317069"/>
+                  </a:moveTo>
+                  <a:lnTo>
+                    <a:pt x="0" y="0"/>
+                  </a:lnTo>
+                  <a:lnTo>
+                    <a:pt x="0" y="0"/>
+                  </a:lnTo>
+                </a:path>
+              </a:pathLst>
+            </a:custGeom>
+            <a:ln w="13550" cap="flat">
+              <a:solidFill>
+                <a:srgbClr val="EBEBEB">
+                  <a:alpha val="100000"/>
+                </a:srgbClr>
+              </a:solidFill>
+              <a:prstDash val="solid"/>
+              <a:round/>
+            </a:ln>
+          </p:spPr>
+          <p:txBody>
+            <a:bodyPr/>
+            <a:lstStyle/>
+            <a:p/>
+          </p:txBody>
+        </p:sp>
+        <p:sp>
+          <p:nvSpPr>
+            <p:cNvPr id="66" name="pl66"/>
+            <p:cNvSpPr/>
+            <p:nvPr/>
+          </p:nvSpPr>
+          <p:spPr>
+            <a:xfrm>
+              <a:off x="4828828" y="4336484"/>
+              <a:ext cx="0" cy="1317069"/>
+            </a:xfrm>
+            <a:custGeom>
+              <a:avLst/>
+              <a:pathLst>
+                <a:path w="0" h="1317069">
+                  <a:moveTo>
+                    <a:pt x="0" y="1317069"/>
+                  </a:moveTo>
+                  <a:lnTo>
+                    <a:pt x="0" y="0"/>
+                  </a:lnTo>
+                  <a:lnTo>
+                    <a:pt x="0" y="0"/>
+                  </a:lnTo>
+                </a:path>
+              </a:pathLst>
+            </a:custGeom>
+            <a:ln w="13550" cap="flat">
+              <a:solidFill>
+                <a:srgbClr val="EBEBEB">
+                  <a:alpha val="100000"/>
+                </a:srgbClr>
+              </a:solidFill>
+              <a:prstDash val="solid"/>
+              <a:round/>
+            </a:ln>
+          </p:spPr>
+          <p:txBody>
+            <a:bodyPr/>
+            <a:lstStyle/>
+            <a:p/>
+          </p:txBody>
+        </p:sp>
+        <p:sp>
+          <p:nvSpPr>
+            <p:cNvPr id="67" name="pl67"/>
+            <p:cNvSpPr/>
+            <p:nvPr/>
+          </p:nvSpPr>
+          <p:spPr>
+            <a:xfrm>
+              <a:off x="5679337" y="4336484"/>
+              <a:ext cx="0" cy="1317069"/>
+            </a:xfrm>
+            <a:custGeom>
+              <a:avLst/>
+              <a:pathLst>
+                <a:path w="0" h="1317069">
+                  <a:moveTo>
+                    <a:pt x="0" y="1317069"/>
+                  </a:moveTo>
+                  <a:lnTo>
+                    <a:pt x="0" y="0"/>
+                  </a:lnTo>
+                  <a:lnTo>
+                    <a:pt x="0" y="0"/>
+                  </a:lnTo>
+                </a:path>
+              </a:pathLst>
+            </a:custGeom>
+            <a:ln w="13550" cap="flat">
+              <a:solidFill>
+                <a:srgbClr val="EBEBEB">
+                  <a:alpha val="100000"/>
+                </a:srgbClr>
+              </a:solidFill>
+              <a:prstDash val="solid"/>
+              <a:round/>
+            </a:ln>
+          </p:spPr>
+          <p:txBody>
+            <a:bodyPr/>
+            <a:lstStyle/>
+            <a:p/>
+          </p:txBody>
+        </p:sp>
+        <p:sp>
+          <p:nvSpPr>
+            <p:cNvPr id="68" name="pl68"/>
+            <p:cNvSpPr/>
+            <p:nvPr/>
+          </p:nvSpPr>
+          <p:spPr>
+            <a:xfrm>
+              <a:off x="6529847" y="4336484"/>
+              <a:ext cx="0" cy="1317069"/>
+            </a:xfrm>
+            <a:custGeom>
+              <a:avLst/>
+              <a:pathLst>
+                <a:path w="0" h="1317069">
+                  <a:moveTo>
+                    <a:pt x="0" y="1317069"/>
+                  </a:moveTo>
+                  <a:lnTo>
+                    <a:pt x="0" y="0"/>
+                  </a:lnTo>
+                  <a:lnTo>
+                    <a:pt x="0" y="0"/>
+                  </a:lnTo>
+                </a:path>
+              </a:pathLst>
+            </a:custGeom>
+            <a:ln w="13550" cap="flat">
+              <a:solidFill>
+                <a:srgbClr val="EBEBEB">
+                  <a:alpha val="100000"/>
+                </a:srgbClr>
+              </a:solidFill>
+              <a:prstDash val="solid"/>
+              <a:round/>
+            </a:ln>
+          </p:spPr>
+          <p:txBody>
+            <a:bodyPr/>
+            <a:lstStyle/>
+            <a:p/>
+          </p:txBody>
+        </p:sp>
+        <p:sp>
+          <p:nvSpPr>
+            <p:cNvPr id="69" name="pl69"/>
+            <p:cNvSpPr/>
+            <p:nvPr/>
+          </p:nvSpPr>
+          <p:spPr>
+            <a:xfrm>
+              <a:off x="7380356" y="4336484"/>
+              <a:ext cx="0" cy="1317069"/>
+            </a:xfrm>
+            <a:custGeom>
+              <a:avLst/>
+              <a:pathLst>
+                <a:path w="0" h="1317069">
+                  <a:moveTo>
+                    <a:pt x="0" y="1317069"/>
+                  </a:moveTo>
+                  <a:lnTo>
+                    <a:pt x="0" y="0"/>
+                  </a:lnTo>
+                  <a:lnTo>
+                    <a:pt x="0" y="0"/>
+                  </a:lnTo>
+                </a:path>
+              </a:pathLst>
+            </a:custGeom>
+            <a:ln w="13550" cap="flat">
+              <a:solidFill>
+                <a:srgbClr val="EBEBEB">
+                  <a:alpha val="100000"/>
+                </a:srgbClr>
+              </a:solidFill>
+              <a:prstDash val="solid"/>
+              <a:round/>
+            </a:ln>
+          </p:spPr>
+          <p:txBody>
+            <a:bodyPr/>
+            <a:lstStyle/>
+            <a:p/>
+          </p:txBody>
+        </p:sp>
+        <p:sp>
+          <p:nvSpPr>
+            <p:cNvPr id="70" name="pl70"/>
+            <p:cNvSpPr/>
+            <p:nvPr/>
+          </p:nvSpPr>
+          <p:spPr>
+            <a:xfrm>
+              <a:off x="8230866" y="4336484"/>
+              <a:ext cx="0" cy="1317069"/>
+            </a:xfrm>
+            <a:custGeom>
+              <a:avLst/>
+              <a:pathLst>
+                <a:path w="0" h="1317069">
+                  <a:moveTo>
+                    <a:pt x="0" y="1317069"/>
+                  </a:moveTo>
+                  <a:lnTo>
+                    <a:pt x="0" y="0"/>
+                  </a:lnTo>
+                  <a:lnTo>
+                    <a:pt x="0" y="0"/>
+                  </a:lnTo>
+                </a:path>
+              </a:pathLst>
+            </a:custGeom>
+            <a:ln w="13550" cap="flat">
+              <a:solidFill>
+                <a:srgbClr val="EBEBEB">
+                  <a:alpha val="100000"/>
+                </a:srgbClr>
+              </a:solidFill>
+              <a:prstDash val="solid"/>
+              <a:round/>
+            </a:ln>
+          </p:spPr>
+          <p:txBody>
+            <a:bodyPr/>
+            <a:lstStyle/>
+            <a:p/>
+          </p:txBody>
+        </p:sp>
+        <p:sp>
+          <p:nvSpPr>
+            <p:cNvPr id="71" name="pg71"/>
+            <p:cNvSpPr/>
+            <p:nvPr/>
+          </p:nvSpPr>
+          <p:spPr>
+            <a:xfrm>
+              <a:off x="1235312" y="4644430"/>
+              <a:ext cx="6964104" cy="880767"/>
+            </a:xfrm>
+            <a:custGeom>
+              <a:avLst/>
+              <a:pathLst>
+                <a:path w="6964104" h="880767">
+                  <a:moveTo>
+                    <a:pt x="0" y="0"/>
+                  </a:moveTo>
+                  <a:lnTo>
+                    <a:pt x="70344" y="24876"/>
+                  </a:lnTo>
+                  <a:lnTo>
+                    <a:pt x="140688" y="49100"/>
+                  </a:lnTo>
+                  <a:lnTo>
+                    <a:pt x="211033" y="72690"/>
+                  </a:lnTo>
+                  <a:lnTo>
+                    <a:pt x="281377" y="95662"/>
+                  </a:lnTo>
+                  <a:lnTo>
+                    <a:pt x="351722" y="118031"/>
+                  </a:lnTo>
+                  <a:lnTo>
+                    <a:pt x="422066" y="139814"/>
+                  </a:lnTo>
+                  <a:lnTo>
+                    <a:pt x="492411" y="161027"/>
+                  </a:lnTo>
+                  <a:lnTo>
+                    <a:pt x="562755" y="181683"/>
+                  </a:lnTo>
+                  <a:lnTo>
+                    <a:pt x="633100" y="201798"/>
+                  </a:lnTo>
+                  <a:lnTo>
+                    <a:pt x="703444" y="221386"/>
+                  </a:lnTo>
+                  <a:lnTo>
+                    <a:pt x="773789" y="240461"/>
+                  </a:lnTo>
+                  <a:lnTo>
+                    <a:pt x="844133" y="259036"/>
+                  </a:lnTo>
+                  <a:lnTo>
+                    <a:pt x="914478" y="277124"/>
+                  </a:lnTo>
+                  <a:lnTo>
+                    <a:pt x="984822" y="294738"/>
+                  </a:lnTo>
+                  <a:lnTo>
+                    <a:pt x="1055167" y="311891"/>
+                  </a:lnTo>
+                  <a:lnTo>
+                    <a:pt x="1125511" y="328593"/>
+                  </a:lnTo>
+                  <a:lnTo>
+                    <a:pt x="1195856" y="344859"/>
+                  </a:lnTo>
+                  <a:lnTo>
+                    <a:pt x="1266200" y="360698"/>
+                  </a:lnTo>
+                  <a:lnTo>
+                    <a:pt x="1336545" y="376121"/>
+                  </a:lnTo>
+                  <a:lnTo>
+                    <a:pt x="1406889" y="391141"/>
+                  </a:lnTo>
+                  <a:lnTo>
+                    <a:pt x="1477234" y="405767"/>
+                  </a:lnTo>
+                  <a:lnTo>
+                    <a:pt x="1547578" y="420010"/>
+                  </a:lnTo>
+                  <a:lnTo>
+                    <a:pt x="1617923" y="433880"/>
+                  </a:lnTo>
+                  <a:lnTo>
+                    <a:pt x="1688267" y="447386"/>
+                  </a:lnTo>
+                  <a:lnTo>
+                    <a:pt x="1758612" y="460538"/>
+                  </a:lnTo>
+                  <a:lnTo>
+                    <a:pt x="1828956" y="473345"/>
+                  </a:lnTo>
+                  <a:lnTo>
+                    <a:pt x="1899301" y="485817"/>
+                  </a:lnTo>
+                  <a:lnTo>
+                    <a:pt x="1969645" y="497962"/>
+                  </a:lnTo>
+                  <a:lnTo>
+                    <a:pt x="2039990" y="509789"/>
+                  </a:lnTo>
+                  <a:lnTo>
+                    <a:pt x="2110334" y="521305"/>
+                  </a:lnTo>
+                  <a:lnTo>
+                    <a:pt x="2180679" y="532520"/>
+                  </a:lnTo>
+                  <a:lnTo>
+                    <a:pt x="2251023" y="543441"/>
+                  </a:lnTo>
+                  <a:lnTo>
+                    <a:pt x="2321368" y="554076"/>
+                  </a:lnTo>
+                  <a:lnTo>
+                    <a:pt x="2391712" y="564432"/>
+                  </a:lnTo>
+                  <a:lnTo>
+                    <a:pt x="2462057" y="574517"/>
+                  </a:lnTo>
+                  <a:lnTo>
+                    <a:pt x="2532401" y="584338"/>
+                  </a:lnTo>
+                  <a:lnTo>
+                    <a:pt x="2602746" y="593901"/>
+                  </a:lnTo>
+                  <a:lnTo>
+                    <a:pt x="2673090" y="603213"/>
+                  </a:lnTo>
+                  <a:lnTo>
+                    <a:pt x="2743435" y="612282"/>
+                  </a:lnTo>
+                  <a:lnTo>
+                    <a:pt x="2813779" y="621113"/>
+                  </a:lnTo>
+                  <a:lnTo>
+                    <a:pt x="2884124" y="629712"/>
+                  </a:lnTo>
+                  <a:lnTo>
+                    <a:pt x="2954468" y="638086"/>
+                  </a:lnTo>
+                  <a:lnTo>
+                    <a:pt x="3024813" y="646241"/>
+                  </a:lnTo>
+                  <a:lnTo>
+                    <a:pt x="3095157" y="649394"/>
+                  </a:lnTo>
+                  <a:lnTo>
+                    <a:pt x="3165502" y="648413"/>
+                  </a:lnTo>
+                  <a:lnTo>
+                    <a:pt x="3235846" y="647430"/>
+                  </a:lnTo>
+                  <a:lnTo>
+                    <a:pt x="3306191" y="646443"/>
+                  </a:lnTo>
+                  <a:lnTo>
+                    <a:pt x="3376535" y="645453"/>
+                  </a:lnTo>
+                  <a:lnTo>
+                    <a:pt x="3446880" y="644460"/>
+                  </a:lnTo>
+                  <a:lnTo>
+                    <a:pt x="3517224" y="643463"/>
+                  </a:lnTo>
+                  <a:lnTo>
+                    <a:pt x="3587569" y="642463"/>
+                  </a:lnTo>
+                  <a:lnTo>
+                    <a:pt x="3657913" y="641460"/>
+                  </a:lnTo>
+                  <a:lnTo>
+                    <a:pt x="3728257" y="640454"/>
+                  </a:lnTo>
+                  <a:lnTo>
+                    <a:pt x="3798602" y="639444"/>
+                  </a:lnTo>
+                  <a:lnTo>
+                    <a:pt x="3868946" y="638431"/>
+                  </a:lnTo>
+                  <a:lnTo>
+                    <a:pt x="3939291" y="637415"/>
+                  </a:lnTo>
+                  <a:lnTo>
+                    <a:pt x="4009635" y="636396"/>
+                  </a:lnTo>
+                  <a:lnTo>
+                    <a:pt x="4079980" y="635373"/>
+                  </a:lnTo>
+                  <a:lnTo>
+                    <a:pt x="4150324" y="634346"/>
+                  </a:lnTo>
+                  <a:lnTo>
+                    <a:pt x="4220669" y="633317"/>
+                  </a:lnTo>
+                  <a:lnTo>
+                    <a:pt x="4291013" y="632284"/>
+                  </a:lnTo>
+                  <a:lnTo>
+                    <a:pt x="4361358" y="631248"/>
+                  </a:lnTo>
+                  <a:lnTo>
+                    <a:pt x="4431702" y="630208"/>
+                  </a:lnTo>
+                  <a:lnTo>
+                    <a:pt x="4502047" y="629165"/>
+                  </a:lnTo>
+                  <a:lnTo>
+                    <a:pt x="4572391" y="628118"/>
+                  </a:lnTo>
+                  <a:lnTo>
+                    <a:pt x="4642736" y="627068"/>
+                  </a:lnTo>
+                  <a:lnTo>
+                    <a:pt x="4713080" y="626015"/>
+                  </a:lnTo>
+                  <a:lnTo>
+                    <a:pt x="4783425" y="624958"/>
+                  </a:lnTo>
+                  <a:lnTo>
+                    <a:pt x="4853769" y="623898"/>
+                  </a:lnTo>
+                  <a:lnTo>
+                    <a:pt x="4924114" y="622834"/>
+                  </a:lnTo>
+                  <a:lnTo>
+                    <a:pt x="4994458" y="621767"/>
+                  </a:lnTo>
+                  <a:lnTo>
+                    <a:pt x="5064803" y="620696"/>
+                  </a:lnTo>
+                  <a:lnTo>
+                    <a:pt x="5135147" y="619622"/>
+                  </a:lnTo>
+                  <a:lnTo>
+                    <a:pt x="5205492" y="618544"/>
+                  </a:lnTo>
+                  <a:lnTo>
+                    <a:pt x="5275836" y="617463"/>
+                  </a:lnTo>
+                  <a:lnTo>
+                    <a:pt x="5346181" y="616378"/>
+                  </a:lnTo>
+                  <a:lnTo>
+                    <a:pt x="5416525" y="615290"/>
+                  </a:lnTo>
+                  <a:lnTo>
+                    <a:pt x="5486870" y="614198"/>
+                  </a:lnTo>
+                  <a:lnTo>
+                    <a:pt x="5557214" y="613102"/>
+                  </a:lnTo>
+                  <a:lnTo>
+                    <a:pt x="5627559" y="612003"/>
+                  </a:lnTo>
+                  <a:lnTo>
+                    <a:pt x="5697903" y="610901"/>
+                  </a:lnTo>
+                  <a:lnTo>
+                    <a:pt x="5768248" y="609794"/>
+                  </a:lnTo>
+                  <a:lnTo>
+                    <a:pt x="5838592" y="608685"/>
+                  </a:lnTo>
+                  <a:lnTo>
+                    <a:pt x="5908937" y="607571"/>
+                  </a:lnTo>
+                  <a:lnTo>
+                    <a:pt x="5979281" y="606454"/>
+                  </a:lnTo>
+                  <a:lnTo>
+                    <a:pt x="6049626" y="605333"/>
+                  </a:lnTo>
+                  <a:lnTo>
+                    <a:pt x="6119970" y="604209"/>
+                  </a:lnTo>
+                  <a:lnTo>
+                    <a:pt x="6190315" y="603081"/>
+                  </a:lnTo>
+                  <a:lnTo>
+                    <a:pt x="6260659" y="601949"/>
+                  </a:lnTo>
+                  <a:lnTo>
+                    <a:pt x="6331004" y="600813"/>
+                  </a:lnTo>
+                  <a:lnTo>
+                    <a:pt x="6401348" y="599674"/>
+                  </a:lnTo>
+                  <a:lnTo>
+                    <a:pt x="6471693" y="598531"/>
+                  </a:lnTo>
+                  <a:lnTo>
+                    <a:pt x="6542037" y="597384"/>
+                  </a:lnTo>
+                  <a:lnTo>
+                    <a:pt x="6612382" y="596234"/>
+                  </a:lnTo>
+                  <a:lnTo>
+                    <a:pt x="6682726" y="595080"/>
+                  </a:lnTo>
+                  <a:lnTo>
+                    <a:pt x="6753071" y="593922"/>
+                  </a:lnTo>
+                  <a:lnTo>
+                    <a:pt x="6823415" y="592760"/>
+                  </a:lnTo>
+                  <a:lnTo>
+                    <a:pt x="6893760" y="591595"/>
+                  </a:lnTo>
+                  <a:lnTo>
+                    <a:pt x="6964104" y="590425"/>
+                  </a:lnTo>
+                  <a:lnTo>
+                    <a:pt x="6964104" y="880767"/>
+                  </a:lnTo>
+                  <a:lnTo>
+                    <a:pt x="6893760" y="878924"/>
+                  </a:lnTo>
+                  <a:lnTo>
+                    <a:pt x="6823415" y="877031"/>
+                  </a:lnTo>
+                  <a:lnTo>
+                    <a:pt x="6753071" y="875088"/>
+                  </a:lnTo>
+                  <a:lnTo>
+                    <a:pt x="6682726" y="873092"/>
+                  </a:lnTo>
+                  <a:lnTo>
+                    <a:pt x="6612382" y="871042"/>
+                  </a:lnTo>
+                  <a:lnTo>
+                    <a:pt x="6542037" y="868937"/>
+                  </a:lnTo>
+                  <a:lnTo>
+                    <a:pt x="6471693" y="866776"/>
+                  </a:lnTo>
+                  <a:lnTo>
+                    <a:pt x="6401348" y="864556"/>
+                  </a:lnTo>
+                  <a:lnTo>
+                    <a:pt x="6331004" y="862277"/>
+                  </a:lnTo>
+                  <a:lnTo>
+                    <a:pt x="6260659" y="859936"/>
+                  </a:lnTo>
+                  <a:lnTo>
+                    <a:pt x="6190315" y="857532"/>
+                  </a:lnTo>
+                  <a:lnTo>
+                    <a:pt x="6119970" y="855064"/>
+                  </a:lnTo>
+                  <a:lnTo>
+                    <a:pt x="6049626" y="852529"/>
+                  </a:lnTo>
+                  <a:lnTo>
+                    <a:pt x="5979281" y="849926"/>
+                  </a:lnTo>
+                  <a:lnTo>
+                    <a:pt x="5908937" y="847253"/>
+                  </a:lnTo>
+                  <a:lnTo>
+                    <a:pt x="5838592" y="844508"/>
+                  </a:lnTo>
+                  <a:lnTo>
+                    <a:pt x="5768248" y="841689"/>
+                  </a:lnTo>
+                  <a:lnTo>
+                    <a:pt x="5697903" y="838794"/>
+                  </a:lnTo>
+                  <a:lnTo>
+                    <a:pt x="5627559" y="835822"/>
+                  </a:lnTo>
+                  <a:lnTo>
+                    <a:pt x="5557214" y="832769"/>
+                  </a:lnTo>
+                  <a:lnTo>
+                    <a:pt x="5486870" y="829634"/>
+                  </a:lnTo>
+                  <a:lnTo>
+                    <a:pt x="5416525" y="826415"/>
+                  </a:lnTo>
+                  <a:lnTo>
+                    <a:pt x="5346181" y="823109"/>
+                  </a:lnTo>
+                  <a:lnTo>
+                    <a:pt x="5275836" y="819714"/>
+                  </a:lnTo>
+                  <a:lnTo>
+                    <a:pt x="5205492" y="816228"/>
+                  </a:lnTo>
+                  <a:lnTo>
+                    <a:pt x="5135147" y="812648"/>
+                  </a:lnTo>
+                  <a:lnTo>
+                    <a:pt x="5064803" y="808972"/>
+                  </a:lnTo>
+                  <a:lnTo>
+                    <a:pt x="4994458" y="805197"/>
+                  </a:lnTo>
+                  <a:lnTo>
+                    <a:pt x="4924114" y="801320"/>
+                  </a:lnTo>
+                  <a:lnTo>
+                    <a:pt x="4853769" y="797339"/>
+                  </a:lnTo>
+                  <a:lnTo>
+                    <a:pt x="4783425" y="793250"/>
+                  </a:lnTo>
+                  <a:lnTo>
+                    <a:pt x="4713080" y="789052"/>
+                  </a:lnTo>
+                  <a:lnTo>
+                    <a:pt x="4642736" y="784741"/>
+                  </a:lnTo>
+                  <a:lnTo>
+                    <a:pt x="4572391" y="780313"/>
+                  </a:lnTo>
+                  <a:lnTo>
+                    <a:pt x="4502047" y="775767"/>
+                  </a:lnTo>
+                  <a:lnTo>
+                    <a:pt x="4431702" y="771098"/>
+                  </a:lnTo>
+                  <a:lnTo>
+                    <a:pt x="4361358" y="766304"/>
+                  </a:lnTo>
+                  <a:lnTo>
+                    <a:pt x="4291013" y="761380"/>
+                  </a:lnTo>
+                  <a:lnTo>
+                    <a:pt x="4220669" y="756324"/>
+                  </a:lnTo>
+                  <a:lnTo>
+                    <a:pt x="4150324" y="751132"/>
+                  </a:lnTo>
+                  <a:lnTo>
+                    <a:pt x="4079980" y="745800"/>
+                  </a:lnTo>
+                  <a:lnTo>
+                    <a:pt x="4009635" y="740325"/>
+                  </a:lnTo>
+                  <a:lnTo>
+                    <a:pt x="3939291" y="734702"/>
+                  </a:lnTo>
+                  <a:lnTo>
+                    <a:pt x="3868946" y="728928"/>
+                  </a:lnTo>
+                  <a:lnTo>
+                    <a:pt x="3798602" y="722999"/>
+                  </a:lnTo>
+                  <a:lnTo>
+                    <a:pt x="3728257" y="716910"/>
+                  </a:lnTo>
+                  <a:lnTo>
+                    <a:pt x="3657913" y="710657"/>
+                  </a:lnTo>
+                  <a:lnTo>
+                    <a:pt x="3587569" y="704236"/>
+                  </a:lnTo>
+                  <a:lnTo>
+                    <a:pt x="3517224" y="697643"/>
+                  </a:lnTo>
+                  <a:lnTo>
+                    <a:pt x="3446880" y="690871"/>
+                  </a:lnTo>
+                  <a:lnTo>
+                    <a:pt x="3376535" y="683918"/>
+                  </a:lnTo>
+                  <a:lnTo>
+                    <a:pt x="3306191" y="676777"/>
+                  </a:lnTo>
+                  <a:lnTo>
+                    <a:pt x="3235846" y="669444"/>
+                  </a:lnTo>
+                  <a:lnTo>
+                    <a:pt x="3165502" y="661914"/>
+                  </a:lnTo>
+                  <a:lnTo>
+                    <a:pt x="3095157" y="654181"/>
+                  </a:lnTo>
+                  <a:lnTo>
+                    <a:pt x="3024813" y="650371"/>
+                  </a:lnTo>
+                  <a:lnTo>
+                    <a:pt x="2954468" y="651345"/>
+                  </a:lnTo>
+                  <a:lnTo>
+                    <a:pt x="2884124" y="652316"/>
+                  </a:lnTo>
+                  <a:lnTo>
+                    <a:pt x="2813779" y="653283"/>
+                  </a:lnTo>
+                  <a:lnTo>
+                    <a:pt x="2743435" y="654248"/>
+                  </a:lnTo>
+                  <a:lnTo>
+                    <a:pt x="2673090" y="655209"/>
+                  </a:lnTo>
+                  <a:lnTo>
+                    <a:pt x="2602746" y="656168"/>
+                  </a:lnTo>
+                  <a:lnTo>
+                    <a:pt x="2532401" y="657123"/>
+                  </a:lnTo>
+                  <a:lnTo>
+                    <a:pt x="2462057" y="658075"/>
+                  </a:lnTo>
+                  <a:lnTo>
+                    <a:pt x="2391712" y="659024"/>
+                  </a:lnTo>
+                  <a:lnTo>
+                    <a:pt x="2321368" y="659969"/>
+                  </a:lnTo>
+                  <a:lnTo>
+                    <a:pt x="2251023" y="660912"/>
+                  </a:lnTo>
+                  <a:lnTo>
+                    <a:pt x="2180679" y="661852"/>
+                  </a:lnTo>
+                  <a:lnTo>
+                    <a:pt x="2110334" y="662788"/>
+                  </a:lnTo>
+                  <a:lnTo>
+                    <a:pt x="2039990" y="663722"/>
+                  </a:lnTo>
+                  <a:lnTo>
+                    <a:pt x="1969645" y="664652"/>
+                  </a:lnTo>
+                  <a:lnTo>
+                    <a:pt x="1899301" y="665580"/>
+                  </a:lnTo>
+                  <a:lnTo>
+                    <a:pt x="1828956" y="666504"/>
+                  </a:lnTo>
+                  <a:lnTo>
+                    <a:pt x="1758612" y="667426"/>
+                  </a:lnTo>
+                  <a:lnTo>
+                    <a:pt x="1688267" y="668344"/>
+                  </a:lnTo>
+                  <a:lnTo>
+                    <a:pt x="1617923" y="669260"/>
+                  </a:lnTo>
+                  <a:lnTo>
+                    <a:pt x="1547578" y="670172"/>
+                  </a:lnTo>
+                  <a:lnTo>
+                    <a:pt x="1477234" y="671082"/>
+                  </a:lnTo>
+                  <a:lnTo>
+                    <a:pt x="1406889" y="671988"/>
+                  </a:lnTo>
+                  <a:lnTo>
+                    <a:pt x="1336545" y="672892"/>
+                  </a:lnTo>
+                  <a:lnTo>
+                    <a:pt x="1266200" y="673792"/>
+                  </a:lnTo>
+                  <a:lnTo>
+                    <a:pt x="1195856" y="674690"/>
+                  </a:lnTo>
+                  <a:lnTo>
+                    <a:pt x="1125511" y="675585"/>
+                  </a:lnTo>
+                  <a:lnTo>
+                    <a:pt x="1055167" y="676477"/>
+                  </a:lnTo>
+                  <a:lnTo>
+                    <a:pt x="984822" y="677366"/>
+                  </a:lnTo>
+                  <a:lnTo>
+                    <a:pt x="914478" y="678252"/>
+                  </a:lnTo>
+                  <a:lnTo>
+                    <a:pt x="844133" y="679135"/>
+                  </a:lnTo>
+                  <a:lnTo>
+                    <a:pt x="773789" y="680015"/>
+                  </a:lnTo>
+                  <a:lnTo>
+                    <a:pt x="703444" y="680892"/>
+                  </a:lnTo>
+                  <a:lnTo>
+                    <a:pt x="633100" y="681767"/>
+                  </a:lnTo>
+                  <a:lnTo>
+                    <a:pt x="562755" y="682639"/>
+                  </a:lnTo>
+                  <a:lnTo>
+                    <a:pt x="492411" y="683508"/>
+                  </a:lnTo>
+                  <a:lnTo>
+                    <a:pt x="422066" y="684374"/>
+                  </a:lnTo>
+                  <a:lnTo>
+                    <a:pt x="351722" y="685237"/>
+                  </a:lnTo>
+                  <a:lnTo>
+                    <a:pt x="281377" y="686097"/>
+                  </a:lnTo>
+                  <a:lnTo>
+                    <a:pt x="211033" y="686955"/>
+                  </a:lnTo>
+                  <a:lnTo>
+                    <a:pt x="140688" y="687810"/>
+                  </a:lnTo>
+                  <a:lnTo>
+                    <a:pt x="70344" y="688662"/>
+                  </a:lnTo>
+                  <a:lnTo>
+                    <a:pt x="0" y="689511"/>
+                  </a:lnTo>
+                  <a:close/>
+                </a:path>
+              </a:pathLst>
+            </a:custGeom>
+            <a:solidFill>
+              <a:srgbClr val="FF8C00">
+                <a:alpha val="20000"/>
+              </a:srgbClr>
+            </a:solidFill>
+          </p:spPr>
+          <p:txBody>
+            <a:bodyPr/>
+            <a:lstStyle/>
+            <a:p/>
+          </p:txBody>
+        </p:sp>
+        <p:sp>
+          <p:nvSpPr>
+            <p:cNvPr id="72" name="pl72"/>
+            <p:cNvSpPr/>
+            <p:nvPr/>
+          </p:nvSpPr>
+          <p:spPr>
+            <a:xfrm>
+              <a:off x="1235312" y="4644430"/>
+              <a:ext cx="6964104" cy="649394"/>
+            </a:xfrm>
+            <a:custGeom>
+              <a:avLst/>
+              <a:pathLst>
+                <a:path w="6964104" h="649394">
+                  <a:moveTo>
+                    <a:pt x="0" y="0"/>
+                  </a:moveTo>
+                  <a:lnTo>
+                    <a:pt x="70344" y="24876"/>
+                  </a:lnTo>
+                  <a:lnTo>
+                    <a:pt x="140688" y="49100"/>
+                  </a:lnTo>
+                  <a:lnTo>
+                    <a:pt x="211033" y="72690"/>
+                  </a:lnTo>
+                  <a:lnTo>
+                    <a:pt x="281377" y="95662"/>
+                  </a:lnTo>
+                  <a:lnTo>
+                    <a:pt x="351722" y="118031"/>
+                  </a:lnTo>
+                  <a:lnTo>
+                    <a:pt x="422066" y="139814"/>
+                  </a:lnTo>
+                  <a:lnTo>
+                    <a:pt x="492411" y="161027"/>
+                  </a:lnTo>
+                  <a:lnTo>
+                    <a:pt x="562755" y="181683"/>
+                  </a:lnTo>
+                  <a:lnTo>
+                    <a:pt x="633100" y="201798"/>
+                  </a:lnTo>
+                  <a:lnTo>
+                    <a:pt x="703444" y="221386"/>
+                  </a:lnTo>
+                  <a:lnTo>
+                    <a:pt x="773789" y="240461"/>
+                  </a:lnTo>
+                  <a:lnTo>
+                    <a:pt x="844133" y="259036"/>
+                  </a:lnTo>
+                  <a:lnTo>
+                    <a:pt x="914478" y="277124"/>
+                  </a:lnTo>
+                  <a:lnTo>
+                    <a:pt x="984822" y="294738"/>
+                  </a:lnTo>
+                  <a:lnTo>
+                    <a:pt x="1055167" y="311891"/>
+                  </a:lnTo>
+                  <a:lnTo>
+                    <a:pt x="1125511" y="328593"/>
+                  </a:lnTo>
+                  <a:lnTo>
+                    <a:pt x="1195856" y="344859"/>
+                  </a:lnTo>
+                  <a:lnTo>
+                    <a:pt x="1266200" y="360698"/>
+                  </a:lnTo>
+                  <a:lnTo>
+                    <a:pt x="1336545" y="376121"/>
+                  </a:lnTo>
+                  <a:lnTo>
+                    <a:pt x="1406889" y="391141"/>
+                  </a:lnTo>
+                  <a:lnTo>
+                    <a:pt x="1477234" y="405767"/>
+                  </a:lnTo>
+                  <a:lnTo>
+                    <a:pt x="1547578" y="420010"/>
+                  </a:lnTo>
+                  <a:lnTo>
+                    <a:pt x="1617923" y="433880"/>
+                  </a:lnTo>
+                  <a:lnTo>
+                    <a:pt x="1688267" y="447386"/>
+                  </a:lnTo>
+                  <a:lnTo>
+                    <a:pt x="1758612" y="460538"/>
+                  </a:lnTo>
+                  <a:lnTo>
+                    <a:pt x="1828956" y="473345"/>
+                  </a:lnTo>
+                  <a:lnTo>
+                    <a:pt x="1899301" y="485817"/>
+                  </a:lnTo>
+                  <a:lnTo>
+                    <a:pt x="1969645" y="497962"/>
+                  </a:lnTo>
+                  <a:lnTo>
+                    <a:pt x="2039990" y="509789"/>
+                  </a:lnTo>
+                  <a:lnTo>
+                    <a:pt x="2110334" y="521305"/>
+                  </a:lnTo>
+                  <a:lnTo>
+                    <a:pt x="2180679" y="532520"/>
+                  </a:lnTo>
+                  <a:lnTo>
+                    <a:pt x="2251023" y="543441"/>
+                  </a:lnTo>
+                  <a:lnTo>
+                    <a:pt x="2321368" y="554076"/>
+                  </a:lnTo>
+                  <a:lnTo>
+                    <a:pt x="2391712" y="564432"/>
+                  </a:lnTo>
+                  <a:lnTo>
+                    <a:pt x="2462057" y="574517"/>
+                  </a:lnTo>
+                  <a:lnTo>
+                    <a:pt x="2532401" y="584338"/>
+                  </a:lnTo>
+                  <a:lnTo>
+                    <a:pt x="2602746" y="593901"/>
+                  </a:lnTo>
+                  <a:lnTo>
+                    <a:pt x="2673090" y="603213"/>
+                  </a:lnTo>
+                  <a:lnTo>
+                    <a:pt x="2743435" y="612282"/>
+                  </a:lnTo>
+                  <a:lnTo>
+                    <a:pt x="2813779" y="621113"/>
+                  </a:lnTo>
+                  <a:lnTo>
+                    <a:pt x="2884124" y="629712"/>
+                  </a:lnTo>
+                  <a:lnTo>
+                    <a:pt x="2954468" y="638086"/>
+                  </a:lnTo>
+                  <a:lnTo>
+                    <a:pt x="3024813" y="646241"/>
+                  </a:lnTo>
+                  <a:lnTo>
+                    <a:pt x="3095157" y="649394"/>
+                  </a:lnTo>
+                  <a:lnTo>
+                    <a:pt x="3165502" y="648413"/>
+                  </a:lnTo>
+                  <a:lnTo>
+                    <a:pt x="3235846" y="647430"/>
+                  </a:lnTo>
+                  <a:lnTo>
+                    <a:pt x="3306191" y="646443"/>
+                  </a:lnTo>
+                  <a:lnTo>
+                    <a:pt x="3376535" y="645453"/>
+                  </a:lnTo>
+                  <a:lnTo>
+                    <a:pt x="3446880" y="644460"/>
+                  </a:lnTo>
+                  <a:lnTo>
+                    <a:pt x="3517224" y="643463"/>
+                  </a:lnTo>
+                  <a:lnTo>
+                    <a:pt x="3587569" y="642463"/>
+                  </a:lnTo>
+                  <a:lnTo>
+                    <a:pt x="3657913" y="641460"/>
+                  </a:lnTo>
+                  <a:lnTo>
+                    <a:pt x="3728257" y="640454"/>
+                  </a:lnTo>
+                  <a:lnTo>
+                    <a:pt x="3798602" y="639444"/>
+                  </a:lnTo>
+                  <a:lnTo>
+                    <a:pt x="3868946" y="638431"/>
+                  </a:lnTo>
+                  <a:lnTo>
+                    <a:pt x="3939291" y="637415"/>
+                  </a:lnTo>
+                  <a:lnTo>
+                    <a:pt x="4009635" y="636396"/>
+                  </a:lnTo>
+                  <a:lnTo>
+                    <a:pt x="4079980" y="635373"/>
+                  </a:lnTo>
+                  <a:lnTo>
+                    <a:pt x="4150324" y="634346"/>
+                  </a:lnTo>
+                  <a:lnTo>
+                    <a:pt x="4220669" y="633317"/>
+                  </a:lnTo>
+                  <a:lnTo>
+                    <a:pt x="4291013" y="632284"/>
+                  </a:lnTo>
+                  <a:lnTo>
+                    <a:pt x="4361358" y="631248"/>
+                  </a:lnTo>
+                  <a:lnTo>
+                    <a:pt x="4431702" y="630208"/>
+                  </a:lnTo>
+                  <a:lnTo>
+                    <a:pt x="4502047" y="629165"/>
+                  </a:lnTo>
+                  <a:lnTo>
+                    <a:pt x="4572391" y="628118"/>
+                  </a:lnTo>
+                  <a:lnTo>
+                    <a:pt x="4642736" y="627068"/>
+                  </a:lnTo>
+                  <a:lnTo>
+                    <a:pt x="4713080" y="626015"/>
+                  </a:lnTo>
+                  <a:lnTo>
+                    <a:pt x="4783425" y="624958"/>
+                  </a:lnTo>
+                  <a:lnTo>
+                    <a:pt x="4853769" y="623898"/>
+                  </a:lnTo>
+                  <a:lnTo>
+                    <a:pt x="4924114" y="622834"/>
+                  </a:lnTo>
+                  <a:lnTo>
+                    <a:pt x="4994458" y="621767"/>
+                  </a:lnTo>
+                  <a:lnTo>
+                    <a:pt x="5064803" y="620696"/>
+                  </a:lnTo>
+                  <a:lnTo>
+                    <a:pt x="5135147" y="619622"/>
+                  </a:lnTo>
+                  <a:lnTo>
+                    <a:pt x="5205492" y="618544"/>
+                  </a:lnTo>
+                  <a:lnTo>
+                    <a:pt x="5275836" y="617463"/>
+                  </a:lnTo>
+                  <a:lnTo>
+                    <a:pt x="5346181" y="616378"/>
+                  </a:lnTo>
+                  <a:lnTo>
+                    <a:pt x="5416525" y="615290"/>
+                  </a:lnTo>
+                  <a:lnTo>
+                    <a:pt x="5486870" y="614198"/>
+                  </a:lnTo>
+                  <a:lnTo>
+                    <a:pt x="5557214" y="613102"/>
+                  </a:lnTo>
+                  <a:lnTo>
+                    <a:pt x="5627559" y="612003"/>
+                  </a:lnTo>
+                  <a:lnTo>
+                    <a:pt x="5697903" y="610901"/>
+                  </a:lnTo>
+                  <a:lnTo>
+                    <a:pt x="5768248" y="609794"/>
+                  </a:lnTo>
+                  <a:lnTo>
+                    <a:pt x="5838592" y="608685"/>
+                  </a:lnTo>
+                  <a:lnTo>
+                    <a:pt x="5908937" y="607571"/>
+                  </a:lnTo>
+                  <a:lnTo>
+                    <a:pt x="5979281" y="606454"/>
+                  </a:lnTo>
+                  <a:lnTo>
+                    <a:pt x="6049626" y="605333"/>
+                  </a:lnTo>
+                  <a:lnTo>
+                    <a:pt x="6119970" y="604209"/>
+                  </a:lnTo>
+                  <a:lnTo>
+                    <a:pt x="6190315" y="603081"/>
+                  </a:lnTo>
+                  <a:lnTo>
+                    <a:pt x="6260659" y="601949"/>
+                  </a:lnTo>
+                  <a:lnTo>
+                    <a:pt x="6331004" y="600813"/>
+                  </a:lnTo>
+                  <a:lnTo>
+                    <a:pt x="6401348" y="599674"/>
+                  </a:lnTo>
+                  <a:lnTo>
+                    <a:pt x="6471693" y="598531"/>
+                  </a:lnTo>
+                  <a:lnTo>
+                    <a:pt x="6542037" y="597384"/>
+                  </a:lnTo>
+                  <a:lnTo>
+                    <a:pt x="6612382" y="596234"/>
+                  </a:lnTo>
+                  <a:lnTo>
+                    <a:pt x="6682726" y="595080"/>
+                  </a:lnTo>
+                  <a:lnTo>
+                    <a:pt x="6753071" y="593922"/>
+                  </a:lnTo>
+                  <a:lnTo>
+                    <a:pt x="6823415" y="592760"/>
+                  </a:lnTo>
+                  <a:lnTo>
+                    <a:pt x="6893760" y="591595"/>
+                  </a:lnTo>
+                  <a:lnTo>
+                    <a:pt x="6964104" y="590425"/>
+                  </a:lnTo>
+                </a:path>
+              </a:pathLst>
+            </a:custGeom>
+          </p:spPr>
+          <p:txBody>
+            <a:bodyPr/>
+            <a:lstStyle/>
+            <a:p/>
+          </p:txBody>
+        </p:sp>
+        <p:sp>
+          <p:nvSpPr>
+            <p:cNvPr id="73" name="pl73"/>
+            <p:cNvSpPr/>
+            <p:nvPr/>
+          </p:nvSpPr>
+          <p:spPr>
+            <a:xfrm>
+              <a:off x="1235312" y="5294802"/>
+              <a:ext cx="6964104" cy="230396"/>
+            </a:xfrm>
+            <a:custGeom>
+              <a:avLst/>
+              <a:pathLst>
+                <a:path w="6964104" h="230396">
+                  <a:moveTo>
+                    <a:pt x="6964104" y="230396"/>
+                  </a:moveTo>
+                  <a:lnTo>
+                    <a:pt x="6893760" y="228553"/>
+                  </a:lnTo>
+                  <a:lnTo>
+                    <a:pt x="6823415" y="226660"/>
+                  </a:lnTo>
+                  <a:lnTo>
+                    <a:pt x="6753071" y="224716"/>
+                  </a:lnTo>
+                  <a:lnTo>
+                    <a:pt x="6682726" y="222720"/>
+                  </a:lnTo>
+                  <a:lnTo>
+                    <a:pt x="6612382" y="220671"/>
+                  </a:lnTo>
+                  <a:lnTo>
+                    <a:pt x="6542037" y="218566"/>
+                  </a:lnTo>
+                  <a:lnTo>
+                    <a:pt x="6471693" y="216404"/>
+                  </a:lnTo>
+                  <a:lnTo>
+                    <a:pt x="6401348" y="214185"/>
+                  </a:lnTo>
+                  <a:lnTo>
+                    <a:pt x="6331004" y="211905"/>
+                  </a:lnTo>
+                  <a:lnTo>
+                    <a:pt x="6260659" y="209565"/>
+                  </a:lnTo>
+                  <a:lnTo>
+                    <a:pt x="6190315" y="207161"/>
+                  </a:lnTo>
+                  <a:lnTo>
+                    <a:pt x="6119970" y="204693"/>
+                  </a:lnTo>
+                  <a:lnTo>
+                    <a:pt x="6049626" y="202158"/>
+                  </a:lnTo>
+                  <a:lnTo>
+                    <a:pt x="5979281" y="199555"/>
+                  </a:lnTo>
+                  <a:lnTo>
+                    <a:pt x="5908937" y="196882"/>
+                  </a:lnTo>
+                  <a:lnTo>
+                    <a:pt x="5838592" y="194137"/>
+                  </a:lnTo>
+                  <a:lnTo>
+                    <a:pt x="5768248" y="191318"/>
+                  </a:lnTo>
+                  <a:lnTo>
+                    <a:pt x="5697903" y="188423"/>
+                  </a:lnTo>
+                  <a:lnTo>
+                    <a:pt x="5627559" y="185450"/>
+                  </a:lnTo>
+                  <a:lnTo>
+                    <a:pt x="5557214" y="182398"/>
+                  </a:lnTo>
+                  <a:lnTo>
+                    <a:pt x="5486870" y="179263"/>
+                  </a:lnTo>
+                  <a:lnTo>
+                    <a:pt x="5416525" y="176044"/>
+                  </a:lnTo>
+                  <a:lnTo>
+                    <a:pt x="5346181" y="172738"/>
+                  </a:lnTo>
+                  <a:lnTo>
+                    <a:pt x="5275836" y="169343"/>
+                  </a:lnTo>
+                  <a:lnTo>
+                    <a:pt x="5205492" y="165857"/>
+                  </a:lnTo>
+                  <a:lnTo>
+                    <a:pt x="5135147" y="162277"/>
+                  </a:lnTo>
+                  <a:lnTo>
+                    <a:pt x="5064803" y="158601"/>
+                  </a:lnTo>
+                  <a:lnTo>
+                    <a:pt x="4994458" y="154825"/>
+                  </a:lnTo>
+                  <a:lnTo>
+                    <a:pt x="4924114" y="150948"/>
+                  </a:lnTo>
+                  <a:lnTo>
+                    <a:pt x="4853769" y="146967"/>
+                  </a:lnTo>
+                  <a:lnTo>
+                    <a:pt x="4783425" y="142879"/>
+                  </a:lnTo>
+                  <a:lnTo>
+                    <a:pt x="4713080" y="138681"/>
+                  </a:lnTo>
+                  <a:lnTo>
+                    <a:pt x="4642736" y="134369"/>
+                  </a:lnTo>
+                  <a:lnTo>
+                    <a:pt x="4572391" y="129942"/>
+                  </a:lnTo>
+                  <a:lnTo>
+                    <a:pt x="4502047" y="125396"/>
+                  </a:lnTo>
+                  <a:lnTo>
+                    <a:pt x="4431702" y="120727"/>
+                  </a:lnTo>
+                  <a:lnTo>
+                    <a:pt x="4361358" y="115932"/>
+                  </a:lnTo>
+                  <a:lnTo>
+                    <a:pt x="4291013" y="111009"/>
+                  </a:lnTo>
+                  <a:lnTo>
+                    <a:pt x="4220669" y="105953"/>
+                  </a:lnTo>
+                  <a:lnTo>
+                    <a:pt x="4150324" y="100761"/>
+                  </a:lnTo>
+                  <a:lnTo>
+                    <a:pt x="4079980" y="95429"/>
+                  </a:lnTo>
+                  <a:lnTo>
+                    <a:pt x="4009635" y="89954"/>
+                  </a:lnTo>
+                  <a:lnTo>
+                    <a:pt x="3939291" y="84331"/>
+                  </a:lnTo>
+                  <a:lnTo>
+                    <a:pt x="3868946" y="78557"/>
+                  </a:lnTo>
+                  <a:lnTo>
+                    <a:pt x="3798602" y="72628"/>
+                  </a:lnTo>
+                  <a:lnTo>
+                    <a:pt x="3728257" y="66539"/>
+                  </a:lnTo>
+                  <a:lnTo>
+                    <a:pt x="3657913" y="60286"/>
+                  </a:lnTo>
+                  <a:lnTo>
+                    <a:pt x="3587569" y="53865"/>
+                  </a:lnTo>
+                  <a:lnTo>
+                    <a:pt x="3517224" y="47271"/>
+                  </a:lnTo>
+                  <a:lnTo>
+                    <a:pt x="3446880" y="40500"/>
+                  </a:lnTo>
+                  <a:lnTo>
+                    <a:pt x="3376535" y="33546"/>
+                  </a:lnTo>
+                  <a:lnTo>
+                    <a:pt x="3306191" y="26406"/>
+                  </a:lnTo>
+                  <a:lnTo>
+                    <a:pt x="3235846" y="19073"/>
+                  </a:lnTo>
+                  <a:lnTo>
+                    <a:pt x="3165502" y="11543"/>
+                  </a:lnTo>
+                  <a:lnTo>
+                    <a:pt x="3095157" y="3810"/>
+                  </a:lnTo>
+                  <a:lnTo>
+                    <a:pt x="3024813" y="0"/>
+                  </a:lnTo>
+                  <a:lnTo>
+                    <a:pt x="2954468" y="974"/>
+                  </a:lnTo>
+                  <a:lnTo>
+                    <a:pt x="2884124" y="1944"/>
+                  </a:lnTo>
+                  <a:lnTo>
+                    <a:pt x="2813779" y="2912"/>
+                  </a:lnTo>
+                  <a:lnTo>
+                    <a:pt x="2743435" y="3877"/>
+                  </a:lnTo>
+                  <a:lnTo>
+                    <a:pt x="2673090" y="4838"/>
+                  </a:lnTo>
+                  <a:lnTo>
+                    <a:pt x="2602746" y="5796"/>
+                  </a:lnTo>
+                  <a:lnTo>
+                    <a:pt x="2532401" y="6751"/>
+                  </a:lnTo>
+                  <a:lnTo>
+                    <a:pt x="2462057" y="7703"/>
+                  </a:lnTo>
+                  <a:lnTo>
+                    <a:pt x="2391712" y="8652"/>
+                  </a:lnTo>
+                  <a:lnTo>
+                    <a:pt x="2321368" y="9598"/>
+                  </a:lnTo>
+                  <a:lnTo>
+                    <a:pt x="2251023" y="10541"/>
+                  </a:lnTo>
+                  <a:lnTo>
+                    <a:pt x="2180679" y="11480"/>
+                  </a:lnTo>
+                  <a:lnTo>
+                    <a:pt x="2110334" y="12417"/>
+                  </a:lnTo>
+                  <a:lnTo>
+                    <a:pt x="2039990" y="13351"/>
+                  </a:lnTo>
+                  <a:lnTo>
+                    <a:pt x="1969645" y="14281"/>
+                  </a:lnTo>
+                  <a:lnTo>
+                    <a:pt x="1899301" y="15209"/>
+                  </a:lnTo>
+                  <a:lnTo>
+                    <a:pt x="1828956" y="16133"/>
+                  </a:lnTo>
+                  <a:lnTo>
+                    <a:pt x="1758612" y="17054"/>
+                  </a:lnTo>
+                  <a:lnTo>
+                    <a:pt x="1688267" y="17973"/>
+                  </a:lnTo>
+                  <a:lnTo>
+                    <a:pt x="1617923" y="18888"/>
+                  </a:lnTo>
+                  <a:lnTo>
+                    <a:pt x="1547578" y="19801"/>
+                  </a:lnTo>
+                  <a:lnTo>
+                    <a:pt x="1477234" y="20710"/>
+                  </a:lnTo>
+                  <a:lnTo>
+                    <a:pt x="1406889" y="21617"/>
+                  </a:lnTo>
+                  <a:lnTo>
+                    <a:pt x="1336545" y="22520"/>
+                  </a:lnTo>
+                  <a:lnTo>
+                    <a:pt x="1266200" y="23421"/>
+                  </a:lnTo>
+                  <a:lnTo>
+                    <a:pt x="1195856" y="24319"/>
+                  </a:lnTo>
+                  <a:lnTo>
+                    <a:pt x="1125511" y="25213"/>
+                  </a:lnTo>
+                  <a:lnTo>
+                    <a:pt x="1055167" y="26105"/>
+                  </a:lnTo>
+                  <a:lnTo>
+                    <a:pt x="984822" y="26994"/>
+                  </a:lnTo>
+                  <a:lnTo>
+                    <a:pt x="914478" y="27880"/>
+                  </a:lnTo>
+                  <a:lnTo>
+                    <a:pt x="844133" y="28763"/>
+                  </a:lnTo>
+                  <a:lnTo>
+                    <a:pt x="773789" y="29644"/>
+                  </a:lnTo>
+                  <a:lnTo>
+                    <a:pt x="703444" y="30521"/>
+                  </a:lnTo>
+                  <a:lnTo>
+                    <a:pt x="633100" y="31396"/>
+                  </a:lnTo>
+                  <a:lnTo>
+                    <a:pt x="562755" y="32267"/>
+                  </a:lnTo>
+                  <a:lnTo>
+                    <a:pt x="492411" y="33136"/>
+                  </a:lnTo>
+                  <a:lnTo>
+                    <a:pt x="422066" y="34002"/>
+                  </a:lnTo>
+                  <a:lnTo>
+                    <a:pt x="351722" y="34865"/>
+                  </a:lnTo>
+                  <a:lnTo>
+                    <a:pt x="281377" y="35726"/>
+                  </a:lnTo>
+                  <a:lnTo>
+                    <a:pt x="211033" y="36583"/>
+                  </a:lnTo>
+                  <a:lnTo>
+                    <a:pt x="140688" y="37438"/>
+                  </a:lnTo>
+                  <a:lnTo>
+                    <a:pt x="70344" y="38290"/>
+                  </a:lnTo>
+                  <a:lnTo>
+                    <a:pt x="0" y="39139"/>
+                  </a:lnTo>
+                </a:path>
+              </a:pathLst>
+            </a:custGeom>
+          </p:spPr>
+          <p:txBody>
+            <a:bodyPr/>
+            <a:lstStyle/>
+            <a:p/>
+          </p:txBody>
+        </p:sp>
+        <p:sp>
+          <p:nvSpPr>
+            <p:cNvPr id="74" name="pl74"/>
+            <p:cNvSpPr/>
+            <p:nvPr/>
+          </p:nvSpPr>
+          <p:spPr>
+            <a:xfrm>
+              <a:off x="1235312" y="5097134"/>
+              <a:ext cx="6964104" cy="339786"/>
+            </a:xfrm>
+            <a:custGeom>
+              <a:avLst/>
+              <a:pathLst>
+                <a:path w="6964104" h="339786">
+                  <a:moveTo>
+                    <a:pt x="0" y="0"/>
+                  </a:moveTo>
+                  <a:lnTo>
+                    <a:pt x="70344" y="5749"/>
+                  </a:lnTo>
+                  <a:lnTo>
+                    <a:pt x="140688" y="11431"/>
+                  </a:lnTo>
+                  <a:lnTo>
+                    <a:pt x="211033" y="17048"/>
+                  </a:lnTo>
+                  <a:lnTo>
+                    <a:pt x="281377" y="22600"/>
+                  </a:lnTo>
+                  <a:lnTo>
+                    <a:pt x="351722" y="28088"/>
+                  </a:lnTo>
+                  <a:lnTo>
+                    <a:pt x="422066" y="33512"/>
+                  </a:lnTo>
+                  <a:lnTo>
+                    <a:pt x="492411" y="38873"/>
+                  </a:lnTo>
+                  <a:lnTo>
+                    <a:pt x="562755" y="44172"/>
+                  </a:lnTo>
+                  <a:lnTo>
+                    <a:pt x="633100" y="49410"/>
+                  </a:lnTo>
+                  <a:lnTo>
+                    <a:pt x="703444" y="54587"/>
+                  </a:lnTo>
+                  <a:lnTo>
+                    <a:pt x="773789" y="59704"/>
+                  </a:lnTo>
+                  <a:lnTo>
+                    <a:pt x="844133" y="64762"/>
+                  </a:lnTo>
+                  <a:lnTo>
+                    <a:pt x="914478" y="69761"/>
+                  </a:lnTo>
+                  <a:lnTo>
+                    <a:pt x="984822" y="74703"/>
+                  </a:lnTo>
+                  <a:lnTo>
+                    <a:pt x="1055167" y="79587"/>
+                  </a:lnTo>
+                  <a:lnTo>
+                    <a:pt x="1125511" y="84415"/>
+                  </a:lnTo>
+                  <a:lnTo>
+                    <a:pt x="1195856" y="89187"/>
+                  </a:lnTo>
+                  <a:lnTo>
+                    <a:pt x="1266200" y="93903"/>
+                  </a:lnTo>
+                  <a:lnTo>
+                    <a:pt x="1336545" y="98565"/>
+                  </a:lnTo>
+                  <a:lnTo>
+                    <a:pt x="1406889" y="103173"/>
+                  </a:lnTo>
+                  <a:lnTo>
+                    <a:pt x="1477234" y="107728"/>
+                  </a:lnTo>
+                  <a:lnTo>
+                    <a:pt x="1547578" y="112230"/>
+                  </a:lnTo>
+                  <a:lnTo>
+                    <a:pt x="1617923" y="116679"/>
+                  </a:lnTo>
+                  <a:lnTo>
+                    <a:pt x="1688267" y="121078"/>
+                  </a:lnTo>
+                  <a:lnTo>
+                    <a:pt x="1758612" y="125425"/>
+                  </a:lnTo>
+                  <a:lnTo>
+                    <a:pt x="1828956" y="129722"/>
+                  </a:lnTo>
+                  <a:lnTo>
+                    <a:pt x="1899301" y="133969"/>
+                  </a:lnTo>
+                  <a:lnTo>
+                    <a:pt x="1969645" y="138167"/>
+                  </a:lnTo>
+                  <a:lnTo>
+                    <a:pt x="2039990" y="142317"/>
+                  </a:lnTo>
+                  <a:lnTo>
+                    <a:pt x="2110334" y="146418"/>
+                  </a:lnTo>
+                  <a:lnTo>
+                    <a:pt x="2180679" y="150472"/>
+                  </a:lnTo>
+                  <a:lnTo>
+                    <a:pt x="2251023" y="154479"/>
+                  </a:lnTo>
+                  <a:lnTo>
+                    <a:pt x="2321368" y="158440"/>
+                  </a:lnTo>
+                  <a:lnTo>
+                    <a:pt x="2391712" y="162354"/>
+                  </a:lnTo>
+                  <a:lnTo>
+                    <a:pt x="2462057" y="166224"/>
+                  </a:lnTo>
+                  <a:lnTo>
+                    <a:pt x="2532401" y="170048"/>
+                  </a:lnTo>
+                  <a:lnTo>
+                    <a:pt x="2602746" y="173829"/>
+                  </a:lnTo>
+                  <a:lnTo>
+                    <a:pt x="2673090" y="177565"/>
+                  </a:lnTo>
+                  <a:lnTo>
+                    <a:pt x="2743435" y="181259"/>
+                  </a:lnTo>
+                  <a:lnTo>
+                    <a:pt x="2813779" y="184909"/>
+                  </a:lnTo>
+                  <a:lnTo>
+                    <a:pt x="2884124" y="188517"/>
+                  </a:lnTo>
+                  <a:lnTo>
+                    <a:pt x="2954468" y="192084"/>
+                  </a:lnTo>
+                  <a:lnTo>
+                    <a:pt x="3024813" y="195609"/>
+                  </a:lnTo>
+                  <a:lnTo>
+                    <a:pt x="3095157" y="199094"/>
+                  </a:lnTo>
+                  <a:lnTo>
+                    <a:pt x="3165502" y="202538"/>
+                  </a:lnTo>
+                  <a:lnTo>
+                    <a:pt x="3235846" y="205942"/>
+                  </a:lnTo>
+                  <a:lnTo>
+                    <a:pt x="3306191" y="209307"/>
+                  </a:lnTo>
+                  <a:lnTo>
+                    <a:pt x="3376535" y="212632"/>
+                  </a:lnTo>
+                  <a:lnTo>
+                    <a:pt x="3446880" y="215920"/>
+                  </a:lnTo>
+                  <a:lnTo>
+                    <a:pt x="3517224" y="219169"/>
+                  </a:lnTo>
+                  <a:lnTo>
+                    <a:pt x="3587569" y="222380"/>
+                  </a:lnTo>
+                  <a:lnTo>
+                    <a:pt x="3657913" y="225555"/>
+                  </a:lnTo>
+                  <a:lnTo>
+                    <a:pt x="3728257" y="228693"/>
+                  </a:lnTo>
+                  <a:lnTo>
+                    <a:pt x="3798602" y="231794"/>
+                  </a:lnTo>
+                  <a:lnTo>
+                    <a:pt x="3868946" y="234859"/>
+                  </a:lnTo>
+                  <a:lnTo>
+                    <a:pt x="3939291" y="237889"/>
+                  </a:lnTo>
+                  <a:lnTo>
+                    <a:pt x="4009635" y="240884"/>
+                  </a:lnTo>
+                  <a:lnTo>
+                    <a:pt x="4079980" y="243844"/>
+                  </a:lnTo>
+                  <a:lnTo>
+                    <a:pt x="4150324" y="246770"/>
+                  </a:lnTo>
+                  <a:lnTo>
+                    <a:pt x="4220669" y="249662"/>
+                  </a:lnTo>
+                  <a:lnTo>
+                    <a:pt x="4291013" y="252521"/>
+                  </a:lnTo>
+                  <a:lnTo>
+                    <a:pt x="4361358" y="255346"/>
+                  </a:lnTo>
+                  <a:lnTo>
+                    <a:pt x="4431702" y="258139"/>
+                  </a:lnTo>
+                  <a:lnTo>
+                    <a:pt x="4502047" y="260899"/>
+                  </a:lnTo>
+                  <a:lnTo>
+                    <a:pt x="4572391" y="263628"/>
+                  </a:lnTo>
+                  <a:lnTo>
+                    <a:pt x="4642736" y="266325"/>
+                  </a:lnTo>
+                  <a:lnTo>
+                    <a:pt x="4713080" y="268990"/>
+                  </a:lnTo>
+                  <a:lnTo>
+                    <a:pt x="4783425" y="271625"/>
+                  </a:lnTo>
+                  <a:lnTo>
+                    <a:pt x="4853769" y="274229"/>
+                  </a:lnTo>
+                  <a:lnTo>
+                    <a:pt x="4924114" y="276803"/>
+                  </a:lnTo>
+                  <a:lnTo>
+                    <a:pt x="4994458" y="279348"/>
+                  </a:lnTo>
+                  <a:lnTo>
+                    <a:pt x="5064803" y="281863"/>
+                  </a:lnTo>
+                  <a:lnTo>
+                    <a:pt x="5135147" y="284348"/>
+                  </a:lnTo>
+                  <a:lnTo>
+                    <a:pt x="5205492" y="286805"/>
+                  </a:lnTo>
+                  <a:lnTo>
+                    <a:pt x="5275836" y="289234"/>
+                  </a:lnTo>
+                  <a:lnTo>
+                    <a:pt x="5346181" y="291634"/>
+                  </a:lnTo>
+                  <a:lnTo>
+                    <a:pt x="5416525" y="294007"/>
+                  </a:lnTo>
+                  <a:lnTo>
+                    <a:pt x="5486870" y="296352"/>
+                  </a:lnTo>
+                  <a:lnTo>
+                    <a:pt x="5557214" y="298670"/>
+                  </a:lnTo>
+                  <a:lnTo>
+                    <a:pt x="5627559" y="300961"/>
+                  </a:lnTo>
+                  <a:lnTo>
+                    <a:pt x="5697903" y="303226"/>
+                  </a:lnTo>
+                  <a:lnTo>
+                    <a:pt x="5768248" y="305464"/>
+                  </a:lnTo>
+                  <a:lnTo>
+                    <a:pt x="5838592" y="307676"/>
+                  </a:lnTo>
+                  <a:lnTo>
+                    <a:pt x="5908937" y="309863"/>
+                  </a:lnTo>
+                  <a:lnTo>
+                    <a:pt x="5979281" y="312025"/>
+                  </a:lnTo>
+                  <a:lnTo>
+                    <a:pt x="6049626" y="314161"/>
+                  </a:lnTo>
+                  <a:lnTo>
+                    <a:pt x="6119970" y="316273"/>
+                  </a:lnTo>
+                  <a:lnTo>
+                    <a:pt x="6190315" y="318360"/>
+                  </a:lnTo>
+                  <a:lnTo>
+                    <a:pt x="6260659" y="320423"/>
+                  </a:lnTo>
+                  <a:lnTo>
+                    <a:pt x="6331004" y="322463"/>
+                  </a:lnTo>
+                  <a:lnTo>
+                    <a:pt x="6401348" y="324478"/>
+                  </a:lnTo>
+                  <a:lnTo>
+                    <a:pt x="6471693" y="326471"/>
+                  </a:lnTo>
+                  <a:lnTo>
+                    <a:pt x="6542037" y="328440"/>
+                  </a:lnTo>
+                  <a:lnTo>
+                    <a:pt x="6612382" y="330386"/>
+                  </a:lnTo>
+                  <a:lnTo>
+                    <a:pt x="6682726" y="332310"/>
+                  </a:lnTo>
+                  <a:lnTo>
+                    <a:pt x="6753071" y="334212"/>
+                  </a:lnTo>
+                  <a:lnTo>
+                    <a:pt x="6823415" y="336091"/>
+                  </a:lnTo>
+                  <a:lnTo>
+                    <a:pt x="6893760" y="337949"/>
+                  </a:lnTo>
+                  <a:lnTo>
+                    <a:pt x="6964104" y="339786"/>
+                  </a:lnTo>
+                </a:path>
+              </a:pathLst>
+            </a:custGeom>
+            <a:ln w="27101" cap="flat">
+              <a:solidFill>
+                <a:srgbClr val="FF8C00">
+                  <a:alpha val="100000"/>
+                </a:srgbClr>
+              </a:solidFill>
+              <a:prstDash val="solid"/>
+              <a:round/>
+            </a:ln>
+          </p:spPr>
+          <p:txBody>
+            <a:bodyPr/>
+            <a:lstStyle/>
+            <a:p/>
+          </p:txBody>
+        </p:sp>
+        <p:sp>
+          <p:nvSpPr>
+            <p:cNvPr id="75" name="pl75"/>
+            <p:cNvSpPr/>
+            <p:nvPr/>
+          </p:nvSpPr>
+          <p:spPr>
+            <a:xfrm>
+              <a:off x="887106" y="5294352"/>
+              <a:ext cx="7660515" cy="0"/>
+            </a:xfrm>
+            <a:custGeom>
+              <a:avLst/>
+              <a:pathLst>
+                <a:path w="7660515" h="0">
+                  <a:moveTo>
+                    <a:pt x="0" y="0"/>
+                  </a:moveTo>
+                  <a:lnTo>
+                    <a:pt x="7660515" y="0"/>
+                  </a:lnTo>
+                  <a:lnTo>
+                    <a:pt x="7660515" y="0"/>
+                  </a:lnTo>
+                </a:path>
+              </a:pathLst>
+            </a:custGeom>
+            <a:ln w="13550" cap="flat">
+              <a:solidFill>
+                <a:srgbClr val="7F7F7F">
+                  <a:alpha val="100000"/>
+                </a:srgbClr>
+              </a:solidFill>
+              <a:prstDash val="dash"/>
+              <a:round/>
+            </a:ln>
+          </p:spPr>
+          <p:txBody>
+            <a:bodyPr/>
+            <a:lstStyle/>
+            <a:p/>
+          </p:txBody>
+        </p:sp>
+        <p:sp>
+          <p:nvSpPr>
+            <p:cNvPr id="76" name="pl76"/>
+            <p:cNvSpPr/>
+            <p:nvPr/>
+          </p:nvSpPr>
+          <p:spPr>
+            <a:xfrm>
+              <a:off x="4292500" y="4336484"/>
+              <a:ext cx="0" cy="1317069"/>
+            </a:xfrm>
+            <a:custGeom>
+              <a:avLst/>
+              <a:pathLst>
+                <a:path w="0" h="1317069">
+                  <a:moveTo>
+                    <a:pt x="0" y="1317069"/>
+                  </a:moveTo>
+                  <a:lnTo>
+                    <a:pt x="0" y="0"/>
+                  </a:lnTo>
+                  <a:lnTo>
+                    <a:pt x="0" y="0"/>
+                  </a:lnTo>
+                </a:path>
+              </a:pathLst>
+            </a:custGeom>
+            <a:ln w="13550" cap="flat">
+              <a:solidFill>
+                <a:srgbClr val="666666">
+                  <a:alpha val="100000"/>
+                </a:srgbClr>
+              </a:solidFill>
+              <a:prstDash val="dot"/>
+              <a:round/>
+            </a:ln>
+          </p:spPr>
+          <p:txBody>
+            <a:bodyPr/>
+            <a:lstStyle/>
+            <a:p/>
+          </p:txBody>
+        </p:sp>
+        <p:sp>
+          <p:nvSpPr>
+            <p:cNvPr id="77" name="pl77"/>
+            <p:cNvSpPr/>
+            <p:nvPr/>
+          </p:nvSpPr>
+          <p:spPr>
+            <a:xfrm>
+              <a:off x="3124839" y="4336484"/>
+              <a:ext cx="0" cy="1317069"/>
+            </a:xfrm>
+            <a:custGeom>
+              <a:avLst/>
+              <a:pathLst>
+                <a:path w="0" h="1317069">
+                  <a:moveTo>
+                    <a:pt x="0" y="1317069"/>
+                  </a:moveTo>
+                  <a:lnTo>
+                    <a:pt x="0" y="0"/>
+                  </a:lnTo>
+                  <a:lnTo>
+                    <a:pt x="0" y="0"/>
+                  </a:lnTo>
+                </a:path>
+              </a:pathLst>
+            </a:custGeom>
+            <a:ln w="13550" cap="flat">
+              <a:solidFill>
+                <a:srgbClr val="4682B4">
+                  <a:alpha val="69803"/>
+                </a:srgbClr>
+              </a:solidFill>
+              <a:prstDash val="dash"/>
+              <a:round/>
+            </a:ln>
+          </p:spPr>
+          <p:txBody>
+            <a:bodyPr/>
+            <a:lstStyle/>
+            <a:p/>
+          </p:txBody>
+        </p:sp>
+        <p:sp>
+          <p:nvSpPr>
+            <p:cNvPr id="78" name="pl78"/>
+            <p:cNvSpPr/>
+            <p:nvPr/>
+          </p:nvSpPr>
+          <p:spPr>
+            <a:xfrm>
+              <a:off x="5508592" y="4336484"/>
+              <a:ext cx="0" cy="1317069"/>
+            </a:xfrm>
+            <a:custGeom>
+              <a:avLst/>
+              <a:pathLst>
+                <a:path w="0" h="1317069">
+                  <a:moveTo>
+                    <a:pt x="0" y="1317069"/>
+                  </a:moveTo>
+                  <a:lnTo>
+                    <a:pt x="0" y="0"/>
+                  </a:lnTo>
+                  <a:lnTo>
+                    <a:pt x="0" y="0"/>
+                  </a:lnTo>
+                </a:path>
+              </a:pathLst>
+            </a:custGeom>
+            <a:ln w="13550" cap="flat">
+              <a:solidFill>
+                <a:srgbClr val="4682B4">
+                  <a:alpha val="69803"/>
+                </a:srgbClr>
+              </a:solidFill>
+              <a:prstDash val="dash"/>
+              <a:round/>
+            </a:ln>
+          </p:spPr>
+          <p:txBody>
+            <a:bodyPr/>
+            <a:lstStyle/>
+            <a:p/>
+          </p:txBody>
+        </p:sp>
+        <p:sp>
+          <p:nvSpPr>
+            <p:cNvPr id="79" name="tx79"/>
+            <p:cNvSpPr/>
+            <p:nvPr/>
+          </p:nvSpPr>
+          <p:spPr>
+            <a:xfrm>
+              <a:off x="762297" y="5553636"/>
+              <a:ext cx="62179" cy="80101"/>
+            </a:xfrm>
+            <a:prstGeom prst="rect">
+              <a:avLst/>
+            </a:prstGeom>
+            <a:noFill/>
+          </p:spPr>
+          <p:txBody>
+            <a:bodyPr lIns="0" rIns="0" tIns="0" bIns="0" anchorCtr="1" anchor="ctr" wrap="none"/>
+            <a:lstStyle/>
+            <a:p>
+              <a:pPr algn="l" marL="0" marR="0" indent="0">
+                <a:lnSpc>
+                  <a:spcPts val="880"/>
+                </a:lnSpc>
+                <a:spcBef>
+                  <a:spcPts val="0"/>
+                </a:spcBef>
+                <a:spcAft>
+                  <a:spcPts val="0"/>
+                </a:spcAft>
+              </a:pPr>
+              <a:r>
+                <a:rPr sz="880">
+                  <a:solidFill>
+                    <a:srgbClr val="4D4D4D">
+                      <a:alpha val="100000"/>
+                    </a:srgbClr>
+                  </a:solidFill>
+                  <a:latin typeface="Helvetica"/>
+                  <a:cs typeface="Helvetica"/>
+                </a:rPr>
+                <a:t>0</a:t>
+              </a:r>
+            </a:p>
+          </p:txBody>
+        </p:sp>
+        <p:sp>
+          <p:nvSpPr>
+            <p:cNvPr id="80" name="tx80"/>
+            <p:cNvSpPr/>
+            <p:nvPr/>
+          </p:nvSpPr>
+          <p:spPr>
+            <a:xfrm>
+              <a:off x="762297" y="5254302"/>
+              <a:ext cx="62179" cy="80101"/>
+            </a:xfrm>
+            <a:prstGeom prst="rect">
+              <a:avLst/>
+            </a:prstGeom>
+            <a:noFill/>
+          </p:spPr>
+          <p:txBody>
+            <a:bodyPr lIns="0" rIns="0" tIns="0" bIns="0" anchorCtr="1" anchor="ctr" wrap="none"/>
+            <a:lstStyle/>
+            <a:p>
+              <a:pPr algn="l" marL="0" marR="0" indent="0">
+                <a:lnSpc>
+                  <a:spcPts val="880"/>
+                </a:lnSpc>
+                <a:spcBef>
+                  <a:spcPts val="0"/>
+                </a:spcBef>
+                <a:spcAft>
+                  <a:spcPts val="0"/>
+                </a:spcAft>
+              </a:pPr>
+              <a:r>
+                <a:rPr sz="880">
+                  <a:solidFill>
+                    <a:srgbClr val="4D4D4D">
+                      <a:alpha val="100000"/>
+                    </a:srgbClr>
+                  </a:solidFill>
+                  <a:latin typeface="Helvetica"/>
+                  <a:cs typeface="Helvetica"/>
+                </a:rPr>
+                <a:t>1</a:t>
+              </a:r>
+            </a:p>
+          </p:txBody>
+        </p:sp>
+        <p:sp>
+          <p:nvSpPr>
+            <p:cNvPr id="81" name="tx81"/>
+            <p:cNvSpPr/>
+            <p:nvPr/>
+          </p:nvSpPr>
+          <p:spPr>
+            <a:xfrm>
+              <a:off x="762297" y="4954968"/>
+              <a:ext cx="62179" cy="80101"/>
+            </a:xfrm>
+            <a:prstGeom prst="rect">
+              <a:avLst/>
+            </a:prstGeom>
+            <a:noFill/>
+          </p:spPr>
+          <p:txBody>
+            <a:bodyPr lIns="0" rIns="0" tIns="0" bIns="0" anchorCtr="1" anchor="ctr" wrap="none"/>
+            <a:lstStyle/>
+            <a:p>
+              <a:pPr algn="l" marL="0" marR="0" indent="0">
+                <a:lnSpc>
+                  <a:spcPts val="880"/>
+                </a:lnSpc>
+                <a:spcBef>
+                  <a:spcPts val="0"/>
+                </a:spcBef>
+                <a:spcAft>
+                  <a:spcPts val="0"/>
+                </a:spcAft>
+              </a:pPr>
+              <a:r>
+                <a:rPr sz="880">
+                  <a:solidFill>
+                    <a:srgbClr val="4D4D4D">
+                      <a:alpha val="100000"/>
+                    </a:srgbClr>
+                  </a:solidFill>
+                  <a:latin typeface="Helvetica"/>
+                  <a:cs typeface="Helvetica"/>
+                </a:rPr>
+                <a:t>2</a:t>
+              </a:r>
+            </a:p>
+          </p:txBody>
+        </p:sp>
+        <p:sp>
+          <p:nvSpPr>
+            <p:cNvPr id="82" name="tx82"/>
+            <p:cNvSpPr/>
+            <p:nvPr/>
+          </p:nvSpPr>
+          <p:spPr>
+            <a:xfrm>
+              <a:off x="762297" y="4655634"/>
+              <a:ext cx="62179" cy="80101"/>
+            </a:xfrm>
+            <a:prstGeom prst="rect">
+              <a:avLst/>
+            </a:prstGeom>
+            <a:noFill/>
+          </p:spPr>
+          <p:txBody>
+            <a:bodyPr lIns="0" rIns="0" tIns="0" bIns="0" anchorCtr="1" anchor="ctr" wrap="none"/>
+            <a:lstStyle/>
+            <a:p>
+              <a:pPr algn="l" marL="0" marR="0" indent="0">
+                <a:lnSpc>
+                  <a:spcPts val="880"/>
+                </a:lnSpc>
+                <a:spcBef>
+                  <a:spcPts val="0"/>
+                </a:spcBef>
+                <a:spcAft>
+                  <a:spcPts val="0"/>
+                </a:spcAft>
+              </a:pPr>
+              <a:r>
+                <a:rPr sz="880">
+                  <a:solidFill>
+                    <a:srgbClr val="4D4D4D">
+                      <a:alpha val="100000"/>
+                    </a:srgbClr>
+                  </a:solidFill>
+                  <a:latin typeface="Helvetica"/>
+                  <a:cs typeface="Helvetica"/>
+                </a:rPr>
+                <a:t>3</a:t>
+              </a:r>
+            </a:p>
+          </p:txBody>
+        </p:sp>
+        <p:sp>
+          <p:nvSpPr>
+            <p:cNvPr id="83" name="tx83"/>
+            <p:cNvSpPr/>
+            <p:nvPr/>
+          </p:nvSpPr>
+          <p:spPr>
+            <a:xfrm>
+              <a:off x="762297" y="4356300"/>
+              <a:ext cx="62179" cy="80101"/>
+            </a:xfrm>
+            <a:prstGeom prst="rect">
+              <a:avLst/>
+            </a:prstGeom>
+            <a:noFill/>
+          </p:spPr>
+          <p:txBody>
+            <a:bodyPr lIns="0" rIns="0" tIns="0" bIns="0" anchorCtr="1" anchor="ctr" wrap="none"/>
+            <a:lstStyle/>
+            <a:p>
+              <a:pPr algn="l" marL="0" marR="0" indent="0">
+                <a:lnSpc>
+                  <a:spcPts val="880"/>
+                </a:lnSpc>
+                <a:spcBef>
+                  <a:spcPts val="0"/>
+                </a:spcBef>
+                <a:spcAft>
+                  <a:spcPts val="0"/>
+                </a:spcAft>
+              </a:pPr>
+              <a:r>
+                <a:rPr sz="880">
+                  <a:solidFill>
+                    <a:srgbClr val="4D4D4D">
+                      <a:alpha val="100000"/>
+                    </a:srgbClr>
+                  </a:solidFill>
+                  <a:latin typeface="Helvetica"/>
+                  <a:cs typeface="Helvetica"/>
+                </a:rPr>
+                <a:t>4</a:t>
+              </a:r>
+            </a:p>
+          </p:txBody>
+        </p:sp>
+        <p:sp>
+          <p:nvSpPr>
+            <p:cNvPr id="84" name="tx84"/>
+            <p:cNvSpPr/>
+            <p:nvPr/>
+          </p:nvSpPr>
+          <p:spPr>
+            <a:xfrm>
+              <a:off x="1346003" y="5716183"/>
+              <a:ext cx="161574" cy="80101"/>
+            </a:xfrm>
+            <a:prstGeom prst="rect">
+              <a:avLst/>
+            </a:prstGeom>
+            <a:noFill/>
+          </p:spPr>
+          <p:txBody>
+            <a:bodyPr lIns="0" rIns="0" tIns="0" bIns="0" anchorCtr="1" anchor="ctr" wrap="none"/>
+            <a:lstStyle/>
+            <a:p>
+              <a:pPr algn="l" marL="0" marR="0" indent="0">
+                <a:lnSpc>
+                  <a:spcPts val="880"/>
+                </a:lnSpc>
+                <a:spcBef>
+                  <a:spcPts val="0"/>
+                </a:spcBef>
+                <a:spcAft>
+                  <a:spcPts val="0"/>
+                </a:spcAft>
+              </a:pPr>
+              <a:r>
+                <a:rPr sz="880">
+                  <a:solidFill>
+                    <a:srgbClr val="4D4D4D">
+                      <a:alpha val="100000"/>
+                    </a:srgbClr>
+                  </a:solidFill>
+                  <a:latin typeface="Helvetica"/>
+                  <a:cs typeface="Helvetica"/>
+                </a:rPr>
+                <a:t>-50</a:t>
+              </a:r>
+            </a:p>
+          </p:txBody>
+        </p:sp>
+        <p:sp>
+          <p:nvSpPr>
+            <p:cNvPr id="85" name="tx85"/>
+            <p:cNvSpPr/>
+            <p:nvPr/>
+          </p:nvSpPr>
+          <p:spPr>
+            <a:xfrm>
+              <a:off x="2196512" y="5716183"/>
+              <a:ext cx="161574" cy="80101"/>
+            </a:xfrm>
+            <a:prstGeom prst="rect">
+              <a:avLst/>
+            </a:prstGeom>
+            <a:noFill/>
+          </p:spPr>
+          <p:txBody>
+            <a:bodyPr lIns="0" rIns="0" tIns="0" bIns="0" anchorCtr="1" anchor="ctr" wrap="none"/>
+            <a:lstStyle/>
+            <a:p>
+              <a:pPr algn="l" marL="0" marR="0" indent="0">
+                <a:lnSpc>
+                  <a:spcPts val="880"/>
+                </a:lnSpc>
+                <a:spcBef>
+                  <a:spcPts val="0"/>
+                </a:spcBef>
+                <a:spcAft>
+                  <a:spcPts val="0"/>
+                </a:spcAft>
+              </a:pPr>
+              <a:r>
+                <a:rPr sz="880">
+                  <a:solidFill>
+                    <a:srgbClr val="4D4D4D">
+                      <a:alpha val="100000"/>
+                    </a:srgbClr>
+                  </a:solidFill>
+                  <a:latin typeface="Helvetica"/>
+                  <a:cs typeface="Helvetica"/>
+                </a:rPr>
+                <a:t>-40</a:t>
+              </a:r>
+            </a:p>
+          </p:txBody>
+        </p:sp>
+        <p:sp>
+          <p:nvSpPr>
+            <p:cNvPr id="86" name="tx86"/>
+            <p:cNvSpPr/>
+            <p:nvPr/>
+          </p:nvSpPr>
+          <p:spPr>
+            <a:xfrm>
+              <a:off x="3047022" y="5716183"/>
+              <a:ext cx="161574" cy="80101"/>
+            </a:xfrm>
+            <a:prstGeom prst="rect">
+              <a:avLst/>
+            </a:prstGeom>
+            <a:noFill/>
+          </p:spPr>
+          <p:txBody>
+            <a:bodyPr lIns="0" rIns="0" tIns="0" bIns="0" anchorCtr="1" anchor="ctr" wrap="none"/>
+            <a:lstStyle/>
+            <a:p>
+              <a:pPr algn="l" marL="0" marR="0" indent="0">
+                <a:lnSpc>
+                  <a:spcPts val="880"/>
+                </a:lnSpc>
+                <a:spcBef>
+                  <a:spcPts val="0"/>
+                </a:spcBef>
+                <a:spcAft>
+                  <a:spcPts val="0"/>
+                </a:spcAft>
+              </a:pPr>
+              <a:r>
+                <a:rPr sz="880">
+                  <a:solidFill>
+                    <a:srgbClr val="4D4D4D">
+                      <a:alpha val="100000"/>
+                    </a:srgbClr>
+                  </a:solidFill>
+                  <a:latin typeface="Helvetica"/>
+                  <a:cs typeface="Helvetica"/>
+                </a:rPr>
+                <a:t>-30</a:t>
+              </a:r>
+            </a:p>
+          </p:txBody>
+        </p:sp>
+        <p:sp>
+          <p:nvSpPr>
+            <p:cNvPr id="87" name="tx87"/>
+            <p:cNvSpPr/>
+            <p:nvPr/>
+          </p:nvSpPr>
+          <p:spPr>
+            <a:xfrm>
+              <a:off x="3897531" y="5716183"/>
+              <a:ext cx="161574" cy="80101"/>
+            </a:xfrm>
+            <a:prstGeom prst="rect">
+              <a:avLst/>
+            </a:prstGeom>
+            <a:noFill/>
+          </p:spPr>
+          <p:txBody>
+            <a:bodyPr lIns="0" rIns="0" tIns="0" bIns="0" anchorCtr="1" anchor="ctr" wrap="none"/>
+            <a:lstStyle/>
+            <a:p>
+              <a:pPr algn="l" marL="0" marR="0" indent="0">
+                <a:lnSpc>
+                  <a:spcPts val="880"/>
+                </a:lnSpc>
+                <a:spcBef>
+                  <a:spcPts val="0"/>
+                </a:spcBef>
+                <a:spcAft>
+                  <a:spcPts val="0"/>
+                </a:spcAft>
+              </a:pPr>
+              <a:r>
+                <a:rPr sz="880">
+                  <a:solidFill>
+                    <a:srgbClr val="4D4D4D">
+                      <a:alpha val="100000"/>
+                    </a:srgbClr>
+                  </a:solidFill>
+                  <a:latin typeface="Helvetica"/>
+                  <a:cs typeface="Helvetica"/>
+                </a:rPr>
+                <a:t>-20</a:t>
+              </a:r>
+            </a:p>
+          </p:txBody>
+        </p:sp>
+        <p:sp>
+          <p:nvSpPr>
+            <p:cNvPr id="88" name="tx88"/>
+            <p:cNvSpPr/>
+            <p:nvPr/>
+          </p:nvSpPr>
+          <p:spPr>
+            <a:xfrm>
+              <a:off x="4748041" y="5716183"/>
+              <a:ext cx="161574" cy="80101"/>
+            </a:xfrm>
+            <a:prstGeom prst="rect">
+              <a:avLst/>
+            </a:prstGeom>
+            <a:noFill/>
+          </p:spPr>
+          <p:txBody>
+            <a:bodyPr lIns="0" rIns="0" tIns="0" bIns="0" anchorCtr="1" anchor="ctr" wrap="none"/>
+            <a:lstStyle/>
+            <a:p>
+              <a:pPr algn="l" marL="0" marR="0" indent="0">
+                <a:lnSpc>
+                  <a:spcPts val="880"/>
+                </a:lnSpc>
+                <a:spcBef>
+                  <a:spcPts val="0"/>
+                </a:spcBef>
+                <a:spcAft>
+                  <a:spcPts val="0"/>
+                </a:spcAft>
+              </a:pPr>
+              <a:r>
+                <a:rPr sz="880">
+                  <a:solidFill>
+                    <a:srgbClr val="4D4D4D">
+                      <a:alpha val="100000"/>
+                    </a:srgbClr>
+                  </a:solidFill>
+                  <a:latin typeface="Helvetica"/>
+                  <a:cs typeface="Helvetica"/>
+                </a:rPr>
+                <a:t>-10</a:t>
+              </a:r>
+            </a:p>
+          </p:txBody>
+        </p:sp>
+        <p:sp>
+          <p:nvSpPr>
+            <p:cNvPr id="89" name="tx89"/>
+            <p:cNvSpPr/>
+            <p:nvPr/>
+          </p:nvSpPr>
+          <p:spPr>
+            <a:xfrm>
+              <a:off x="5648248" y="5716183"/>
+              <a:ext cx="62179" cy="80101"/>
+            </a:xfrm>
+            <a:prstGeom prst="rect">
+              <a:avLst/>
+            </a:prstGeom>
+            <a:noFill/>
+          </p:spPr>
+          <p:txBody>
+            <a:bodyPr lIns="0" rIns="0" tIns="0" bIns="0" anchorCtr="1" anchor="ctr" wrap="none"/>
+            <a:lstStyle/>
+            <a:p>
+              <a:pPr algn="l" marL="0" marR="0" indent="0">
+                <a:lnSpc>
+                  <a:spcPts val="880"/>
+                </a:lnSpc>
+                <a:spcBef>
+                  <a:spcPts val="0"/>
+                </a:spcBef>
+                <a:spcAft>
+                  <a:spcPts val="0"/>
+                </a:spcAft>
+              </a:pPr>
+              <a:r>
+                <a:rPr sz="880">
+                  <a:solidFill>
+                    <a:srgbClr val="4D4D4D">
+                      <a:alpha val="100000"/>
+                    </a:srgbClr>
+                  </a:solidFill>
+                  <a:latin typeface="Helvetica"/>
+                  <a:cs typeface="Helvetica"/>
+                </a:rPr>
+                <a:t>0</a:t>
+              </a:r>
+            </a:p>
+          </p:txBody>
+        </p:sp>
+        <p:sp>
+          <p:nvSpPr>
+            <p:cNvPr id="90" name="tx90"/>
+            <p:cNvSpPr/>
+            <p:nvPr/>
+          </p:nvSpPr>
+          <p:spPr>
+            <a:xfrm>
+              <a:off x="6467667" y="5716183"/>
+              <a:ext cx="124358" cy="80101"/>
+            </a:xfrm>
+            <a:prstGeom prst="rect">
+              <a:avLst/>
+            </a:prstGeom>
+            <a:noFill/>
+          </p:spPr>
+          <p:txBody>
+            <a:bodyPr lIns="0" rIns="0" tIns="0" bIns="0" anchorCtr="1" anchor="ctr" wrap="none"/>
+            <a:lstStyle/>
+            <a:p>
+              <a:pPr algn="l" marL="0" marR="0" indent="0">
+                <a:lnSpc>
+                  <a:spcPts val="880"/>
+                </a:lnSpc>
+                <a:spcBef>
+                  <a:spcPts val="0"/>
+                </a:spcBef>
+                <a:spcAft>
+                  <a:spcPts val="0"/>
+                </a:spcAft>
+              </a:pPr>
+              <a:r>
+                <a:rPr sz="880">
+                  <a:solidFill>
+                    <a:srgbClr val="4D4D4D">
+                      <a:alpha val="100000"/>
+                    </a:srgbClr>
+                  </a:solidFill>
+                  <a:latin typeface="Helvetica"/>
+                  <a:cs typeface="Helvetica"/>
+                </a:rPr>
+                <a:t>10</a:t>
+              </a:r>
+            </a:p>
+          </p:txBody>
+        </p:sp>
+        <p:sp>
+          <p:nvSpPr>
+            <p:cNvPr id="91" name="tx91"/>
+            <p:cNvSpPr/>
+            <p:nvPr/>
+          </p:nvSpPr>
+          <p:spPr>
+            <a:xfrm>
+              <a:off x="7318177" y="5716183"/>
+              <a:ext cx="124358" cy="80101"/>
+            </a:xfrm>
+            <a:prstGeom prst="rect">
+              <a:avLst/>
+            </a:prstGeom>
+            <a:noFill/>
+          </p:spPr>
+          <p:txBody>
+            <a:bodyPr lIns="0" rIns="0" tIns="0" bIns="0" anchorCtr="1" anchor="ctr" wrap="none"/>
+            <a:lstStyle/>
+            <a:p>
+              <a:pPr algn="l" marL="0" marR="0" indent="0">
+                <a:lnSpc>
+                  <a:spcPts val="880"/>
+                </a:lnSpc>
+                <a:spcBef>
+                  <a:spcPts val="0"/>
+                </a:spcBef>
+                <a:spcAft>
+                  <a:spcPts val="0"/>
+                </a:spcAft>
+              </a:pPr>
+              <a:r>
+                <a:rPr sz="880">
+                  <a:solidFill>
+                    <a:srgbClr val="4D4D4D">
+                      <a:alpha val="100000"/>
+                    </a:srgbClr>
+                  </a:solidFill>
+                  <a:latin typeface="Helvetica"/>
+                  <a:cs typeface="Helvetica"/>
+                </a:rPr>
+                <a:t>20</a:t>
+              </a:r>
+            </a:p>
+          </p:txBody>
+        </p:sp>
+        <p:sp>
+          <p:nvSpPr>
+            <p:cNvPr id="92" name="tx92"/>
+            <p:cNvSpPr/>
+            <p:nvPr/>
+          </p:nvSpPr>
+          <p:spPr>
+            <a:xfrm>
+              <a:off x="8168686" y="5716183"/>
+              <a:ext cx="124358" cy="80101"/>
+            </a:xfrm>
+            <a:prstGeom prst="rect">
+              <a:avLst/>
+            </a:prstGeom>
+            <a:noFill/>
+          </p:spPr>
+          <p:txBody>
+            <a:bodyPr lIns="0" rIns="0" tIns="0" bIns="0" anchorCtr="1" anchor="ctr" wrap="none"/>
+            <a:lstStyle/>
+            <a:p>
+              <a:pPr algn="l" marL="0" marR="0" indent="0">
+                <a:lnSpc>
+                  <a:spcPts val="880"/>
+                </a:lnSpc>
+                <a:spcBef>
+                  <a:spcPts val="0"/>
+                </a:spcBef>
+                <a:spcAft>
+                  <a:spcPts val="0"/>
+                </a:spcAft>
+              </a:pPr>
+              <a:r>
+                <a:rPr sz="880">
+                  <a:solidFill>
+                    <a:srgbClr val="4D4D4D">
+                      <a:alpha val="100000"/>
+                    </a:srgbClr>
+                  </a:solidFill>
+                  <a:latin typeface="Helvetica"/>
+                  <a:cs typeface="Helvetica"/>
+                </a:rPr>
+                <a:t>30</a:t>
+              </a:r>
+            </a:p>
+          </p:txBody>
+        </p:sp>
+        <p:sp>
+          <p:nvSpPr>
+            <p:cNvPr id="93" name="tx93"/>
+            <p:cNvSpPr/>
+            <p:nvPr/>
+          </p:nvSpPr>
+          <p:spPr>
+            <a:xfrm>
+              <a:off x="1561815" y="5855859"/>
+              <a:ext cx="6311097" cy="100218"/>
+            </a:xfrm>
+            <a:prstGeom prst="rect">
+              <a:avLst/>
+            </a:prstGeom>
+            <a:noFill/>
+          </p:spPr>
+          <p:txBody>
+            <a:bodyPr lIns="0" rIns="0" tIns="0" bIns="0" anchorCtr="1" anchor="ctr" wrap="none"/>
+            <a:lstStyle/>
+            <a:p>
+              <a:pPr algn="l" marL="0" marR="0" indent="0">
+                <a:lnSpc>
+                  <a:spcPts val="1100"/>
+                </a:lnSpc>
+                <a:spcBef>
+                  <a:spcPts val="0"/>
+                </a:spcBef>
+                <a:spcAft>
+                  <a:spcPts val="0"/>
+                </a:spcAft>
+              </a:pPr>
+              <a:r>
+                <a:rPr sz="1100">
+                  <a:solidFill>
+                    <a:srgbClr val="000000">
+                      <a:alpha val="100000"/>
+                    </a:srgbClr>
+                  </a:solidFill>
+                  <a:latin typeface="Helvetica"/>
+                  <a:cs typeface="Helvetica"/>
+                </a:rPr>
+                <a:t>Sensitivity eGFR Difference (%): 100 × (CKD-EPI 2012 CysC − CKD-EPI 2021 Cr) / CKD-EPI 2021 Cr</a:t>
+              </a:r>
+            </a:p>
+          </p:txBody>
+        </p:sp>
+        <p:sp>
+          <p:nvSpPr>
+            <p:cNvPr id="94" name="tx94"/>
+            <p:cNvSpPr/>
+            <p:nvPr/>
+          </p:nvSpPr>
+          <p:spPr>
+            <a:xfrm rot="-5400000">
+              <a:off x="138035" y="4944909"/>
+              <a:ext cx="1016904" cy="100218"/>
+            </a:xfrm>
+            <a:prstGeom prst="rect">
+              <a:avLst/>
+            </a:prstGeom>
+            <a:noFill/>
+          </p:spPr>
+          <p:txBody>
+            <a:bodyPr lIns="0" rIns="0" tIns="0" bIns="0" anchorCtr="1" anchor="ctr" wrap="none"/>
+            <a:lstStyle/>
+            <a:p>
+              <a:pPr algn="l" marL="0" marR="0" indent="0">
+                <a:lnSpc>
+                  <a:spcPts val="1100"/>
+                </a:lnSpc>
+                <a:spcBef>
+                  <a:spcPts val="0"/>
+                </a:spcBef>
+                <a:spcAft>
+                  <a:spcPts val="0"/>
+                </a:spcAft>
+              </a:pPr>
+              <a:r>
+                <a:rPr sz="1100">
+                  <a:solidFill>
+                    <a:srgbClr val="000000">
+                      <a:alpha val="100000"/>
+                    </a:srgbClr>
+                  </a:solidFill>
+                  <a:latin typeface="Helvetica"/>
+                  <a:cs typeface="Helvetica"/>
+                </a:rPr>
+                <a:t>subHR (95% CI)</a:t>
+              </a:r>
+            </a:p>
+          </p:txBody>
+        </p:sp>
+        <p:sp>
+          <p:nvSpPr>
+            <p:cNvPr id="95" name="tx95"/>
+            <p:cNvSpPr/>
+            <p:nvPr/>
+          </p:nvSpPr>
+          <p:spPr>
+            <a:xfrm>
+              <a:off x="887106" y="4159544"/>
+              <a:ext cx="6959864" cy="82021"/>
+            </a:xfrm>
+            <a:prstGeom prst="rect">
+              <a:avLst/>
+            </a:prstGeom>
+            <a:noFill/>
+          </p:spPr>
+          <p:txBody>
+            <a:bodyPr lIns="0" rIns="0" tIns="0" bIns="0" anchorCtr="1" anchor="ctr" wrap="none"/>
+            <a:lstStyle/>
+            <a:p>
+              <a:pPr algn="l" marL="0" marR="0" indent="0">
+                <a:lnSpc>
+                  <a:spcPts val="900"/>
+                </a:lnSpc>
+                <a:spcBef>
+                  <a:spcPts val="0"/>
+                </a:spcBef>
+                <a:spcAft>
+                  <a:spcPts val="0"/>
+                </a:spcAft>
+              </a:pPr>
+              <a:r>
+                <a:rPr sz="900">
+                  <a:solidFill>
+                    <a:srgbClr val="404040">
+                      <a:alpha val="100000"/>
+                    </a:srgbClr>
+                  </a:solidFill>
+                  <a:latin typeface="Helvetica"/>
+                  <a:cs typeface="Helvetica"/>
+                </a:rPr>
+                <a:t>subHR per 10 % decline: 1.15 (0.96-1.38), p_Bonf = 0.755 (n = 6)  |  per IQR decline (Δ = 28.0 %): 1.48 (0.90-2.46)  |  IQR: [-30.0, -2.0] %</a:t>
+              </a:r>
+            </a:p>
+          </p:txBody>
+        </p:sp>
+        <p:sp>
+          <p:nvSpPr>
+            <p:cNvPr id="96" name="tx96"/>
+            <p:cNvSpPr/>
+            <p:nvPr/>
+          </p:nvSpPr>
+          <p:spPr>
+            <a:xfrm>
+              <a:off x="887106" y="3932770"/>
               <a:ext cx="2830068" cy="120152"/>
             </a:xfrm>
             <a:prstGeom prst="rect">
